--- a/Recipe_Recommender_Presentation.pptx
+++ b/Recipe_Recommender_Presentation.pptx
@@ -13,6 +13,11 @@
     <p:sldId id="261" r:id="rId12"/>
     <p:sldId id="262" r:id="rId13"/>
     <p:sldId id="263" r:id="rId14"/>
+    <p:sldId id="264" r:id="rId15"/>
+    <p:sldId id="265" r:id="rId16"/>
+    <p:sldId id="266" r:id="rId17"/>
+    <p:sldId id="267" r:id="rId18"/>
+    <p:sldId id="268" r:id="rId19"/>
   </p:sldIdLst>
   <p:sldSz cx="12191695" cy="6858000" type="screen4x3"/>
   <p:notesSz cx="6858000" cy="9144000"/>
@@ -3163,7 +3168,7 @@
           <a:lstStyle/>
           <a:p>
             <a:pPr>
-              <a:defRPr sz="3800" b="1">
+              <a:defRPr sz="4000" b="1">
                 <a:solidFill>
                   <a:srgbClr val="111827"/>
                 </a:solidFill>
@@ -3171,23 +3176,23 @@
               </a:defRPr>
             </a:pPr>
             <a:r>
-              <a:t>Recipe Recommender System</a:t>
+              <a:t>Recipe Recommendations</a:t>
             </a:r>
           </a:p>
           <a:p>
             <a:pPr>
               <a:spcBef>
-                <a:spcPts val="800"/>
+                <a:spcPts val="1000"/>
               </a:spcBef>
               <a:defRPr sz="2200">
                 <a:solidFill>
-                  <a:srgbClr val="2563EB"/>
+                  <a:srgbClr val="1E40AF"/>
                 </a:solidFill>
                 <a:latin typeface="Arial"/>
               </a:defRPr>
             </a:pPr>
             <a:r>
-              <a:t>Collaborative Filtering on Food.com Recipes &amp; User Interactions</a:t>
+              <a:t>Collaborative Filtering, Clustering, and Content Based Methods on Food.com</a:t>
             </a:r>
           </a:p>
           <a:p>
@@ -3203,7 +3208,7 @@
               </a:defRPr>
             </a:pPr>
             <a:r>
-              <a:t>Evaluated via Neighborhood Models (KNN, SlopeOne), Matrix Factorization (SVD, SVD++, NMF) &amp; CoClustering</a:t>
+              <a:t>Predicting Recipe Ratings and Generating Personalized Recommendations from Historical Interactions</a:t>
             </a:r>
           </a:p>
         </p:txBody>
@@ -3274,7 +3279,7 @@
                 </a:solidFill>
                 <a:latin typeface="Arial"/>
               </a:rPr>
-              <a:t>Author / Researcher: </a:t>
+              <a:t>Author and Researcher: </a:t>
             </a:r>
             <a:r>
               <a:rPr sz="1150">
@@ -3308,7 +3313,7 @@
                 </a:solidFill>
                 <a:latin typeface="Arial"/>
               </a:rPr>
-              <a:t>Comparative study of Neighborhood &amp; Matrix Factorization Collaborative Filtering</a:t>
+              <a:t>Comparative study of Collaborative Filtering, CoClustering, and Content Based Models</a:t>
             </a:r>
           </a:p>
           <a:p>
@@ -3324,7 +3329,7 @@
                 </a:solidFill>
                 <a:latin typeface="Arial"/>
               </a:rPr>
-              <a:t>Dataset: </a:t>
+              <a:t>Dataset Source: </a:t>
             </a:r>
             <a:r>
               <a:rPr sz="1150">
@@ -3333,7 +3338,7 @@
                 </a:solidFill>
                 <a:latin typeface="Arial"/>
               </a:rPr>
-              <a:t>Food.com (formerly GeniusKitchen) — 180K+ Recipes &amp; 700K+ Reviews (Majumder et al., EMNLP 2019)</a:t>
+              <a:t>Food.com formerly GeniusKitchen with 180K recipes and 700K reviews (Majumder et al., EMNLP 2019)</a:t>
             </a:r>
           </a:p>
           <a:p>
@@ -3349,7 +3354,7 @@
                 </a:solidFill>
                 <a:latin typeface="Arial"/>
               </a:rPr>
-              <a:t>Tooling &amp; Frameworks: </a:t>
+              <a:t>Libraries and Frameworks: </a:t>
             </a:r>
             <a:r>
               <a:rPr sz="1150">
@@ -3358,7 +3363,7 @@
                 </a:solidFill>
                 <a:latin typeface="Arial"/>
               </a:rPr>
-              <a:t>Python, Scikit-Surprise, Pandas, NumPy, Scikit-Learn, Matplotlib</a:t>
+              <a:t>Python, Scikit Surprise, Pandas, NumPy, Scikit Learn, Matplotlib, NLTK</a:t>
             </a:r>
           </a:p>
           <a:p>
@@ -3374,7 +3379,7 @@
                 </a:solidFill>
                 <a:latin typeface="Arial"/>
               </a:rPr>
-              <a:t>GitHub Repository: </a:t>
+              <a:t>Project Repository: </a:t>
             </a:r>
             <a:r>
               <a:rPr sz="1150">
@@ -3383,7 +3388,2024 @@
                 </a:solidFill>
                 <a:latin typeface="Arial"/>
               </a:rPr>
-              <a:t>https://github.com/vidhyawalke/-Recipe-Recommender-Collaborative-Filtering-on-Food.com-Recipes-Interactions</a:t>
+              <a:t>Food.com Recipe Recommendation System by Vidhya Walke</a:t>
+            </a:r>
+          </a:p>
+        </p:txBody>
+      </p:sp>
+    </p:spTree>
+  </p:cSld>
+  <p:clrMapOvr>
+    <a:masterClrMapping/>
+  </p:clrMapOvr>
+</p:sld>
+</file>
+
+<file path=ppt/slides/slide10.xml><?xml version="1.0" encoding="utf-8"?>
+<p:sld xmlns:a="http://schemas.openxmlformats.org/drawingml/2006/main" xmlns:p="http://schemas.openxmlformats.org/presentationml/2006/main" xmlns:r="http://schemas.openxmlformats.org/officeDocument/2006/relationships">
+  <p:cSld>
+    <p:spTree>
+      <p:nvGrpSpPr>
+        <p:cNvPr id="1" name=""/>
+        <p:cNvGrpSpPr/>
+        <p:nvPr/>
+      </p:nvGrpSpPr>
+      <p:grpSpPr/>
+      <p:sp>
+        <p:nvSpPr>
+          <p:cNvPr id="2" name="Rectangle 1"/>
+          <p:cNvSpPr/>
+          <p:nvPr/>
+        </p:nvSpPr>
+        <p:spPr>
+          <a:xfrm>
+            <a:off x="0" y="0"/>
+            <a:ext cx="12191695" cy="6858000"/>
+          </a:xfrm>
+          <a:prstGeom prst="rect">
+            <a:avLst/>
+          </a:prstGeom>
+          <a:solidFill>
+            <a:srgbClr val="FFFFFF"/>
+          </a:solidFill>
+          <a:ln>
+            <a:solidFill>
+              <a:srgbClr val="FFFFFF"/>
+            </a:solidFill>
+          </a:ln>
+        </p:spPr>
+        <p:style>
+          <a:lnRef idx="1">
+            <a:schemeClr val="accent1"/>
+          </a:lnRef>
+          <a:fillRef idx="3">
+            <a:schemeClr val="accent1"/>
+          </a:fillRef>
+          <a:effectRef idx="2">
+            <a:schemeClr val="accent1"/>
+          </a:effectRef>
+          <a:fontRef idx="minor">
+            <a:schemeClr val="lt1"/>
+          </a:fontRef>
+        </p:style>
+        <p:txBody>
+          <a:bodyPr rtlCol="0" anchor="ctr"/>
+          <a:lstStyle/>
+          <a:p>
+            <a:pPr algn="ctr"/>
+          </a:p>
+        </p:txBody>
+      </p:sp>
+      <p:sp>
+        <p:nvSpPr>
+          <p:cNvPr id="3" name="TextBox 2"/>
+          <p:cNvSpPr txBox="1"/>
+          <p:nvPr/>
+        </p:nvSpPr>
+        <p:spPr>
+          <a:xfrm>
+            <a:off x="640080" y="365760"/>
+            <a:ext cx="10972800" cy="731520"/>
+          </a:xfrm>
+          <a:prstGeom prst="rect">
+            <a:avLst/>
+          </a:prstGeom>
+          <a:noFill/>
+        </p:spPr>
+        <p:txBody>
+          <a:bodyPr wrap="square" lIns="0" tIns="0" rIns="0" bIns="0">
+            <a:spAutoFit/>
+          </a:bodyPr>
+          <a:lstStyle/>
+          <a:p>
+            <a:pPr>
+              <a:defRPr sz="2800" b="0">
+                <a:solidFill>
+                  <a:srgbClr val="111827"/>
+                </a:solidFill>
+                <a:latin typeface="Arial"/>
+              </a:defRPr>
+            </a:pPr>
+            <a:r>
+              <a:t>Description of Approach: Content Based</a:t>
+            </a:r>
+          </a:p>
+        </p:txBody>
+      </p:sp>
+      <p:sp>
+        <p:nvSpPr>
+          <p:cNvPr id="4" name="TextBox 3"/>
+          <p:cNvSpPr txBox="1"/>
+          <p:nvPr/>
+        </p:nvSpPr>
+        <p:spPr>
+          <a:xfrm>
+            <a:off x="822960" y="1463040"/>
+            <a:ext cx="10515600" cy="4754880"/>
+          </a:xfrm>
+          <a:prstGeom prst="rect">
+            <a:avLst/>
+          </a:prstGeom>
+          <a:noFill/>
+        </p:spPr>
+        <p:txBody>
+          <a:bodyPr wrap="square">
+            <a:spAutoFit/>
+          </a:bodyPr>
+          <a:lstStyle/>
+          <a:p>
+            <a:pPr>
+              <a:defRPr sz="1500">
+                <a:solidFill>
+                  <a:srgbClr val="111827"/>
+                </a:solidFill>
+                <a:latin typeface="Arial"/>
+              </a:defRPr>
+            </a:pPr>
+            <a:r>
+              <a:t>•   Created a Top N type recommendation list using a personalized content based recommender</a:t>
+            </a:r>
+          </a:p>
+          <a:p>
+            <a:pPr>
+              <a:spcBef>
+                <a:spcPts val="2000"/>
+              </a:spcBef>
+              <a:defRPr sz="1500">
+                <a:solidFill>
+                  <a:srgbClr val="111827"/>
+                </a:solidFill>
+                <a:latin typeface="Arial"/>
+              </a:defRPr>
+            </a:pPr>
+            <a:r>
+              <a:t>•   Used the text descriptions of the recipes data set and combined them with the ratings on these recipes to create user profiles for each user</a:t>
+            </a:r>
+          </a:p>
+          <a:p>
+            <a:pPr>
+              <a:spcBef>
+                <a:spcPts val="2000"/>
+              </a:spcBef>
+              <a:defRPr sz="1500">
+                <a:solidFill>
+                  <a:srgbClr val="111827"/>
+                </a:solidFill>
+                <a:latin typeface="Arial"/>
+              </a:defRPr>
+            </a:pPr>
+            <a:r>
+              <a:t>•   Used the user profiles and liked item indices for each user to create Top N recommendation lists for specific users</a:t>
+            </a:r>
+          </a:p>
+          <a:p>
+            <a:pPr>
+              <a:spcBef>
+                <a:spcPts val="2000"/>
+              </a:spcBef>
+              <a:defRPr sz="1500">
+                <a:solidFill>
+                  <a:srgbClr val="111827"/>
+                </a:solidFill>
+                <a:latin typeface="Arial"/>
+              </a:defRPr>
+            </a:pPr>
+            <a:r>
+              <a:t>•   Used the recommendation lists and set aside test liked indices to calculate precision and recall metrics for a range of K values.</a:t>
+            </a:r>
+          </a:p>
+          <a:p>
+            <a:pPr>
+              <a:spcBef>
+                <a:spcPts val="2000"/>
+              </a:spcBef>
+              <a:defRPr sz="1500">
+                <a:solidFill>
+                  <a:srgbClr val="111827"/>
+                </a:solidFill>
+                <a:latin typeface="Arial"/>
+              </a:defRPr>
+            </a:pPr>
+            <a:r>
+              <a:t>•   First did it for specific users and then calculated precision and recall averages over all users.</a:t>
+            </a:r>
+          </a:p>
+        </p:txBody>
+      </p:sp>
+    </p:spTree>
+  </p:cSld>
+  <p:clrMapOvr>
+    <a:masterClrMapping/>
+  </p:clrMapOvr>
+</p:sld>
+</file>
+
+<file path=ppt/slides/slide11.xml><?xml version="1.0" encoding="utf-8"?>
+<p:sld xmlns:a="http://schemas.openxmlformats.org/drawingml/2006/main" xmlns:p="http://schemas.openxmlformats.org/presentationml/2006/main" xmlns:r="http://schemas.openxmlformats.org/officeDocument/2006/relationships">
+  <p:cSld>
+    <p:spTree>
+      <p:nvGrpSpPr>
+        <p:cNvPr id="1" name=""/>
+        <p:cNvGrpSpPr/>
+        <p:nvPr/>
+      </p:nvGrpSpPr>
+      <p:grpSpPr/>
+      <p:sp>
+        <p:nvSpPr>
+          <p:cNvPr id="2" name="Rectangle 1"/>
+          <p:cNvSpPr/>
+          <p:nvPr/>
+        </p:nvSpPr>
+        <p:spPr>
+          <a:xfrm>
+            <a:off x="0" y="0"/>
+            <a:ext cx="12191695" cy="6858000"/>
+          </a:xfrm>
+          <a:prstGeom prst="rect">
+            <a:avLst/>
+          </a:prstGeom>
+          <a:solidFill>
+            <a:srgbClr val="FFFFFF"/>
+          </a:solidFill>
+          <a:ln>
+            <a:solidFill>
+              <a:srgbClr val="FFFFFF"/>
+            </a:solidFill>
+          </a:ln>
+        </p:spPr>
+        <p:style>
+          <a:lnRef idx="1">
+            <a:schemeClr val="accent1"/>
+          </a:lnRef>
+          <a:fillRef idx="3">
+            <a:schemeClr val="accent1"/>
+          </a:fillRef>
+          <a:effectRef idx="2">
+            <a:schemeClr val="accent1"/>
+          </a:effectRef>
+          <a:fontRef idx="minor">
+            <a:schemeClr val="lt1"/>
+          </a:fontRef>
+        </p:style>
+        <p:txBody>
+          <a:bodyPr rtlCol="0" anchor="ctr"/>
+          <a:lstStyle/>
+          <a:p>
+            <a:pPr algn="ctr"/>
+          </a:p>
+        </p:txBody>
+      </p:sp>
+      <p:sp>
+        <p:nvSpPr>
+          <p:cNvPr id="3" name="TextBox 2"/>
+          <p:cNvSpPr txBox="1"/>
+          <p:nvPr/>
+        </p:nvSpPr>
+        <p:spPr>
+          <a:xfrm>
+            <a:off x="640080" y="365760"/>
+            <a:ext cx="10972800" cy="731520"/>
+          </a:xfrm>
+          <a:prstGeom prst="rect">
+            <a:avLst/>
+          </a:prstGeom>
+          <a:noFill/>
+        </p:spPr>
+        <p:txBody>
+          <a:bodyPr wrap="square" lIns="0" tIns="0" rIns="0" bIns="0">
+            <a:spAutoFit/>
+          </a:bodyPr>
+          <a:lstStyle/>
+          <a:p>
+            <a:pPr>
+              <a:defRPr sz="2800" b="0">
+                <a:solidFill>
+                  <a:srgbClr val="111827"/>
+                </a:solidFill>
+                <a:latin typeface="Arial"/>
+              </a:defRPr>
+            </a:pPr>
+            <a:r>
+              <a:t>Results: Content Based</a:t>
+            </a:r>
+          </a:p>
+        </p:txBody>
+      </p:sp>
+      <p:sp>
+        <p:nvSpPr>
+          <p:cNvPr id="4" name="TextBox 3"/>
+          <p:cNvSpPr txBox="1"/>
+          <p:nvPr/>
+        </p:nvSpPr>
+        <p:spPr>
+          <a:xfrm>
+            <a:off x="731520" y="1188720"/>
+            <a:ext cx="10698480" cy="731520"/>
+          </a:xfrm>
+          <a:prstGeom prst="rect">
+            <a:avLst/>
+          </a:prstGeom>
+          <a:noFill/>
+        </p:spPr>
+        <p:txBody>
+          <a:bodyPr wrap="square">
+            <a:spAutoFit/>
+          </a:bodyPr>
+          <a:lstStyle/>
+          <a:p>
+            <a:pPr>
+              <a:defRPr sz="1200">
+                <a:solidFill>
+                  <a:srgbClr val="111827"/>
+                </a:solidFill>
+                <a:latin typeface="Arial"/>
+              </a:defRPr>
+            </a:pPr>
+            <a:r>
+              <a:t>These are the initial results of the personalized content based model to recommend food items to a user based on their user profile. Here is the user profile of the liked items of a specific user:</a:t>
+            </a:r>
+          </a:p>
+        </p:txBody>
+      </p:sp>
+      <p:graphicFrame>
+        <p:nvGraphicFramePr>
+          <p:cNvPr id="5" name="Table 4"/>
+          <p:cNvGraphicFramePr>
+            <a:graphicFrameLocks noGrp="1"/>
+          </p:cNvGraphicFramePr>
+          <p:nvPr/>
+        </p:nvGraphicFramePr>
+        <p:xfrm>
+          <a:off x="731520" y="1920240"/>
+          <a:ext cx="10698480" cy="1371600"/>
+        </p:xfrm>
+        <a:graphic>
+          <a:graphicData uri="http://schemas.openxmlformats.org/drawingml/2006/table">
+            <a:tbl>
+              <a:tblPr firstRow="1" bandRow="1">
+                <a:tableStyleId>{5C22544A-7EE6-4342-B048-85BDC9FD1C3A}</a:tableStyleId>
+              </a:tblPr>
+              <a:tblGrid>
+                <a:gridCol w="2286000"/>
+                <a:gridCol w="8412480"/>
+              </a:tblGrid>
+              <a:tr h="457200">
+                <a:tc>
+                  <a:txBody>
+                    <a:bodyPr/>
+                    <a:lstStyle/>
+                    <a:p>
+                      <a:pPr>
+                        <a:defRPr sz="950" b="1">
+                          <a:solidFill>
+                            <a:srgbClr val="111827"/>
+                          </a:solidFill>
+                          <a:latin typeface="Arial"/>
+                        </a:defRPr>
+                      </a:pPr>
+                      <a:r>
+                        <a:t>name</a:t>
+                      </a:r>
+                    </a:p>
+                  </a:txBody>
+                  <a:tcPr/>
+                </a:tc>
+                <a:tc>
+                  <a:txBody>
+                    <a:bodyPr/>
+                    <a:lstStyle/>
+                    <a:p>
+                      <a:pPr>
+                        <a:defRPr sz="950" b="1">
+                          <a:solidFill>
+                            <a:srgbClr val="111827"/>
+                          </a:solidFill>
+                          <a:latin typeface="Arial"/>
+                        </a:defRPr>
+                      </a:pPr>
+                      <a:r>
+                        <a:t>description</a:t>
+                      </a:r>
+                    </a:p>
+                  </a:txBody>
+                  <a:tcPr/>
+                </a:tc>
+              </a:tr>
+              <a:tr h="457200">
+                <a:tc>
+                  <a:txBody>
+                    <a:bodyPr/>
+                    <a:lstStyle/>
+                    <a:p>
+                      <a:pPr>
+                        <a:defRPr sz="850">
+                          <a:solidFill>
+                            <a:srgbClr val="111827"/>
+                          </a:solidFill>
+                          <a:latin typeface="Arial"/>
+                        </a:defRPr>
+                      </a:pPr>
+                      <a:r>
+                        <a:t>land of nod cinnamon buns</a:t>
+                      </a:r>
+                    </a:p>
+                  </a:txBody>
+                  <a:tcPr/>
+                </a:tc>
+                <a:tc>
+                  <a:txBody>
+                    <a:bodyPr/>
+                    <a:lstStyle/>
+                    <a:p>
+                      <a:pPr>
+                        <a:defRPr sz="850">
+                          <a:solidFill>
+                            <a:srgbClr val="111827"/>
+                          </a:solidFill>
+                          <a:latin typeface="Arial"/>
+                        </a:defRPr>
+                      </a:pPr>
+                      <a:r>
+                        <a:t>i have made this several times and it is dead easy. if you have overnight guests, what could be easier for breakfast? i have made it on special occasions, too, such as easter morning and christmas morning, etc. this recipe comes from the best of bridge series.</a:t>
+                      </a:r>
+                    </a:p>
+                  </a:txBody>
+                  <a:tcPr/>
+                </a:tc>
+              </a:tr>
+              <a:tr h="457200">
+                <a:tc>
+                  <a:txBody>
+                    <a:bodyPr/>
+                    <a:lstStyle/>
+                    <a:p>
+                      <a:pPr>
+                        <a:defRPr sz="850">
+                          <a:solidFill>
+                            <a:srgbClr val="111827"/>
+                          </a:solidFill>
+                          <a:latin typeface="Arial"/>
+                        </a:defRPr>
+                      </a:pPr>
+                      <a:r>
+                        <a:t>put down your fork tuna and bean salad</a:t>
+                      </a:r>
+                    </a:p>
+                  </a:txBody>
+                  <a:tcPr/>
+                </a:tc>
+                <a:tc>
+                  <a:txBody>
+                    <a:bodyPr/>
+                    <a:lstStyle/>
+                    <a:p>
+                      <a:pPr>
+                        <a:defRPr sz="850">
+                          <a:solidFill>
+                            <a:srgbClr val="111827"/>
+                          </a:solidFill>
+                          <a:latin typeface="Arial"/>
+                        </a:defRPr>
+                      </a:pPr>
+                      <a:r>
+                        <a:t>the story behind this comes from a simple recipe i had found, then made changes to make our own. my husband loved it so much the first time i made it i literally had to say to him</a:t>
+                      </a:r>
+                    </a:p>
+                  </a:txBody>
+                  <a:tcPr/>
+                </a:tc>
+              </a:tr>
+            </a:tbl>
+          </a:graphicData>
+        </a:graphic>
+      </p:graphicFrame>
+      <p:sp>
+        <p:nvSpPr>
+          <p:cNvPr id="6" name="TextBox 5"/>
+          <p:cNvSpPr txBox="1"/>
+          <p:nvPr/>
+        </p:nvSpPr>
+        <p:spPr>
+          <a:xfrm>
+            <a:off x="731520" y="3383280"/>
+            <a:ext cx="10698480" cy="640080"/>
+          </a:xfrm>
+          <a:prstGeom prst="rect">
+            <a:avLst/>
+          </a:prstGeom>
+          <a:noFill/>
+        </p:spPr>
+        <p:txBody>
+          <a:bodyPr wrap="square">
+            <a:spAutoFit/>
+          </a:bodyPr>
+          <a:lstStyle/>
+          <a:p>
+            <a:pPr>
+              <a:defRPr sz="1200">
+                <a:solidFill>
+                  <a:srgbClr val="111827"/>
+                </a:solidFill>
+                <a:latin typeface="Arial"/>
+              </a:defRPr>
+            </a:pPr>
+            <a:r>
+              <a:t>Below are the Top 5 recommended items for this user, as you can see some of the recommended items are similar to the user profile items but some are not.</a:t>
+            </a:r>
+          </a:p>
+        </p:txBody>
+      </p:sp>
+      <p:graphicFrame>
+        <p:nvGraphicFramePr>
+          <p:cNvPr id="7" name="Table 6"/>
+          <p:cNvGraphicFramePr>
+            <a:graphicFrameLocks noGrp="1"/>
+          </p:cNvGraphicFramePr>
+          <p:nvPr/>
+        </p:nvGraphicFramePr>
+        <p:xfrm>
+          <a:off x="731520" y="4023360"/>
+          <a:ext cx="10698480" cy="2468880"/>
+        </p:xfrm>
+        <a:graphic>
+          <a:graphicData uri="http://schemas.openxmlformats.org/drawingml/2006/table">
+            <a:tbl>
+              <a:tblPr firstRow="1" bandRow="1">
+                <a:tableStyleId>{5C22544A-7EE6-4342-B048-85BDC9FD1C3A}</a:tableStyleId>
+              </a:tblPr>
+              <a:tblGrid>
+                <a:gridCol w="2286000"/>
+                <a:gridCol w="8412480"/>
+              </a:tblGrid>
+              <a:tr h="411480">
+                <a:tc>
+                  <a:txBody>
+                    <a:bodyPr/>
+                    <a:lstStyle/>
+                    <a:p>
+                      <a:pPr>
+                        <a:defRPr sz="950" b="1">
+                          <a:solidFill>
+                            <a:srgbClr val="111827"/>
+                          </a:solidFill>
+                          <a:latin typeface="Arial"/>
+                        </a:defRPr>
+                      </a:pPr>
+                      <a:r>
+                        <a:t>name</a:t>
+                      </a:r>
+                    </a:p>
+                  </a:txBody>
+                  <a:tcPr/>
+                </a:tc>
+                <a:tc>
+                  <a:txBody>
+                    <a:bodyPr/>
+                    <a:lstStyle/>
+                    <a:p>
+                      <a:pPr>
+                        <a:defRPr sz="950" b="1">
+                          <a:solidFill>
+                            <a:srgbClr val="111827"/>
+                          </a:solidFill>
+                          <a:latin typeface="Arial"/>
+                        </a:defRPr>
+                      </a:pPr>
+                      <a:r>
+                        <a:t>description</a:t>
+                      </a:r>
+                    </a:p>
+                  </a:txBody>
+                  <a:tcPr/>
+                </a:tc>
+              </a:tr>
+              <a:tr h="411480">
+                <a:tc>
+                  <a:txBody>
+                    <a:bodyPr/>
+                    <a:lstStyle/>
+                    <a:p>
+                      <a:pPr>
+                        <a:defRPr sz="850">
+                          <a:solidFill>
+                            <a:srgbClr val="111827"/>
+                          </a:solidFill>
+                          <a:latin typeface="Arial"/>
+                        </a:defRPr>
+                      </a:pPr>
+                      <a:r>
+                        <a:t>chile rellenos</a:t>
+                      </a:r>
+                    </a:p>
+                  </a:txBody>
+                  <a:tcPr/>
+                </a:tc>
+                <a:tc>
+                  <a:txBody>
+                    <a:bodyPr/>
+                    <a:lstStyle/>
+                    <a:p>
+                      <a:pPr>
+                        <a:defRPr sz="850">
+                          <a:solidFill>
+                            <a:srgbClr val="111827"/>
+                          </a:solidFill>
+                          <a:latin typeface="Arial"/>
+                        </a:defRPr>
+                      </a:pPr>
+                      <a:r>
+                        <a:t>a favorite from a local restaurant no longer in business. not an authentic mexican chile relleno, but a crispy, flaky version.</a:t>
+                      </a:r>
+                    </a:p>
+                  </a:txBody>
+                  <a:tcPr/>
+                </a:tc>
+              </a:tr>
+              <a:tr h="411480">
+                <a:tc>
+                  <a:txBody>
+                    <a:bodyPr/>
+                    <a:lstStyle/>
+                    <a:p>
+                      <a:pPr>
+                        <a:defRPr sz="850">
+                          <a:solidFill>
+                            <a:srgbClr val="111827"/>
+                          </a:solidFill>
+                          <a:latin typeface="Arial"/>
+                        </a:defRPr>
+                      </a:pPr>
+                      <a:r>
+                        <a:t>chinese candy</a:t>
+                      </a:r>
+                    </a:p>
+                  </a:txBody>
+                  <a:tcPr/>
+                </a:tc>
+                <a:tc>
+                  <a:txBody>
+                    <a:bodyPr/>
+                    <a:lstStyle/>
+                    <a:p>
+                      <a:pPr>
+                        <a:defRPr sz="850">
+                          <a:solidFill>
+                            <a:srgbClr val="111827"/>
+                          </a:solidFill>
+                          <a:latin typeface="Arial"/>
+                        </a:defRPr>
+                      </a:pPr>
+                      <a:r>
+                        <a:t>a little different, and oh so good. i include these when making up candy trays, as gifts, at christmas time.</a:t>
+                      </a:r>
+                    </a:p>
+                  </a:txBody>
+                  <a:tcPr/>
+                </a:tc>
+              </a:tr>
+              <a:tr h="411480">
+                <a:tc>
+                  <a:txBody>
+                    <a:bodyPr/>
+                    <a:lstStyle/>
+                    <a:p>
+                      <a:pPr>
+                        <a:defRPr sz="850">
+                          <a:solidFill>
+                            <a:srgbClr val="111827"/>
+                          </a:solidFill>
+                          <a:latin typeface="Arial"/>
+                        </a:defRPr>
+                      </a:pPr>
+                      <a:r>
+                        <a:t>ant kelly s london broil marinade</a:t>
+                      </a:r>
+                    </a:p>
+                  </a:txBody>
+                  <a:tcPr/>
+                </a:tc>
+                <a:tc>
+                  <a:txBody>
+                    <a:bodyPr/>
+                    <a:lstStyle/>
+                    <a:p>
+                      <a:pPr>
+                        <a:defRPr sz="850">
+                          <a:solidFill>
+                            <a:srgbClr val="111827"/>
+                          </a:solidFill>
+                          <a:latin typeface="Arial"/>
+                        </a:defRPr>
+                      </a:pPr>
+                      <a:r>
+                        <a:t>my niece shwana loves this! she always writes my name ant kelly when we play rummy or scrabble started when she was little and stuck. i always make this when we go tubing in wisconsin. prep time includes does not include time to marinate.</a:t>
+                      </a:r>
+                    </a:p>
+                  </a:txBody>
+                  <a:tcPr/>
+                </a:tc>
+              </a:tr>
+              <a:tr h="411480">
+                <a:tc>
+                  <a:txBody>
+                    <a:bodyPr/>
+                    <a:lstStyle/>
+                    <a:p>
+                      <a:pPr>
+                        <a:defRPr sz="850">
+                          <a:solidFill>
+                            <a:srgbClr val="111827"/>
+                          </a:solidFill>
+                          <a:latin typeface="Arial"/>
+                        </a:defRPr>
+                      </a:pPr>
+                      <a:r>
+                        <a:t>i don t feel like cooking tonight casserole</a:t>
+                      </a:r>
+                    </a:p>
+                  </a:txBody>
+                  <a:tcPr/>
+                </a:tc>
+                <a:tc>
+                  <a:txBody>
+                    <a:bodyPr/>
+                    <a:lstStyle/>
+                    <a:p>
+                      <a:pPr>
+                        <a:defRPr sz="850">
+                          <a:solidFill>
+                            <a:srgbClr val="111827"/>
+                          </a:solidFill>
+                          <a:latin typeface="Arial"/>
+                        </a:defRPr>
+                      </a:pPr>
+                      <a:r>
+                        <a:t>this is a hearty and filling casserole for those nights when a long time in the kitchen is just out of the question. very tasty and easy to make, my family requests it often. enjoy!</a:t>
+                      </a:r>
+                    </a:p>
+                  </a:txBody>
+                  <a:tcPr/>
+                </a:tc>
+              </a:tr>
+              <a:tr h="411480">
+                <a:tc>
+                  <a:txBody>
+                    <a:bodyPr/>
+                    <a:lstStyle/>
+                    <a:p>
+                      <a:pPr>
+                        <a:defRPr sz="850">
+                          <a:solidFill>
+                            <a:srgbClr val="111827"/>
+                          </a:solidFill>
+                          <a:latin typeface="Arial"/>
+                        </a:defRPr>
+                      </a:pPr>
+                      <a:r>
+                        <a:t>better then bush s baked beans</a:t>
+                      </a:r>
+                    </a:p>
+                  </a:txBody>
+                  <a:tcPr/>
+                </a:tc>
+                <a:tc>
+                  <a:txBody>
+                    <a:bodyPr/>
+                    <a:lstStyle/>
+                    <a:p>
+                      <a:pPr>
+                        <a:defRPr sz="850">
+                          <a:solidFill>
+                            <a:srgbClr val="111827"/>
+                          </a:solidFill>
+                          <a:latin typeface="Arial"/>
+                        </a:defRPr>
+                      </a:pPr>
+                      <a:r>
+                        <a:t>i would have to say that this is a labor of love dish, but i give you my word that this recipe is better than bush s. enjoy! oh, and also this recipe is easily doubled. in fact, i think it turns out better when it is.</a:t>
+                      </a:r>
+                    </a:p>
+                  </a:txBody>
+                  <a:tcPr/>
+                </a:tc>
+              </a:tr>
+            </a:tbl>
+          </a:graphicData>
+        </a:graphic>
+      </p:graphicFrame>
+    </p:spTree>
+  </p:cSld>
+  <p:clrMapOvr>
+    <a:masterClrMapping/>
+  </p:clrMapOvr>
+</p:sld>
+</file>
+
+<file path=ppt/slides/slide12.xml><?xml version="1.0" encoding="utf-8"?>
+<p:sld xmlns:a="http://schemas.openxmlformats.org/drawingml/2006/main" xmlns:p="http://schemas.openxmlformats.org/presentationml/2006/main" xmlns:r="http://schemas.openxmlformats.org/officeDocument/2006/relationships">
+  <p:cSld>
+    <p:spTree>
+      <p:nvGrpSpPr>
+        <p:cNvPr id="1" name=""/>
+        <p:cNvGrpSpPr/>
+        <p:nvPr/>
+      </p:nvGrpSpPr>
+      <p:grpSpPr/>
+      <p:sp>
+        <p:nvSpPr>
+          <p:cNvPr id="2" name="Rectangle 1"/>
+          <p:cNvSpPr/>
+          <p:nvPr/>
+        </p:nvSpPr>
+        <p:spPr>
+          <a:xfrm>
+            <a:off x="0" y="0"/>
+            <a:ext cx="12191695" cy="6858000"/>
+          </a:xfrm>
+          <a:prstGeom prst="rect">
+            <a:avLst/>
+          </a:prstGeom>
+          <a:solidFill>
+            <a:srgbClr val="FFFFFF"/>
+          </a:solidFill>
+          <a:ln>
+            <a:solidFill>
+              <a:srgbClr val="FFFFFF"/>
+            </a:solidFill>
+          </a:ln>
+        </p:spPr>
+        <p:style>
+          <a:lnRef idx="1">
+            <a:schemeClr val="accent1"/>
+          </a:lnRef>
+          <a:fillRef idx="3">
+            <a:schemeClr val="accent1"/>
+          </a:fillRef>
+          <a:effectRef idx="2">
+            <a:schemeClr val="accent1"/>
+          </a:effectRef>
+          <a:fontRef idx="minor">
+            <a:schemeClr val="lt1"/>
+          </a:fontRef>
+        </p:style>
+        <p:txBody>
+          <a:bodyPr rtlCol="0" anchor="ctr"/>
+          <a:lstStyle/>
+          <a:p>
+            <a:pPr algn="ctr"/>
+          </a:p>
+        </p:txBody>
+      </p:sp>
+      <p:sp>
+        <p:nvSpPr>
+          <p:cNvPr id="3" name="TextBox 2"/>
+          <p:cNvSpPr txBox="1"/>
+          <p:nvPr/>
+        </p:nvSpPr>
+        <p:spPr>
+          <a:xfrm>
+            <a:off x="640080" y="365760"/>
+            <a:ext cx="10972800" cy="731520"/>
+          </a:xfrm>
+          <a:prstGeom prst="rect">
+            <a:avLst/>
+          </a:prstGeom>
+          <a:noFill/>
+        </p:spPr>
+        <p:txBody>
+          <a:bodyPr wrap="square" lIns="0" tIns="0" rIns="0" bIns="0">
+            <a:spAutoFit/>
+          </a:bodyPr>
+          <a:lstStyle/>
+          <a:p>
+            <a:pPr>
+              <a:defRPr sz="2800" b="0">
+                <a:solidFill>
+                  <a:srgbClr val="111827"/>
+                </a:solidFill>
+                <a:latin typeface="Arial"/>
+              </a:defRPr>
+            </a:pPr>
+            <a:r>
+              <a:t>Results: Content Based</a:t>
+            </a:r>
+          </a:p>
+        </p:txBody>
+      </p:sp>
+      <p:graphicFrame>
+        <p:nvGraphicFramePr>
+          <p:cNvPr id="4" name="Table 3"/>
+          <p:cNvGraphicFramePr>
+            <a:graphicFrameLocks noGrp="1"/>
+          </p:cNvGraphicFramePr>
+          <p:nvPr/>
+        </p:nvGraphicFramePr>
+        <p:xfrm>
+          <a:off x="731520" y="1280160"/>
+          <a:ext cx="4754880" cy="4937760"/>
+        </p:xfrm>
+        <a:graphic>
+          <a:graphicData uri="http://schemas.openxmlformats.org/drawingml/2006/table">
+            <a:tbl>
+              <a:tblPr firstRow="1" bandRow="1">
+                <a:tableStyleId>{5C22544A-7EE6-4342-B048-85BDC9FD1C3A}</a:tableStyleId>
+              </a:tblPr>
+              <a:tblGrid>
+                <a:gridCol w="457200"/>
+                <a:gridCol w="1188720"/>
+                <a:gridCol w="1554480"/>
+                <a:gridCol w="1554480"/>
+              </a:tblGrid>
+              <a:tr h="448887">
+                <a:tc>
+                  <a:txBody>
+                    <a:bodyPr/>
+                    <a:lstStyle/>
+                    <a:p>
+                      <a:pPr>
+                        <a:defRPr sz="1000" b="1">
+                          <a:solidFill>
+                            <a:srgbClr val="111827"/>
+                          </a:solidFill>
+                          <a:latin typeface="Arial"/>
+                        </a:defRPr>
+                      </a:pPr>
+                    </a:p>
+                  </a:txBody>
+                  <a:tcPr/>
+                </a:tc>
+                <a:tc>
+                  <a:txBody>
+                    <a:bodyPr/>
+                    <a:lstStyle/>
+                    <a:p>
+                      <a:pPr>
+                        <a:defRPr sz="1000" b="1">
+                          <a:solidFill>
+                            <a:srgbClr val="111827"/>
+                          </a:solidFill>
+                          <a:latin typeface="Arial"/>
+                        </a:defRPr>
+                      </a:pPr>
+                      <a:r>
+                        <a:t>K value</a:t>
+                      </a:r>
+                    </a:p>
+                  </a:txBody>
+                  <a:tcPr/>
+                </a:tc>
+                <a:tc>
+                  <a:txBody>
+                    <a:bodyPr/>
+                    <a:lstStyle/>
+                    <a:p>
+                      <a:pPr>
+                        <a:defRPr sz="1000" b="1">
+                          <a:solidFill>
+                            <a:srgbClr val="111827"/>
+                          </a:solidFill>
+                          <a:latin typeface="Arial"/>
+                        </a:defRPr>
+                      </a:pPr>
+                      <a:r>
+                        <a:t>Precision</a:t>
+                      </a:r>
+                    </a:p>
+                  </a:txBody>
+                  <a:tcPr/>
+                </a:tc>
+                <a:tc>
+                  <a:txBody>
+                    <a:bodyPr/>
+                    <a:lstStyle/>
+                    <a:p>
+                      <a:pPr>
+                        <a:defRPr sz="1000" b="1">
+                          <a:solidFill>
+                            <a:srgbClr val="111827"/>
+                          </a:solidFill>
+                          <a:latin typeface="Arial"/>
+                        </a:defRPr>
+                      </a:pPr>
+                      <a:r>
+                        <a:t>Recall</a:t>
+                      </a:r>
+                    </a:p>
+                  </a:txBody>
+                  <a:tcPr/>
+                </a:tc>
+              </a:tr>
+              <a:tr h="448887">
+                <a:tc>
+                  <a:txBody>
+                    <a:bodyPr/>
+                    <a:lstStyle/>
+                    <a:p>
+                      <a:pPr>
+                        <a:defRPr sz="950">
+                          <a:solidFill>
+                            <a:srgbClr val="111827"/>
+                          </a:solidFill>
+                          <a:latin typeface="Arial"/>
+                        </a:defRPr>
+                      </a:pPr>
+                      <a:r>
+                        <a:t>0</a:t>
+                      </a:r>
+                    </a:p>
+                  </a:txBody>
+                  <a:tcPr/>
+                </a:tc>
+                <a:tc>
+                  <a:txBody>
+                    <a:bodyPr/>
+                    <a:lstStyle/>
+                    <a:p>
+                      <a:pPr>
+                        <a:defRPr sz="950">
+                          <a:solidFill>
+                            <a:srgbClr val="111827"/>
+                          </a:solidFill>
+                          <a:latin typeface="Arial"/>
+                        </a:defRPr>
+                      </a:pPr>
+                      <a:r>
+                        <a:t>1.0</a:t>
+                      </a:r>
+                    </a:p>
+                  </a:txBody>
+                  <a:tcPr/>
+                </a:tc>
+                <a:tc>
+                  <a:txBody>
+                    <a:bodyPr/>
+                    <a:lstStyle/>
+                    <a:p>
+                      <a:pPr>
+                        <a:defRPr sz="950">
+                          <a:solidFill>
+                            <a:srgbClr val="111827"/>
+                          </a:solidFill>
+                          <a:latin typeface="Arial"/>
+                        </a:defRPr>
+                      </a:pPr>
+                      <a:r>
+                        <a:t>0.000000</a:t>
+                      </a:r>
+                    </a:p>
+                  </a:txBody>
+                  <a:tcPr/>
+                </a:tc>
+                <a:tc>
+                  <a:txBody>
+                    <a:bodyPr/>
+                    <a:lstStyle/>
+                    <a:p>
+                      <a:pPr>
+                        <a:defRPr sz="950">
+                          <a:solidFill>
+                            <a:srgbClr val="111827"/>
+                          </a:solidFill>
+                          <a:latin typeface="Arial"/>
+                        </a:defRPr>
+                      </a:pPr>
+                      <a:r>
+                        <a:t>0.000000</a:t>
+                      </a:r>
+                    </a:p>
+                  </a:txBody>
+                  <a:tcPr/>
+                </a:tc>
+              </a:tr>
+              <a:tr h="448887">
+                <a:tc>
+                  <a:txBody>
+                    <a:bodyPr/>
+                    <a:lstStyle/>
+                    <a:p>
+                      <a:pPr>
+                        <a:defRPr sz="950">
+                          <a:solidFill>
+                            <a:srgbClr val="111827"/>
+                          </a:solidFill>
+                          <a:latin typeface="Arial"/>
+                        </a:defRPr>
+                      </a:pPr>
+                      <a:r>
+                        <a:t>1</a:t>
+                      </a:r>
+                    </a:p>
+                  </a:txBody>
+                  <a:tcPr/>
+                </a:tc>
+                <a:tc>
+                  <a:txBody>
+                    <a:bodyPr/>
+                    <a:lstStyle/>
+                    <a:p>
+                      <a:pPr>
+                        <a:defRPr sz="950">
+                          <a:solidFill>
+                            <a:srgbClr val="111827"/>
+                          </a:solidFill>
+                          <a:latin typeface="Arial"/>
+                        </a:defRPr>
+                      </a:pPr>
+                      <a:r>
+                        <a:t>2.0</a:t>
+                      </a:r>
+                    </a:p>
+                  </a:txBody>
+                  <a:tcPr/>
+                </a:tc>
+                <a:tc>
+                  <a:txBody>
+                    <a:bodyPr/>
+                    <a:lstStyle/>
+                    <a:p>
+                      <a:pPr>
+                        <a:defRPr sz="950">
+                          <a:solidFill>
+                            <a:srgbClr val="111827"/>
+                          </a:solidFill>
+                          <a:latin typeface="Arial"/>
+                        </a:defRPr>
+                      </a:pPr>
+                      <a:r>
+                        <a:t>0.000708</a:t>
+                      </a:r>
+                    </a:p>
+                  </a:txBody>
+                  <a:tcPr/>
+                </a:tc>
+                <a:tc>
+                  <a:txBody>
+                    <a:bodyPr/>
+                    <a:lstStyle/>
+                    <a:p>
+                      <a:pPr>
+                        <a:defRPr sz="950">
+                          <a:solidFill>
+                            <a:srgbClr val="111827"/>
+                          </a:solidFill>
+                          <a:latin typeface="Arial"/>
+                        </a:defRPr>
+                      </a:pPr>
+                      <a:r>
+                        <a:t>0.001416</a:t>
+                      </a:r>
+                    </a:p>
+                  </a:txBody>
+                  <a:tcPr/>
+                </a:tc>
+              </a:tr>
+              <a:tr h="448887">
+                <a:tc>
+                  <a:txBody>
+                    <a:bodyPr/>
+                    <a:lstStyle/>
+                    <a:p>
+                      <a:pPr>
+                        <a:defRPr sz="950">
+                          <a:solidFill>
+                            <a:srgbClr val="111827"/>
+                          </a:solidFill>
+                          <a:latin typeface="Arial"/>
+                        </a:defRPr>
+                      </a:pPr>
+                      <a:r>
+                        <a:t>2</a:t>
+                      </a:r>
+                    </a:p>
+                  </a:txBody>
+                  <a:tcPr/>
+                </a:tc>
+                <a:tc>
+                  <a:txBody>
+                    <a:bodyPr/>
+                    <a:lstStyle/>
+                    <a:p>
+                      <a:pPr>
+                        <a:defRPr sz="950">
+                          <a:solidFill>
+                            <a:srgbClr val="111827"/>
+                          </a:solidFill>
+                          <a:latin typeface="Arial"/>
+                        </a:defRPr>
+                      </a:pPr>
+                      <a:r>
+                        <a:t>3.0</a:t>
+                      </a:r>
+                    </a:p>
+                  </a:txBody>
+                  <a:tcPr/>
+                </a:tc>
+                <a:tc>
+                  <a:txBody>
+                    <a:bodyPr/>
+                    <a:lstStyle/>
+                    <a:p>
+                      <a:pPr>
+                        <a:defRPr sz="950">
+                          <a:solidFill>
+                            <a:srgbClr val="111827"/>
+                          </a:solidFill>
+                          <a:latin typeface="Arial"/>
+                        </a:defRPr>
+                      </a:pPr>
+                      <a:r>
+                        <a:t>0.000472</a:t>
+                      </a:r>
+                    </a:p>
+                  </a:txBody>
+                  <a:tcPr/>
+                </a:tc>
+                <a:tc>
+                  <a:txBody>
+                    <a:bodyPr/>
+                    <a:lstStyle/>
+                    <a:p>
+                      <a:pPr>
+                        <a:defRPr sz="950">
+                          <a:solidFill>
+                            <a:srgbClr val="111827"/>
+                          </a:solidFill>
+                          <a:latin typeface="Arial"/>
+                        </a:defRPr>
+                      </a:pPr>
+                      <a:r>
+                        <a:t>0.001416</a:t>
+                      </a:r>
+                    </a:p>
+                  </a:txBody>
+                  <a:tcPr/>
+                </a:tc>
+              </a:tr>
+              <a:tr h="448887">
+                <a:tc>
+                  <a:txBody>
+                    <a:bodyPr/>
+                    <a:lstStyle/>
+                    <a:p>
+                      <a:pPr>
+                        <a:defRPr sz="950">
+                          <a:solidFill>
+                            <a:srgbClr val="111827"/>
+                          </a:solidFill>
+                          <a:latin typeface="Arial"/>
+                        </a:defRPr>
+                      </a:pPr>
+                      <a:r>
+                        <a:t>3</a:t>
+                      </a:r>
+                    </a:p>
+                  </a:txBody>
+                  <a:tcPr/>
+                </a:tc>
+                <a:tc>
+                  <a:txBody>
+                    <a:bodyPr/>
+                    <a:lstStyle/>
+                    <a:p>
+                      <a:pPr>
+                        <a:defRPr sz="950">
+                          <a:solidFill>
+                            <a:srgbClr val="111827"/>
+                          </a:solidFill>
+                          <a:latin typeface="Arial"/>
+                        </a:defRPr>
+                      </a:pPr>
+                      <a:r>
+                        <a:t>4.0</a:t>
+                      </a:r>
+                    </a:p>
+                  </a:txBody>
+                  <a:tcPr/>
+                </a:tc>
+                <a:tc>
+                  <a:txBody>
+                    <a:bodyPr/>
+                    <a:lstStyle/>
+                    <a:p>
+                      <a:pPr>
+                        <a:defRPr sz="950">
+                          <a:solidFill>
+                            <a:srgbClr val="111827"/>
+                          </a:solidFill>
+                          <a:latin typeface="Arial"/>
+                        </a:defRPr>
+                      </a:pPr>
+                      <a:r>
+                        <a:t>0.000354</a:t>
+                      </a:r>
+                    </a:p>
+                  </a:txBody>
+                  <a:tcPr/>
+                </a:tc>
+                <a:tc>
+                  <a:txBody>
+                    <a:bodyPr/>
+                    <a:lstStyle/>
+                    <a:p>
+                      <a:pPr>
+                        <a:defRPr sz="950">
+                          <a:solidFill>
+                            <a:srgbClr val="111827"/>
+                          </a:solidFill>
+                          <a:latin typeface="Arial"/>
+                        </a:defRPr>
+                      </a:pPr>
+                      <a:r>
+                        <a:t>0.001416</a:t>
+                      </a:r>
+                    </a:p>
+                  </a:txBody>
+                  <a:tcPr/>
+                </a:tc>
+              </a:tr>
+              <a:tr h="448887">
+                <a:tc>
+                  <a:txBody>
+                    <a:bodyPr/>
+                    <a:lstStyle/>
+                    <a:p>
+                      <a:pPr>
+                        <a:defRPr sz="950">
+                          <a:solidFill>
+                            <a:srgbClr val="111827"/>
+                          </a:solidFill>
+                          <a:latin typeface="Arial"/>
+                        </a:defRPr>
+                      </a:pPr>
+                      <a:r>
+                        <a:t>4</a:t>
+                      </a:r>
+                    </a:p>
+                  </a:txBody>
+                  <a:tcPr/>
+                </a:tc>
+                <a:tc>
+                  <a:txBody>
+                    <a:bodyPr/>
+                    <a:lstStyle/>
+                    <a:p>
+                      <a:pPr>
+                        <a:defRPr sz="950">
+                          <a:solidFill>
+                            <a:srgbClr val="111827"/>
+                          </a:solidFill>
+                          <a:latin typeface="Arial"/>
+                        </a:defRPr>
+                      </a:pPr>
+                      <a:r>
+                        <a:t>5.0</a:t>
+                      </a:r>
+                    </a:p>
+                  </a:txBody>
+                  <a:tcPr/>
+                </a:tc>
+                <a:tc>
+                  <a:txBody>
+                    <a:bodyPr/>
+                    <a:lstStyle/>
+                    <a:p>
+                      <a:pPr>
+                        <a:defRPr sz="950">
+                          <a:solidFill>
+                            <a:srgbClr val="111827"/>
+                          </a:solidFill>
+                          <a:latin typeface="Arial"/>
+                        </a:defRPr>
+                      </a:pPr>
+                      <a:r>
+                        <a:t>0.000567</a:t>
+                      </a:r>
+                    </a:p>
+                  </a:txBody>
+                  <a:tcPr/>
+                </a:tc>
+                <a:tc>
+                  <a:txBody>
+                    <a:bodyPr/>
+                    <a:lstStyle/>
+                    <a:p>
+                      <a:pPr>
+                        <a:defRPr sz="950">
+                          <a:solidFill>
+                            <a:srgbClr val="111827"/>
+                          </a:solidFill>
+                          <a:latin typeface="Arial"/>
+                        </a:defRPr>
+                      </a:pPr>
+                      <a:r>
+                        <a:t>0.002833</a:t>
+                      </a:r>
+                    </a:p>
+                  </a:txBody>
+                  <a:tcPr/>
+                </a:tc>
+              </a:tr>
+              <a:tr h="448887">
+                <a:tc>
+                  <a:txBody>
+                    <a:bodyPr/>
+                    <a:lstStyle/>
+                    <a:p>
+                      <a:pPr>
+                        <a:defRPr sz="950">
+                          <a:solidFill>
+                            <a:srgbClr val="111827"/>
+                          </a:solidFill>
+                          <a:latin typeface="Arial"/>
+                        </a:defRPr>
+                      </a:pPr>
+                      <a:r>
+                        <a:t>5</a:t>
+                      </a:r>
+                    </a:p>
+                  </a:txBody>
+                  <a:tcPr/>
+                </a:tc>
+                <a:tc>
+                  <a:txBody>
+                    <a:bodyPr/>
+                    <a:lstStyle/>
+                    <a:p>
+                      <a:pPr>
+                        <a:defRPr sz="950">
+                          <a:solidFill>
+                            <a:srgbClr val="111827"/>
+                          </a:solidFill>
+                          <a:latin typeface="Arial"/>
+                        </a:defRPr>
+                      </a:pPr>
+                      <a:r>
+                        <a:t>6.0</a:t>
+                      </a:r>
+                    </a:p>
+                  </a:txBody>
+                  <a:tcPr/>
+                </a:tc>
+                <a:tc>
+                  <a:txBody>
+                    <a:bodyPr/>
+                    <a:lstStyle/>
+                    <a:p>
+                      <a:pPr>
+                        <a:defRPr sz="950">
+                          <a:solidFill>
+                            <a:srgbClr val="111827"/>
+                          </a:solidFill>
+                          <a:latin typeface="Arial"/>
+                        </a:defRPr>
+                      </a:pPr>
+                      <a:r>
+                        <a:t>0.000472</a:t>
+                      </a:r>
+                    </a:p>
+                  </a:txBody>
+                  <a:tcPr/>
+                </a:tc>
+                <a:tc>
+                  <a:txBody>
+                    <a:bodyPr/>
+                    <a:lstStyle/>
+                    <a:p>
+                      <a:pPr>
+                        <a:defRPr sz="950">
+                          <a:solidFill>
+                            <a:srgbClr val="111827"/>
+                          </a:solidFill>
+                          <a:latin typeface="Arial"/>
+                        </a:defRPr>
+                      </a:pPr>
+                      <a:r>
+                        <a:t>0.002833</a:t>
+                      </a:r>
+                    </a:p>
+                  </a:txBody>
+                  <a:tcPr/>
+                </a:tc>
+              </a:tr>
+              <a:tr h="448887">
+                <a:tc>
+                  <a:txBody>
+                    <a:bodyPr/>
+                    <a:lstStyle/>
+                    <a:p>
+                      <a:pPr>
+                        <a:defRPr sz="950">
+                          <a:solidFill>
+                            <a:srgbClr val="111827"/>
+                          </a:solidFill>
+                          <a:latin typeface="Arial"/>
+                        </a:defRPr>
+                      </a:pPr>
+                      <a:r>
+                        <a:t>6</a:t>
+                      </a:r>
+                    </a:p>
+                  </a:txBody>
+                  <a:tcPr/>
+                </a:tc>
+                <a:tc>
+                  <a:txBody>
+                    <a:bodyPr/>
+                    <a:lstStyle/>
+                    <a:p>
+                      <a:pPr>
+                        <a:defRPr sz="950">
+                          <a:solidFill>
+                            <a:srgbClr val="111827"/>
+                          </a:solidFill>
+                          <a:latin typeface="Arial"/>
+                        </a:defRPr>
+                      </a:pPr>
+                      <a:r>
+                        <a:t>7.0</a:t>
+                      </a:r>
+                    </a:p>
+                  </a:txBody>
+                  <a:tcPr/>
+                </a:tc>
+                <a:tc>
+                  <a:txBody>
+                    <a:bodyPr/>
+                    <a:lstStyle/>
+                    <a:p>
+                      <a:pPr>
+                        <a:defRPr sz="950">
+                          <a:solidFill>
+                            <a:srgbClr val="111827"/>
+                          </a:solidFill>
+                          <a:latin typeface="Arial"/>
+                        </a:defRPr>
+                      </a:pPr>
+                      <a:r>
+                        <a:t>0.000607</a:t>
+                      </a:r>
+                    </a:p>
+                  </a:txBody>
+                  <a:tcPr/>
+                </a:tc>
+                <a:tc>
+                  <a:txBody>
+                    <a:bodyPr/>
+                    <a:lstStyle/>
+                    <a:p>
+                      <a:pPr>
+                        <a:defRPr sz="950">
+                          <a:solidFill>
+                            <a:srgbClr val="111827"/>
+                          </a:solidFill>
+                          <a:latin typeface="Arial"/>
+                        </a:defRPr>
+                      </a:pPr>
+                      <a:r>
+                        <a:t>0.004249</a:t>
+                      </a:r>
+                    </a:p>
+                  </a:txBody>
+                  <a:tcPr/>
+                </a:tc>
+              </a:tr>
+              <a:tr h="448887">
+                <a:tc>
+                  <a:txBody>
+                    <a:bodyPr/>
+                    <a:lstStyle/>
+                    <a:p>
+                      <a:pPr>
+                        <a:defRPr sz="950">
+                          <a:solidFill>
+                            <a:srgbClr val="111827"/>
+                          </a:solidFill>
+                          <a:latin typeface="Arial"/>
+                        </a:defRPr>
+                      </a:pPr>
+                      <a:r>
+                        <a:t>7</a:t>
+                      </a:r>
+                    </a:p>
+                  </a:txBody>
+                  <a:tcPr/>
+                </a:tc>
+                <a:tc>
+                  <a:txBody>
+                    <a:bodyPr/>
+                    <a:lstStyle/>
+                    <a:p>
+                      <a:pPr>
+                        <a:defRPr sz="950">
+                          <a:solidFill>
+                            <a:srgbClr val="111827"/>
+                          </a:solidFill>
+                          <a:latin typeface="Arial"/>
+                        </a:defRPr>
+                      </a:pPr>
+                      <a:r>
+                        <a:t>8.0</a:t>
+                      </a:r>
+                    </a:p>
+                  </a:txBody>
+                  <a:tcPr/>
+                </a:tc>
+                <a:tc>
+                  <a:txBody>
+                    <a:bodyPr/>
+                    <a:lstStyle/>
+                    <a:p>
+                      <a:pPr>
+                        <a:defRPr sz="950">
+                          <a:solidFill>
+                            <a:srgbClr val="111827"/>
+                          </a:solidFill>
+                          <a:latin typeface="Arial"/>
+                        </a:defRPr>
+                      </a:pPr>
+                      <a:r>
+                        <a:t>0.000531</a:t>
+                      </a:r>
+                    </a:p>
+                  </a:txBody>
+                  <a:tcPr/>
+                </a:tc>
+                <a:tc>
+                  <a:txBody>
+                    <a:bodyPr/>
+                    <a:lstStyle/>
+                    <a:p>
+                      <a:pPr>
+                        <a:defRPr sz="950">
+                          <a:solidFill>
+                            <a:srgbClr val="111827"/>
+                          </a:solidFill>
+                          <a:latin typeface="Arial"/>
+                        </a:defRPr>
+                      </a:pPr>
+                      <a:r>
+                        <a:t>0.004249</a:t>
+                      </a:r>
+                    </a:p>
+                  </a:txBody>
+                  <a:tcPr/>
+                </a:tc>
+              </a:tr>
+              <a:tr h="448887">
+                <a:tc>
+                  <a:txBody>
+                    <a:bodyPr/>
+                    <a:lstStyle/>
+                    <a:p>
+                      <a:pPr>
+                        <a:defRPr sz="950">
+                          <a:solidFill>
+                            <a:srgbClr val="111827"/>
+                          </a:solidFill>
+                          <a:latin typeface="Arial"/>
+                        </a:defRPr>
+                      </a:pPr>
+                      <a:r>
+                        <a:t>8</a:t>
+                      </a:r>
+                    </a:p>
+                  </a:txBody>
+                  <a:tcPr/>
+                </a:tc>
+                <a:tc>
+                  <a:txBody>
+                    <a:bodyPr/>
+                    <a:lstStyle/>
+                    <a:p>
+                      <a:pPr>
+                        <a:defRPr sz="950">
+                          <a:solidFill>
+                            <a:srgbClr val="111827"/>
+                          </a:solidFill>
+                          <a:latin typeface="Arial"/>
+                        </a:defRPr>
+                      </a:pPr>
+                      <a:r>
+                        <a:t>9.0</a:t>
+                      </a:r>
+                    </a:p>
+                  </a:txBody>
+                  <a:tcPr/>
+                </a:tc>
+                <a:tc>
+                  <a:txBody>
+                    <a:bodyPr/>
+                    <a:lstStyle/>
+                    <a:p>
+                      <a:pPr>
+                        <a:defRPr sz="950">
+                          <a:solidFill>
+                            <a:srgbClr val="111827"/>
+                          </a:solidFill>
+                          <a:latin typeface="Arial"/>
+                        </a:defRPr>
+                      </a:pPr>
+                      <a:r>
+                        <a:t>0.000472</a:t>
+                      </a:r>
+                    </a:p>
+                  </a:txBody>
+                  <a:tcPr/>
+                </a:tc>
+                <a:tc>
+                  <a:txBody>
+                    <a:bodyPr/>
+                    <a:lstStyle/>
+                    <a:p>
+                      <a:pPr>
+                        <a:defRPr sz="950">
+                          <a:solidFill>
+                            <a:srgbClr val="111827"/>
+                          </a:solidFill>
+                          <a:latin typeface="Arial"/>
+                        </a:defRPr>
+                      </a:pPr>
+                      <a:r>
+                        <a:t>0.004249</a:t>
+                      </a:r>
+                    </a:p>
+                  </a:txBody>
+                  <a:tcPr/>
+                </a:tc>
+              </a:tr>
+              <a:tr h="448890">
+                <a:tc>
+                  <a:txBody>
+                    <a:bodyPr/>
+                    <a:lstStyle/>
+                    <a:p>
+                      <a:pPr>
+                        <a:defRPr sz="950">
+                          <a:solidFill>
+                            <a:srgbClr val="111827"/>
+                          </a:solidFill>
+                          <a:latin typeface="Arial"/>
+                        </a:defRPr>
+                      </a:pPr>
+                      <a:r>
+                        <a:t>9</a:t>
+                      </a:r>
+                    </a:p>
+                  </a:txBody>
+                  <a:tcPr/>
+                </a:tc>
+                <a:tc>
+                  <a:txBody>
+                    <a:bodyPr/>
+                    <a:lstStyle/>
+                    <a:p>
+                      <a:pPr>
+                        <a:defRPr sz="950">
+                          <a:solidFill>
+                            <a:srgbClr val="111827"/>
+                          </a:solidFill>
+                          <a:latin typeface="Arial"/>
+                        </a:defRPr>
+                      </a:pPr>
+                      <a:r>
+                        <a:t>10.0</a:t>
+                      </a:r>
+                    </a:p>
+                  </a:txBody>
+                  <a:tcPr/>
+                </a:tc>
+                <a:tc>
+                  <a:txBody>
+                    <a:bodyPr/>
+                    <a:lstStyle/>
+                    <a:p>
+                      <a:pPr>
+                        <a:defRPr sz="950">
+                          <a:solidFill>
+                            <a:srgbClr val="111827"/>
+                          </a:solidFill>
+                          <a:latin typeface="Arial"/>
+                        </a:defRPr>
+                      </a:pPr>
+                      <a:r>
+                        <a:t>0.000425</a:t>
+                      </a:r>
+                    </a:p>
+                  </a:txBody>
+                  <a:tcPr/>
+                </a:tc>
+                <a:tc>
+                  <a:txBody>
+                    <a:bodyPr/>
+                    <a:lstStyle/>
+                    <a:p>
+                      <a:pPr>
+                        <a:defRPr sz="950">
+                          <a:solidFill>
+                            <a:srgbClr val="111827"/>
+                          </a:solidFill>
+                          <a:latin typeface="Arial"/>
+                        </a:defRPr>
+                      </a:pPr>
+                      <a:r>
+                        <a:t>0.004249</a:t>
+                      </a:r>
+                    </a:p>
+                  </a:txBody>
+                  <a:tcPr/>
+                </a:tc>
+              </a:tr>
+            </a:tbl>
+          </a:graphicData>
+        </a:graphic>
+      </p:graphicFrame>
+      <p:pic>
+        <p:nvPicPr>
+          <p:cNvPr id="5" name="Picture 4" descr="content_prec_recall.png"/>
+          <p:cNvPicPr>
+            <a:picLocks noChangeAspect="1"/>
+          </p:cNvPicPr>
+          <p:nvPr/>
+        </p:nvPicPr>
+        <p:blipFill>
+          <a:blip r:embed="rId2"/>
+          <a:stretch>
+            <a:fillRect/>
+          </a:stretch>
+        </p:blipFill>
+        <p:spPr>
+          <a:xfrm>
+            <a:off x="5943600" y="1280160"/>
+            <a:ext cx="5486400" cy="3852153"/>
+          </a:xfrm>
+          <a:prstGeom prst="rect">
+            <a:avLst/>
+          </a:prstGeom>
+        </p:spPr>
+      </p:pic>
+    </p:spTree>
+  </p:cSld>
+  <p:clrMapOvr>
+    <a:masterClrMapping/>
+  </p:clrMapOvr>
+</p:sld>
+</file>
+
+<file path=ppt/slides/slide13.xml><?xml version="1.0" encoding="utf-8"?>
+<p:sld xmlns:a="http://schemas.openxmlformats.org/drawingml/2006/main" xmlns:p="http://schemas.openxmlformats.org/presentationml/2006/main" xmlns:r="http://schemas.openxmlformats.org/officeDocument/2006/relationships">
+  <p:cSld>
+    <p:spTree>
+      <p:nvGrpSpPr>
+        <p:cNvPr id="1" name=""/>
+        <p:cNvGrpSpPr/>
+        <p:nvPr/>
+      </p:nvGrpSpPr>
+      <p:grpSpPr/>
+      <p:sp>
+        <p:nvSpPr>
+          <p:cNvPr id="2" name="Rectangle 1"/>
+          <p:cNvSpPr/>
+          <p:nvPr/>
+        </p:nvSpPr>
+        <p:spPr>
+          <a:xfrm>
+            <a:off x="0" y="0"/>
+            <a:ext cx="12191695" cy="6858000"/>
+          </a:xfrm>
+          <a:prstGeom prst="rect">
+            <a:avLst/>
+          </a:prstGeom>
+          <a:solidFill>
+            <a:srgbClr val="FFFFFF"/>
+          </a:solidFill>
+          <a:ln>
+            <a:solidFill>
+              <a:srgbClr val="FFFFFF"/>
+            </a:solidFill>
+          </a:ln>
+        </p:spPr>
+        <p:style>
+          <a:lnRef idx="1">
+            <a:schemeClr val="accent1"/>
+          </a:lnRef>
+          <a:fillRef idx="3">
+            <a:schemeClr val="accent1"/>
+          </a:fillRef>
+          <a:effectRef idx="2">
+            <a:schemeClr val="accent1"/>
+          </a:effectRef>
+          <a:fontRef idx="minor">
+            <a:schemeClr val="lt1"/>
+          </a:fontRef>
+        </p:style>
+        <p:txBody>
+          <a:bodyPr rtlCol="0" anchor="ctr"/>
+          <a:lstStyle/>
+          <a:p>
+            <a:pPr algn="ctr"/>
+          </a:p>
+        </p:txBody>
+      </p:sp>
+      <p:sp>
+        <p:nvSpPr>
+          <p:cNvPr id="3" name="TextBox 2"/>
+          <p:cNvSpPr txBox="1"/>
+          <p:nvPr/>
+        </p:nvSpPr>
+        <p:spPr>
+          <a:xfrm>
+            <a:off x="640080" y="365760"/>
+            <a:ext cx="10972800" cy="731520"/>
+          </a:xfrm>
+          <a:prstGeom prst="rect">
+            <a:avLst/>
+          </a:prstGeom>
+          <a:noFill/>
+        </p:spPr>
+        <p:txBody>
+          <a:bodyPr wrap="square" lIns="0" tIns="0" rIns="0" bIns="0">
+            <a:spAutoFit/>
+          </a:bodyPr>
+          <a:lstStyle/>
+          <a:p>
+            <a:pPr>
+              <a:defRPr sz="2800" b="0">
+                <a:solidFill>
+                  <a:srgbClr val="111827"/>
+                </a:solidFill>
+                <a:latin typeface="Arial"/>
+              </a:defRPr>
+            </a:pPr>
+            <a:r>
+              <a:t>Conclusions</a:t>
+            </a:r>
+          </a:p>
+        </p:txBody>
+      </p:sp>
+      <p:sp>
+        <p:nvSpPr>
+          <p:cNvPr id="4" name="TextBox 3"/>
+          <p:cNvSpPr txBox="1"/>
+          <p:nvPr/>
+        </p:nvSpPr>
+        <p:spPr>
+          <a:xfrm>
+            <a:off x="822960" y="1463040"/>
+            <a:ext cx="10515600" cy="4754880"/>
+          </a:xfrm>
+          <a:prstGeom prst="rect">
+            <a:avLst/>
+          </a:prstGeom>
+          <a:noFill/>
+        </p:spPr>
+        <p:txBody>
+          <a:bodyPr wrap="square">
+            <a:spAutoFit/>
+          </a:bodyPr>
+          <a:lstStyle/>
+          <a:p>
+            <a:pPr>
+              <a:defRPr sz="1450">
+                <a:solidFill>
+                  <a:srgbClr val="111827"/>
+                </a:solidFill>
+                <a:latin typeface="Arial"/>
+              </a:defRPr>
+            </a:pPr>
+            <a:r>
+              <a:t>•   For the content based system, the results are not ideal and we think the reason could be that the textual features of this data set are not very representative of the recipes, therefore the predictions are not very accurate.</a:t>
+            </a:r>
+          </a:p>
+          <a:p>
+            <a:pPr>
+              <a:spcBef>
+                <a:spcPts val="2400"/>
+              </a:spcBef>
+              <a:defRPr sz="1450">
+                <a:solidFill>
+                  <a:srgbClr val="111827"/>
+                </a:solidFill>
+                <a:latin typeface="Arial"/>
+              </a:defRPr>
+            </a:pPr>
+            <a:r>
+              <a:t>•   Cluster Based collaborative filtering generated more personalized recommendations compared to using all users or recipes likely due to only calculating similarities for closely related users.</a:t>
+            </a:r>
+          </a:p>
+          <a:p>
+            <a:pPr>
+              <a:spcBef>
+                <a:spcPts val="2400"/>
+              </a:spcBef>
+              <a:defRPr sz="1450">
+                <a:solidFill>
+                  <a:srgbClr val="111827"/>
+                </a:solidFill>
+                <a:latin typeface="Arial"/>
+              </a:defRPr>
+            </a:pPr>
+            <a:r>
+              <a:t>•   The Surprise model on its own generated nearly identical recommendations for users. While the error is relatively low, this approach does not seem personalized enough for useful recommendations. Additionally, the imbalanced ratings data could have resulted in such similar predictions.</a:t>
             </a:r>
           </a:p>
         </p:txBody>
@@ -3802,7 +5824,7 @@
                         </a:defRPr>
                       </a:pPr>
                       <a:r>
-                        <a:t>Raw data for recipes, including the text name, minutes to complete, tags (via Food.com), nutrition data, number of steps, text for each step, user-provided description, ingredients</a:t>
+                        <a:t>Raw data for recipes, including the text name, minutes to complete, tags via Food.com, nutrition data, number of steps, text for each step, user provided description, ingredients</a:t>
                       </a:r>
                     </a:p>
                   </a:txBody>
@@ -3877,7 +5899,7 @@
                         </a:defRPr>
                       </a:pPr>
                       <a:r>
-                        <a:t>Interactions with the recipes by the users, including User ID, Recipe ID, Date submitted, rating on a scale of 0-5, and text of the user's review</a:t>
+                        <a:t>Interactions with the recipes by the users, including User ID, Recipe ID, Date submitted, rating on a scale of 0 to 5, and text of the user review</a:t>
                       </a:r>
                     </a:p>
                   </a:txBody>
@@ -3952,7 +5974,7 @@
                         </a:defRPr>
                       </a:pPr>
                       <a:r>
-                        <a:t>A map of ingredient IDs to ingredient names, with the text description of the ingredient, count of words in the text description, text description of the ingredient, length of description, and a simplified word/category/phrase used in place of the original description</a:t>
+                        <a:t>A map of ingredient IDs to ingredient names, with the text description of the ingredient, count of words in the text description, text description of the ingredient, length of description, and a simplified word or category or phrase used in place of the original description</a:t>
                       </a:r>
                     </a:p>
                   </a:txBody>
@@ -4246,7 +6268,7 @@
             <a:br/>
             <a:br/>
             <a:r>
-              <a:t>   •  32% main-dish</a:t>
+              <a:t>   •  32% main dish</a:t>
             </a:r>
             <a:br/>
             <a:r>
@@ -4254,7 +6276,7 @@
             </a:r>
             <a:br/>
             <a:r>
-              <a:t>   •  11% side-dishes</a:t>
+              <a:t>   •  11% side dishes</a:t>
             </a:r>
           </a:p>
         </p:txBody>
@@ -4353,7 +6375,7 @@
               </a:defRPr>
             </a:pPr>
             <a:r>
-              <a:t>Approach: User/Item-Based Collaborative Filtering</a:t>
+              <a:t>Approach: User and Item Based Collaborative Filtering</a:t>
             </a:r>
           </a:p>
         </p:txBody>
@@ -4429,7 +6451,7 @@
               </a:defRPr>
             </a:pPr>
             <a:r>
-              <a:t>Item-based KNNBasic model had the lowest MAE (mean absolute error).</a:t>
+              <a:t>Item based KNNBasic model had the lowest MAE (mean absolute error).</a:t>
             </a:r>
           </a:p>
           <a:p>
@@ -4445,7 +6467,7 @@
               </a:defRPr>
             </a:pPr>
             <a:r>
-              <a:t>Using GridSearch, the best performing Item-based KNNBasic model used MSD (Mean Squared Difference) and 13 neighbors, with an MAE of 0.3548.</a:t>
+              <a:t>Using GridSearch, the best performing Item based KNNBasic model used MSD (Mean Squared Difference) and 13 neighbors, with an MAE of 0.3548.</a:t>
             </a:r>
           </a:p>
           <a:p>
@@ -4576,7 +6598,7 @@
               </a:defRPr>
             </a:pPr>
             <a:r>
-              <a:t>Description of Approach: Cluster-Based Collaborative Filtering</a:t>
+              <a:t>Description of Approach: Cluster Based Collaborative Filtering</a:t>
             </a:r>
           </a:p>
         </p:txBody>
@@ -4631,7 +6653,7 @@
               </a:defRPr>
             </a:pPr>
             <a:r>
-              <a:t>     ◦   Use a range of for both clusters for users or recipes while keeping other constant</a:t>
+              <a:t>     ◦   Use a range of clusters for users or recipes while keeping other constant</a:t>
             </a:r>
           </a:p>
           <a:p>
@@ -4663,7 +6685,7 @@
               </a:defRPr>
             </a:pPr>
             <a:r>
-              <a:t>     ◦   Compare results with mean 5-fold cross-validation RMSE, MAE, MSE, and Runtime</a:t>
+              <a:t>     ◦   Compare results with mean 5 fold cross validation RMSE, MAE, MSE, and Runtime</a:t>
             </a:r>
           </a:p>
           <a:p>
@@ -4695,7 +6717,7 @@
               </a:defRPr>
             </a:pPr>
             <a:r>
-              <a:t>     ◦   Compare results with mean 5-fold cross-validation RMSE, MAE, MSE, and Runtime</a:t>
+              <a:t>     ◦   Compare results with mean 5 fold cross validation RMSE, MAE, MSE, and Runtime</a:t>
             </a:r>
           </a:p>
           <a:p>
@@ -4727,7 +6749,7 @@
               </a:defRPr>
             </a:pPr>
             <a:r>
-              <a:t>     ◦   Predict cluster for user/recipe</a:t>
+              <a:t>     ◦   Predict cluster for user or recipe</a:t>
             </a:r>
           </a:p>
           <a:p>
@@ -4743,7 +6765,7 @@
               </a:defRPr>
             </a:pPr>
             <a:r>
-              <a:t>     ◦   Limit ratings matrix to include only the user's cluster</a:t>
+              <a:t>     ◦   Limit ratings matrix to include only the user cluster</a:t>
             </a:r>
           </a:p>
           <a:p>
@@ -4775,7 +6797,7 @@
               </a:defRPr>
             </a:pPr>
             <a:r>
-              <a:t>     ◦   Rank similar users' average rating for included recipes</a:t>
+              <a:t>     ◦   Rank similar users average rating for included recipes</a:t>
             </a:r>
           </a:p>
           <a:p>
@@ -4926,7 +6948,7 @@
               </a:defRPr>
             </a:pPr>
             <a:r>
-              <a:t>• In general, the item- and user-based collaborative filtering models are very comparable to CoClustering results, but requires a fraction of the runtime to compute</a:t>
+              <a:t>• In general, the item and user based collaborative filtering models are very comparable to CoClustering results, but requires a fraction of the runtime to compute</a:t>
             </a:r>
           </a:p>
           <a:p>
@@ -6898,7 +8920,7 @@
                   </a:txBody>
                   <a:tcPr>
                     <a:solidFill>
-                      <a:srgbClr val="E0F2FE"/>
+                      <a:srgbClr val="DBEAFE"/>
                     </a:solidFill>
                   </a:tcPr>
                 </a:tc>
@@ -6922,7 +8944,7 @@
                   </a:txBody>
                   <a:tcPr>
                     <a:solidFill>
-                      <a:srgbClr val="E0F2FE"/>
+                      <a:srgbClr val="DBEAFE"/>
                     </a:solidFill>
                   </a:tcPr>
                 </a:tc>
@@ -6946,7 +8968,7 @@
                   </a:txBody>
                   <a:tcPr>
                     <a:solidFill>
-                      <a:srgbClr val="E0F2FE"/>
+                      <a:srgbClr val="DBEAFE"/>
                     </a:solidFill>
                   </a:tcPr>
                 </a:tc>
@@ -6970,7 +8992,7 @@
                   </a:txBody>
                   <a:tcPr>
                     <a:solidFill>
-                      <a:srgbClr val="E0F2FE"/>
+                      <a:srgbClr val="DBEAFE"/>
                     </a:solidFill>
                   </a:tcPr>
                 </a:tc>
@@ -6994,7 +9016,7 @@
                   </a:txBody>
                   <a:tcPr>
                     <a:solidFill>
-                      <a:srgbClr val="E0F2FE"/>
+                      <a:srgbClr val="DBEAFE"/>
                     </a:solidFill>
                   </a:tcPr>
                 </a:tc>
@@ -7018,7 +9040,7 @@
                   </a:txBody>
                   <a:tcPr>
                     <a:solidFill>
-                      <a:srgbClr val="E0F2FE"/>
+                      <a:srgbClr val="DBEAFE"/>
                     </a:solidFill>
                   </a:tcPr>
                 </a:tc>
@@ -7562,7 +9584,7 @@
                   </a:txBody>
                   <a:tcPr>
                     <a:solidFill>
-                      <a:srgbClr val="E0F2FE"/>
+                      <a:srgbClr val="DBEAFE"/>
                     </a:solidFill>
                   </a:tcPr>
                 </a:tc>
@@ -7586,7 +9608,7 @@
                   </a:txBody>
                   <a:tcPr>
                     <a:solidFill>
-                      <a:srgbClr val="E0F2FE"/>
+                      <a:srgbClr val="DBEAFE"/>
                     </a:solidFill>
                   </a:tcPr>
                 </a:tc>
@@ -7610,7 +9632,7 @@
                   </a:txBody>
                   <a:tcPr>
                     <a:solidFill>
-                      <a:srgbClr val="E0F2FE"/>
+                      <a:srgbClr val="DBEAFE"/>
                     </a:solidFill>
                   </a:tcPr>
                 </a:tc>
@@ -7634,7 +9656,7 @@
                   </a:txBody>
                   <a:tcPr>
                     <a:solidFill>
-                      <a:srgbClr val="E0F2FE"/>
+                      <a:srgbClr val="DBEAFE"/>
                     </a:solidFill>
                   </a:tcPr>
                 </a:tc>
@@ -7658,7 +9680,7 @@
                   </a:txBody>
                   <a:tcPr>
                     <a:solidFill>
-                      <a:srgbClr val="E0F2FE"/>
+                      <a:srgbClr val="DBEAFE"/>
                     </a:solidFill>
                   </a:tcPr>
                 </a:tc>
@@ -7682,7 +9704,7 @@
                   </a:txBody>
                   <a:tcPr>
                     <a:solidFill>
-                      <a:srgbClr val="E0F2FE"/>
+                      <a:srgbClr val="DBEAFE"/>
                     </a:solidFill>
                   </a:tcPr>
                 </a:tc>
@@ -8395,967 +10417,21 @@
               </a:defRPr>
             </a:pPr>
             <a:r>
-              <a:t>Generating Recipe Recommendations &amp; Qualitative Audit</a:t>
+              <a:t>Determining User and Item Clusters</a:t>
             </a:r>
           </a:p>
         </p:txBody>
       </p:sp>
-      <p:graphicFrame>
-        <p:nvGraphicFramePr>
-          <p:cNvPr id="4" name="Table 3"/>
-          <p:cNvGraphicFramePr>
-            <a:graphicFrameLocks noGrp="1"/>
-          </p:cNvGraphicFramePr>
-          <p:nvPr/>
-        </p:nvGraphicFramePr>
-        <p:xfrm>
-          <a:off x="640080" y="1188720"/>
-          <a:ext cx="5852160" cy="5120640"/>
-        </p:xfrm>
-        <a:graphic>
-          <a:graphicData uri="http://schemas.openxmlformats.org/drawingml/2006/table">
-            <a:tbl>
-              <a:tblPr firstRow="1" bandRow="1">
-                <a:tableStyleId>{5C22544A-7EE6-4342-B048-85BDC9FD1C3A}</a:tableStyleId>
-              </a:tblPr>
-              <a:tblGrid>
-                <a:gridCol w="457200"/>
-                <a:gridCol w="3291840"/>
-                <a:gridCol w="1005840"/>
-                <a:gridCol w="1097280"/>
-              </a:tblGrid>
-              <a:tr h="465512">
-                <a:tc>
-                  <a:txBody>
-                    <a:bodyPr/>
-                    <a:lstStyle/>
-                    <a:p>
-                      <a:pPr>
-                        <a:defRPr sz="1000" b="1">
-                          <a:solidFill>
-                            <a:srgbClr val="111827"/>
-                          </a:solidFill>
-                          <a:latin typeface="Arial"/>
-                        </a:defRPr>
-                      </a:pPr>
-                      <a:r>
-                        <a:t>#</a:t>
-                      </a:r>
-                    </a:p>
-                  </a:txBody>
-                  <a:tcPr>
-                    <a:solidFill>
-                      <a:srgbClr val="F3F4F6"/>
-                    </a:solidFill>
-                  </a:tcPr>
-                </a:tc>
-                <a:tc>
-                  <a:txBody>
-                    <a:bodyPr/>
-                    <a:lstStyle/>
-                    <a:p>
-                      <a:pPr>
-                        <a:defRPr sz="1000" b="1">
-                          <a:solidFill>
-                            <a:srgbClr val="111827"/>
-                          </a:solidFill>
-                          <a:latin typeface="Arial"/>
-                        </a:defRPr>
-                      </a:pPr>
-                      <a:r>
-                        <a:t>Recommended Recipe Name</a:t>
-                      </a:r>
-                    </a:p>
-                  </a:txBody>
-                  <a:tcPr>
-                    <a:solidFill>
-                      <a:srgbClr val="F3F4F6"/>
-                    </a:solidFill>
-                  </a:tcPr>
-                </a:tc>
-                <a:tc>
-                  <a:txBody>
-                    <a:bodyPr/>
-                    <a:lstStyle/>
-                    <a:p>
-                      <a:pPr>
-                        <a:defRPr sz="1000" b="1">
-                          <a:solidFill>
-                            <a:srgbClr val="111827"/>
-                          </a:solidFill>
-                          <a:latin typeface="Arial"/>
-                        </a:defRPr>
-                      </a:pPr>
-                      <a:r>
-                        <a:t>Pred. Rating</a:t>
-                      </a:r>
-                    </a:p>
-                  </a:txBody>
-                  <a:tcPr>
-                    <a:solidFill>
-                      <a:srgbClr val="F3F4F6"/>
-                    </a:solidFill>
-                  </a:tcPr>
-                </a:tc>
-                <a:tc>
-                  <a:txBody>
-                    <a:bodyPr/>
-                    <a:lstStyle/>
-                    <a:p>
-                      <a:pPr>
-                        <a:defRPr sz="1000" b="1">
-                          <a:solidFill>
-                            <a:srgbClr val="111827"/>
-                          </a:solidFill>
-                          <a:latin typeface="Arial"/>
-                        </a:defRPr>
-                      </a:pPr>
-                      <a:r>
-                        <a:t>Meal Type</a:t>
-                      </a:r>
-                    </a:p>
-                  </a:txBody>
-                  <a:tcPr>
-                    <a:solidFill>
-                      <a:srgbClr val="F3F4F6"/>
-                    </a:solidFill>
-                  </a:tcPr>
-                </a:tc>
-              </a:tr>
-              <a:tr h="465512">
-                <a:tc>
-                  <a:txBody>
-                    <a:bodyPr/>
-                    <a:lstStyle/>
-                    <a:p>
-                      <a:pPr>
-                        <a:defRPr sz="950">
-                          <a:solidFill>
-                            <a:srgbClr val="111827"/>
-                          </a:solidFill>
-                          <a:latin typeface="Arial"/>
-                        </a:defRPr>
-                      </a:pPr>
-                      <a:r>
-                        <a:t>1</a:t>
-                      </a:r>
-                    </a:p>
-                  </a:txBody>
-                  <a:tcPr/>
-                </a:tc>
-                <a:tc>
-                  <a:txBody>
-                    <a:bodyPr/>
-                    <a:lstStyle/>
-                    <a:p>
-                      <a:pPr>
-                        <a:defRPr sz="950">
-                          <a:solidFill>
-                            <a:srgbClr val="111827"/>
-                          </a:solidFill>
-                          <a:latin typeface="Arial"/>
-                        </a:defRPr>
-                      </a:pPr>
-                      <a:r>
-                        <a:t>to die for crock pot roast</a:t>
-                      </a:r>
-                    </a:p>
-                  </a:txBody>
-                  <a:tcPr/>
-                </a:tc>
-                <a:tc>
-                  <a:txBody>
-                    <a:bodyPr/>
-                    <a:lstStyle/>
-                    <a:p>
-                      <a:pPr>
-                        <a:defRPr sz="950">
-                          <a:solidFill>
-                            <a:srgbClr val="111827"/>
-                          </a:solidFill>
-                          <a:latin typeface="Arial"/>
-                        </a:defRPr>
-                      </a:pPr>
-                      <a:r>
-                        <a:t>4.88</a:t>
-                      </a:r>
-                    </a:p>
-                  </a:txBody>
-                  <a:tcPr/>
-                </a:tc>
-                <a:tc>
-                  <a:txBody>
-                    <a:bodyPr/>
-                    <a:lstStyle/>
-                    <a:p>
-                      <a:pPr>
-                        <a:defRPr sz="950">
-                          <a:solidFill>
-                            <a:srgbClr val="111827"/>
-                          </a:solidFill>
-                          <a:latin typeface="Arial"/>
-                        </a:defRPr>
-                      </a:pPr>
-                      <a:r>
-                        <a:t>main-dish</a:t>
-                      </a:r>
-                    </a:p>
-                  </a:txBody>
-                  <a:tcPr/>
-                </a:tc>
-              </a:tr>
-              <a:tr h="465512">
-                <a:tc>
-                  <a:txBody>
-                    <a:bodyPr/>
-                    <a:lstStyle/>
-                    <a:p>
-                      <a:pPr>
-                        <a:defRPr sz="950">
-                          <a:solidFill>
-                            <a:srgbClr val="111827"/>
-                          </a:solidFill>
-                          <a:latin typeface="Arial"/>
-                        </a:defRPr>
-                      </a:pPr>
-                      <a:r>
-                        <a:t>2</a:t>
-                      </a:r>
-                    </a:p>
-                  </a:txBody>
-                  <a:tcPr/>
-                </a:tc>
-                <a:tc>
-                  <a:txBody>
-                    <a:bodyPr/>
-                    <a:lstStyle/>
-                    <a:p>
-                      <a:pPr>
-                        <a:defRPr sz="950">
-                          <a:solidFill>
-                            <a:srgbClr val="111827"/>
-                          </a:solidFill>
-                          <a:latin typeface="Arial"/>
-                        </a:defRPr>
-                      </a:pPr>
-                      <a:r>
-                        <a:t>crock pot chicken with black beans</a:t>
-                      </a:r>
-                    </a:p>
-                  </a:txBody>
-                  <a:tcPr/>
-                </a:tc>
-                <a:tc>
-                  <a:txBody>
-                    <a:bodyPr/>
-                    <a:lstStyle/>
-                    <a:p>
-                      <a:pPr>
-                        <a:defRPr sz="950">
-                          <a:solidFill>
-                            <a:srgbClr val="111827"/>
-                          </a:solidFill>
-                          <a:latin typeface="Arial"/>
-                        </a:defRPr>
-                      </a:pPr>
-                      <a:r>
-                        <a:t>4.85</a:t>
-                      </a:r>
-                    </a:p>
-                  </a:txBody>
-                  <a:tcPr/>
-                </a:tc>
-                <a:tc>
-                  <a:txBody>
-                    <a:bodyPr/>
-                    <a:lstStyle/>
-                    <a:p>
-                      <a:pPr>
-                        <a:defRPr sz="950">
-                          <a:solidFill>
-                            <a:srgbClr val="111827"/>
-                          </a:solidFill>
-                          <a:latin typeface="Arial"/>
-                        </a:defRPr>
-                      </a:pPr>
-                      <a:r>
-                        <a:t>main-dish</a:t>
-                      </a:r>
-                    </a:p>
-                  </a:txBody>
-                  <a:tcPr/>
-                </a:tc>
-              </a:tr>
-              <a:tr h="465512">
-                <a:tc>
-                  <a:txBody>
-                    <a:bodyPr/>
-                    <a:lstStyle/>
-                    <a:p>
-                      <a:pPr>
-                        <a:defRPr sz="950">
-                          <a:solidFill>
-                            <a:srgbClr val="111827"/>
-                          </a:solidFill>
-                          <a:latin typeface="Arial"/>
-                        </a:defRPr>
-                      </a:pPr>
-                      <a:r>
-                        <a:t>3</a:t>
-                      </a:r>
-                    </a:p>
-                  </a:txBody>
-                  <a:tcPr/>
-                </a:tc>
-                <a:tc>
-                  <a:txBody>
-                    <a:bodyPr/>
-                    <a:lstStyle/>
-                    <a:p>
-                      <a:pPr>
-                        <a:defRPr sz="950">
-                          <a:solidFill>
-                            <a:srgbClr val="111827"/>
-                          </a:solidFill>
-                          <a:latin typeface="Arial"/>
-                        </a:defRPr>
-                      </a:pPr>
-                      <a:r>
-                        <a:t>creamy cajun chicken pasta</a:t>
-                      </a:r>
-                    </a:p>
-                  </a:txBody>
-                  <a:tcPr/>
-                </a:tc>
-                <a:tc>
-                  <a:txBody>
-                    <a:bodyPr/>
-                    <a:lstStyle/>
-                    <a:p>
-                      <a:pPr>
-                        <a:defRPr sz="950">
-                          <a:solidFill>
-                            <a:srgbClr val="111827"/>
-                          </a:solidFill>
-                          <a:latin typeface="Arial"/>
-                        </a:defRPr>
-                      </a:pPr>
-                      <a:r>
-                        <a:t>4.81</a:t>
-                      </a:r>
-                    </a:p>
-                  </a:txBody>
-                  <a:tcPr/>
-                </a:tc>
-                <a:tc>
-                  <a:txBody>
-                    <a:bodyPr/>
-                    <a:lstStyle/>
-                    <a:p>
-                      <a:pPr>
-                        <a:defRPr sz="950">
-                          <a:solidFill>
-                            <a:srgbClr val="111827"/>
-                          </a:solidFill>
-                          <a:latin typeface="Arial"/>
-                        </a:defRPr>
-                      </a:pPr>
-                      <a:r>
-                        <a:t>main-dish</a:t>
-                      </a:r>
-                    </a:p>
-                  </a:txBody>
-                  <a:tcPr/>
-                </a:tc>
-              </a:tr>
-              <a:tr h="465512">
-                <a:tc>
-                  <a:txBody>
-                    <a:bodyPr/>
-                    <a:lstStyle/>
-                    <a:p>
-                      <a:pPr>
-                        <a:defRPr sz="950">
-                          <a:solidFill>
-                            <a:srgbClr val="111827"/>
-                          </a:solidFill>
-                          <a:latin typeface="Arial"/>
-                        </a:defRPr>
-                      </a:pPr>
-                      <a:r>
-                        <a:t>4</a:t>
-                      </a:r>
-                    </a:p>
-                  </a:txBody>
-                  <a:tcPr/>
-                </a:tc>
-                <a:tc>
-                  <a:txBody>
-                    <a:bodyPr/>
-                    <a:lstStyle/>
-                    <a:p>
-                      <a:pPr>
-                        <a:defRPr sz="950">
-                          <a:solidFill>
-                            <a:srgbClr val="111827"/>
-                          </a:solidFill>
-                          <a:latin typeface="Arial"/>
-                        </a:defRPr>
-                      </a:pPr>
-                      <a:r>
-                        <a:t>jo mama s world famous spaghetti</a:t>
-                      </a:r>
-                    </a:p>
-                  </a:txBody>
-                  <a:tcPr/>
-                </a:tc>
-                <a:tc>
-                  <a:txBody>
-                    <a:bodyPr/>
-                    <a:lstStyle/>
-                    <a:p>
-                      <a:pPr>
-                        <a:defRPr sz="950">
-                          <a:solidFill>
-                            <a:srgbClr val="111827"/>
-                          </a:solidFill>
-                          <a:latin typeface="Arial"/>
-                        </a:defRPr>
-                      </a:pPr>
-                      <a:r>
-                        <a:t>4.80</a:t>
-                      </a:r>
-                    </a:p>
-                  </a:txBody>
-                  <a:tcPr/>
-                </a:tc>
-                <a:tc>
-                  <a:txBody>
-                    <a:bodyPr/>
-                    <a:lstStyle/>
-                    <a:p>
-                      <a:pPr>
-                        <a:defRPr sz="950">
-                          <a:solidFill>
-                            <a:srgbClr val="111827"/>
-                          </a:solidFill>
-                          <a:latin typeface="Arial"/>
-                        </a:defRPr>
-                      </a:pPr>
-                      <a:r>
-                        <a:t>main-dish</a:t>
-                      </a:r>
-                    </a:p>
-                  </a:txBody>
-                  <a:tcPr/>
-                </a:tc>
-              </a:tr>
-              <a:tr h="465512">
-                <a:tc>
-                  <a:txBody>
-                    <a:bodyPr/>
-                    <a:lstStyle/>
-                    <a:p>
-                      <a:pPr>
-                        <a:defRPr sz="950">
-                          <a:solidFill>
-                            <a:srgbClr val="111827"/>
-                          </a:solidFill>
-                          <a:latin typeface="Arial"/>
-                        </a:defRPr>
-                      </a:pPr>
-                      <a:r>
-                        <a:t>5</a:t>
-                      </a:r>
-                    </a:p>
-                  </a:txBody>
-                  <a:tcPr/>
-                </a:tc>
-                <a:tc>
-                  <a:txBody>
-                    <a:bodyPr/>
-                    <a:lstStyle/>
-                    <a:p>
-                      <a:pPr>
-                        <a:defRPr sz="950">
-                          <a:solidFill>
-                            <a:srgbClr val="111827"/>
-                          </a:solidFill>
-                          <a:latin typeface="Arial"/>
-                        </a:defRPr>
-                      </a:pPr>
-                      <a:r>
-                        <a:t>kitten s soft snickerdoodles</a:t>
-                      </a:r>
-                    </a:p>
-                  </a:txBody>
-                  <a:tcPr/>
-                </a:tc>
-                <a:tc>
-                  <a:txBody>
-                    <a:bodyPr/>
-                    <a:lstStyle/>
-                    <a:p>
-                      <a:pPr>
-                        <a:defRPr sz="950">
-                          <a:solidFill>
-                            <a:srgbClr val="111827"/>
-                          </a:solidFill>
-                          <a:latin typeface="Arial"/>
-                        </a:defRPr>
-                      </a:pPr>
-                      <a:r>
-                        <a:t>4.78</a:t>
-                      </a:r>
-                    </a:p>
-                  </a:txBody>
-                  <a:tcPr/>
-                </a:tc>
-                <a:tc>
-                  <a:txBody>
-                    <a:bodyPr/>
-                    <a:lstStyle/>
-                    <a:p>
-                      <a:pPr>
-                        <a:defRPr sz="950">
-                          <a:solidFill>
-                            <a:srgbClr val="111827"/>
-                          </a:solidFill>
-                          <a:latin typeface="Arial"/>
-                        </a:defRPr>
-                      </a:pPr>
-                      <a:r>
-                        <a:t>desserts</a:t>
-                      </a:r>
-                    </a:p>
-                  </a:txBody>
-                  <a:tcPr/>
-                </a:tc>
-              </a:tr>
-              <a:tr h="465512">
-                <a:tc>
-                  <a:txBody>
-                    <a:bodyPr/>
-                    <a:lstStyle/>
-                    <a:p>
-                      <a:pPr>
-                        <a:defRPr sz="950">
-                          <a:solidFill>
-                            <a:srgbClr val="111827"/>
-                          </a:solidFill>
-                          <a:latin typeface="Arial"/>
-                        </a:defRPr>
-                      </a:pPr>
-                      <a:r>
-                        <a:t>6</a:t>
-                      </a:r>
-                    </a:p>
-                  </a:txBody>
-                  <a:tcPr/>
-                </a:tc>
-                <a:tc>
-                  <a:txBody>
-                    <a:bodyPr/>
-                    <a:lstStyle/>
-                    <a:p>
-                      <a:pPr>
-                        <a:defRPr sz="950">
-                          <a:solidFill>
-                            <a:srgbClr val="111827"/>
-                          </a:solidFill>
-                          <a:latin typeface="Arial"/>
-                        </a:defRPr>
-                      </a:pPr>
-                      <a:r>
-                        <a:t>best banana bread</a:t>
-                      </a:r>
-                    </a:p>
-                  </a:txBody>
-                  <a:tcPr/>
-                </a:tc>
-                <a:tc>
-                  <a:txBody>
-                    <a:bodyPr/>
-                    <a:lstStyle/>
-                    <a:p>
-                      <a:pPr>
-                        <a:defRPr sz="950">
-                          <a:solidFill>
-                            <a:srgbClr val="111827"/>
-                          </a:solidFill>
-                          <a:latin typeface="Arial"/>
-                        </a:defRPr>
-                      </a:pPr>
-                      <a:r>
-                        <a:t>4.77</a:t>
-                      </a:r>
-                    </a:p>
-                  </a:txBody>
-                  <a:tcPr/>
-                </a:tc>
-                <a:tc>
-                  <a:txBody>
-                    <a:bodyPr/>
-                    <a:lstStyle/>
-                    <a:p>
-                      <a:pPr>
-                        <a:defRPr sz="950">
-                          <a:solidFill>
-                            <a:srgbClr val="111827"/>
-                          </a:solidFill>
-                          <a:latin typeface="Arial"/>
-                        </a:defRPr>
-                      </a:pPr>
-                      <a:r>
-                        <a:t>desserts</a:t>
-                      </a:r>
-                    </a:p>
-                  </a:txBody>
-                  <a:tcPr/>
-                </a:tc>
-              </a:tr>
-              <a:tr h="465512">
-                <a:tc>
-                  <a:txBody>
-                    <a:bodyPr/>
-                    <a:lstStyle/>
-                    <a:p>
-                      <a:pPr>
-                        <a:defRPr sz="950">
-                          <a:solidFill>
-                            <a:srgbClr val="111827"/>
-                          </a:solidFill>
-                          <a:latin typeface="Arial"/>
-                        </a:defRPr>
-                      </a:pPr>
-                      <a:r>
-                        <a:t>7</a:t>
-                      </a:r>
-                    </a:p>
-                  </a:txBody>
-                  <a:tcPr/>
-                </a:tc>
-                <a:tc>
-                  <a:txBody>
-                    <a:bodyPr/>
-                    <a:lstStyle/>
-                    <a:p>
-                      <a:pPr>
-                        <a:defRPr sz="950">
-                          <a:solidFill>
-                            <a:srgbClr val="111827"/>
-                          </a:solidFill>
-                          <a:latin typeface="Arial"/>
-                        </a:defRPr>
-                      </a:pPr>
-                      <a:r>
-                        <a:t>awesome broccoli cheese soup</a:t>
-                      </a:r>
-                    </a:p>
-                  </a:txBody>
-                  <a:tcPr/>
-                </a:tc>
-                <a:tc>
-                  <a:txBody>
-                    <a:bodyPr/>
-                    <a:lstStyle/>
-                    <a:p>
-                      <a:pPr>
-                        <a:defRPr sz="950">
-                          <a:solidFill>
-                            <a:srgbClr val="111827"/>
-                          </a:solidFill>
-                          <a:latin typeface="Arial"/>
-                        </a:defRPr>
-                      </a:pPr>
-                      <a:r>
-                        <a:t>4.76</a:t>
-                      </a:r>
-                    </a:p>
-                  </a:txBody>
-                  <a:tcPr/>
-                </a:tc>
-                <a:tc>
-                  <a:txBody>
-                    <a:bodyPr/>
-                    <a:lstStyle/>
-                    <a:p>
-                      <a:pPr>
-                        <a:defRPr sz="950">
-                          <a:solidFill>
-                            <a:srgbClr val="111827"/>
-                          </a:solidFill>
-                          <a:latin typeface="Arial"/>
-                        </a:defRPr>
-                      </a:pPr>
-                      <a:r>
-                        <a:t>soups-stews</a:t>
-                      </a:r>
-                    </a:p>
-                  </a:txBody>
-                  <a:tcPr/>
-                </a:tc>
-              </a:tr>
-              <a:tr h="465512">
-                <a:tc>
-                  <a:txBody>
-                    <a:bodyPr/>
-                    <a:lstStyle/>
-                    <a:p>
-                      <a:pPr>
-                        <a:defRPr sz="950">
-                          <a:solidFill>
-                            <a:srgbClr val="111827"/>
-                          </a:solidFill>
-                          <a:latin typeface="Arial"/>
-                        </a:defRPr>
-                      </a:pPr>
-                      <a:r>
-                        <a:t>8</a:t>
-                      </a:r>
-                    </a:p>
-                  </a:txBody>
-                  <a:tcPr/>
-                </a:tc>
-                <a:tc>
-                  <a:txBody>
-                    <a:bodyPr/>
-                    <a:lstStyle/>
-                    <a:p>
-                      <a:pPr>
-                        <a:defRPr sz="950">
-                          <a:solidFill>
-                            <a:srgbClr val="111827"/>
-                          </a:solidFill>
-                          <a:latin typeface="Arial"/>
-                        </a:defRPr>
-                      </a:pPr>
-                      <a:r>
-                        <a:t>brown sugar meatloaf</a:t>
-                      </a:r>
-                    </a:p>
-                  </a:txBody>
-                  <a:tcPr/>
-                </a:tc>
-                <a:tc>
-                  <a:txBody>
-                    <a:bodyPr/>
-                    <a:lstStyle/>
-                    <a:p>
-                      <a:pPr>
-                        <a:defRPr sz="950">
-                          <a:solidFill>
-                            <a:srgbClr val="111827"/>
-                          </a:solidFill>
-                          <a:latin typeface="Arial"/>
-                        </a:defRPr>
-                      </a:pPr>
-                      <a:r>
-                        <a:t>4.76</a:t>
-                      </a:r>
-                    </a:p>
-                  </a:txBody>
-                  <a:tcPr/>
-                </a:tc>
-                <a:tc>
-                  <a:txBody>
-                    <a:bodyPr/>
-                    <a:lstStyle/>
-                    <a:p>
-                      <a:pPr>
-                        <a:defRPr sz="950">
-                          <a:solidFill>
-                            <a:srgbClr val="111827"/>
-                          </a:solidFill>
-                          <a:latin typeface="Arial"/>
-                        </a:defRPr>
-                      </a:pPr>
-                      <a:r>
-                        <a:t>main-dish</a:t>
-                      </a:r>
-                    </a:p>
-                  </a:txBody>
-                  <a:tcPr/>
-                </a:tc>
-              </a:tr>
-              <a:tr h="465512">
-                <a:tc>
-                  <a:txBody>
-                    <a:bodyPr/>
-                    <a:lstStyle/>
-                    <a:p>
-                      <a:pPr>
-                        <a:defRPr sz="950">
-                          <a:solidFill>
-                            <a:srgbClr val="111827"/>
-                          </a:solidFill>
-                          <a:latin typeface="Arial"/>
-                        </a:defRPr>
-                      </a:pPr>
-                      <a:r>
-                        <a:t>9</a:t>
-                      </a:r>
-                    </a:p>
-                  </a:txBody>
-                  <a:tcPr/>
-                </a:tc>
-                <a:tc>
-                  <a:txBody>
-                    <a:bodyPr/>
-                    <a:lstStyle/>
-                    <a:p>
-                      <a:pPr>
-                        <a:defRPr sz="950">
-                          <a:solidFill>
-                            <a:srgbClr val="111827"/>
-                          </a:solidFill>
-                          <a:latin typeface="Arial"/>
-                        </a:defRPr>
-                      </a:pPr>
-                      <a:r>
-                        <a:t>beth s melt in your mouth sugar cookies</a:t>
-                      </a:r>
-                    </a:p>
-                  </a:txBody>
-                  <a:tcPr/>
-                </a:tc>
-                <a:tc>
-                  <a:txBody>
-                    <a:bodyPr/>
-                    <a:lstStyle/>
-                    <a:p>
-                      <a:pPr>
-                        <a:defRPr sz="950">
-                          <a:solidFill>
-                            <a:srgbClr val="111827"/>
-                          </a:solidFill>
-                          <a:latin typeface="Arial"/>
-                        </a:defRPr>
-                      </a:pPr>
-                      <a:r>
-                        <a:t>4.75</a:t>
-                      </a:r>
-                    </a:p>
-                  </a:txBody>
-                  <a:tcPr/>
-                </a:tc>
-                <a:tc>
-                  <a:txBody>
-                    <a:bodyPr/>
-                    <a:lstStyle/>
-                    <a:p>
-                      <a:pPr>
-                        <a:defRPr sz="950">
-                          <a:solidFill>
-                            <a:srgbClr val="111827"/>
-                          </a:solidFill>
-                          <a:latin typeface="Arial"/>
-                        </a:defRPr>
-                      </a:pPr>
-                      <a:r>
-                        <a:t>desserts</a:t>
-                      </a:r>
-                    </a:p>
-                  </a:txBody>
-                  <a:tcPr/>
-                </a:tc>
-              </a:tr>
-              <a:tr h="465520">
-                <a:tc>
-                  <a:txBody>
-                    <a:bodyPr/>
-                    <a:lstStyle/>
-                    <a:p>
-                      <a:pPr>
-                        <a:defRPr sz="950">
-                          <a:solidFill>
-                            <a:srgbClr val="111827"/>
-                          </a:solidFill>
-                          <a:latin typeface="Arial"/>
-                        </a:defRPr>
-                      </a:pPr>
-                      <a:r>
-                        <a:t>10</a:t>
-                      </a:r>
-                    </a:p>
-                  </a:txBody>
-                  <a:tcPr/>
-                </a:tc>
-                <a:tc>
-                  <a:txBody>
-                    <a:bodyPr/>
-                    <a:lstStyle/>
-                    <a:p>
-                      <a:pPr>
-                        <a:defRPr sz="950">
-                          <a:solidFill>
-                            <a:srgbClr val="111827"/>
-                          </a:solidFill>
-                          <a:latin typeface="Arial"/>
-                        </a:defRPr>
-                      </a:pPr>
-                      <a:r>
-                        <a:t>fabulous french onion soup</a:t>
-                      </a:r>
-                    </a:p>
-                  </a:txBody>
-                  <a:tcPr/>
-                </a:tc>
-                <a:tc>
-                  <a:txBody>
-                    <a:bodyPr/>
-                    <a:lstStyle/>
-                    <a:p>
-                      <a:pPr>
-                        <a:defRPr sz="950">
-                          <a:solidFill>
-                            <a:srgbClr val="111827"/>
-                          </a:solidFill>
-                          <a:latin typeface="Arial"/>
-                        </a:defRPr>
-                      </a:pPr>
-                      <a:r>
-                        <a:t>4.74</a:t>
-                      </a:r>
-                    </a:p>
-                  </a:txBody>
-                  <a:tcPr/>
-                </a:tc>
-                <a:tc>
-                  <a:txBody>
-                    <a:bodyPr/>
-                    <a:lstStyle/>
-                    <a:p>
-                      <a:pPr>
-                        <a:defRPr sz="950">
-                          <a:solidFill>
-                            <a:srgbClr val="111827"/>
-                          </a:solidFill>
-                          <a:latin typeface="Arial"/>
-                        </a:defRPr>
-                      </a:pPr>
-                      <a:r>
-                        <a:t>soups-stews</a:t>
-                      </a:r>
-                    </a:p>
-                  </a:txBody>
-                  <a:tcPr/>
-                </a:tc>
-              </a:tr>
-            </a:tbl>
-          </a:graphicData>
-        </a:graphic>
-      </p:graphicFrame>
       <p:sp>
         <p:nvSpPr>
-          <p:cNvPr id="5" name="TextBox 4"/>
+          <p:cNvPr id="4" name="TextBox 3"/>
           <p:cNvSpPr txBox="1"/>
           <p:nvPr/>
         </p:nvSpPr>
         <p:spPr>
           <a:xfrm>
-            <a:off x="6766560" y="1188720"/>
-            <a:ext cx="4754880" cy="5120640"/>
+            <a:off x="731520" y="1188720"/>
+            <a:ext cx="10789920" cy="731520"/>
           </a:xfrm>
           <a:prstGeom prst="rect">
             <a:avLst/>
@@ -9369,7 +10445,7 @@
           <a:lstStyle/>
           <a:p>
             <a:pPr>
-              <a:defRPr sz="1400" b="1">
+              <a:defRPr sz="1200">
                 <a:solidFill>
                   <a:srgbClr val="111827"/>
                 </a:solidFill>
@@ -9377,13 +10453,13 @@
               </a:defRPr>
             </a:pPr>
             <a:r>
-              <a:t>Audit of Recommendations (User Perspective):</a:t>
+              <a:t>• Scikit Learn KMeans did not provide good clustering results; only uses Euclidean distance</a:t>
             </a:r>
           </a:p>
           <a:p>
             <a:pPr>
               <a:spcBef>
-                <a:spcPts val="1400"/>
+                <a:spcPts val="400"/>
               </a:spcBef>
               <a:defRPr sz="1200">
                 <a:solidFill>
@@ -9393,15 +10469,54 @@
               </a:defRPr>
             </a:pPr>
             <a:r>
-              <a:t>• High Predictive Accuracy: The model reliably scores candidate recipes, with predictions aligning to 4.70 - 4.90 stars.</a:t>
+              <a:t>• NLTK KMeansClusterer was used to cluster with cosine similarity; provided much clearer elbow plot and cluster distribution</a:t>
             </a:r>
           </a:p>
-          <a:p>
-            <a:pPr>
-              <a:spcBef>
-                <a:spcPts val="1400"/>
-              </a:spcBef>
-              <a:defRPr sz="1200">
+        </p:txBody>
+      </p:sp>
+      <p:sp>
+        <p:nvSpPr>
+          <p:cNvPr id="5" name="Rectangle 4"/>
+          <p:cNvSpPr/>
+          <p:nvPr/>
+        </p:nvSpPr>
+        <p:spPr>
+          <a:xfrm>
+            <a:off x="731520" y="2103120"/>
+            <a:ext cx="3474720" cy="320040"/>
+          </a:xfrm>
+          <a:prstGeom prst="rect">
+            <a:avLst/>
+          </a:prstGeom>
+          <a:solidFill>
+            <a:srgbClr val="F3F4F6"/>
+          </a:solidFill>
+          <a:ln>
+            <a:solidFill>
+              <a:srgbClr val="D1D5DB"/>
+            </a:solidFill>
+          </a:ln>
+        </p:spPr>
+        <p:style>
+          <a:lnRef idx="1">
+            <a:schemeClr val="accent1"/>
+          </a:lnRef>
+          <a:fillRef idx="3">
+            <a:schemeClr val="accent1"/>
+          </a:fillRef>
+          <a:effectRef idx="2">
+            <a:schemeClr val="accent1"/>
+          </a:effectRef>
+          <a:fontRef idx="minor">
+            <a:schemeClr val="lt1"/>
+          </a:fontRef>
+        </p:style>
+        <p:txBody>
+          <a:bodyPr rtlCol="0" anchor="ctr"/>
+          <a:lstStyle/>
+          <a:p>
+            <a:pPr algn="ctr">
+              <a:defRPr sz="1100" b="1">
                 <a:solidFill>
                   <a:srgbClr val="111827"/>
                 </a:solidFill>
@@ -9409,15 +10524,54 @@
               </a:defRPr>
             </a:pPr>
             <a:r>
-              <a:t>• Homogeneity Across Users: Pure collaborative filtering frequently recommends the same globally popular 5-star recipes (e.g. pot roast, cookies) to diverse users regardless of taste divergence.</a:t>
+              <a:t>Euclidean Distance</a:t>
             </a:r>
           </a:p>
-          <a:p>
-            <a:pPr>
-              <a:spcBef>
-                <a:spcPts val="1400"/>
-              </a:spcBef>
-              <a:defRPr sz="1200">
+        </p:txBody>
+      </p:sp>
+      <p:sp>
+        <p:nvSpPr>
+          <p:cNvPr id="6" name="Rectangle 5"/>
+          <p:cNvSpPr/>
+          <p:nvPr/>
+        </p:nvSpPr>
+        <p:spPr>
+          <a:xfrm>
+            <a:off x="4389120" y="2103120"/>
+            <a:ext cx="7040880" cy="320040"/>
+          </a:xfrm>
+          <a:prstGeom prst="rect">
+            <a:avLst/>
+          </a:prstGeom>
+          <a:solidFill>
+            <a:srgbClr val="DCFCE7"/>
+          </a:solidFill>
+          <a:ln>
+            <a:solidFill>
+              <a:srgbClr val="D1D5DB"/>
+            </a:solidFill>
+          </a:ln>
+        </p:spPr>
+        <p:style>
+          <a:lnRef idx="1">
+            <a:schemeClr val="accent1"/>
+          </a:lnRef>
+          <a:fillRef idx="3">
+            <a:schemeClr val="accent1"/>
+          </a:fillRef>
+          <a:effectRef idx="2">
+            <a:schemeClr val="accent1"/>
+          </a:effectRef>
+          <a:fontRef idx="minor">
+            <a:schemeClr val="lt1"/>
+          </a:fontRef>
+        </p:style>
+        <p:txBody>
+          <a:bodyPr rtlCol="0" anchor="ctr"/>
+          <a:lstStyle/>
+          <a:p>
+            <a:pPr algn="ctr">
+              <a:defRPr sz="1100" b="1">
                 <a:solidFill>
                   <a:srgbClr val="111827"/>
                 </a:solidFill>
@@ -9425,27 +10579,35 @@
               </a:defRPr>
             </a:pPr>
             <a:r>
-              <a:t>• Meal-Type Divergence: Cross-referencing against historical user profiles reveals instances where a user who predominantly cooks vegetarian salads or soups is recommended heavy beef roasts.</a:t>
-            </a:r>
-          </a:p>
-          <a:p>
-            <a:pPr>
-              <a:spcBef>
-                <a:spcPts val="1400"/>
-              </a:spcBef>
-              <a:defRPr sz="1200">
-                <a:solidFill>
-                  <a:srgbClr val="111827"/>
-                </a:solidFill>
-                <a:latin typeface="Arial"/>
-              </a:defRPr>
-            </a:pPr>
-            <a:r>
-              <a:t>• Takeaway: Numerical rating prediction is accurate, but qualitative recommendation utility requires semantic content filtering.</a:t>
+              <a:t>Cosine Similarity</a:t>
             </a:r>
           </a:p>
         </p:txBody>
       </p:sp>
+      <p:pic>
+        <p:nvPicPr>
+          <p:cNvPr id="7" name="Picture 6" descr="cluster_determination.png"/>
+          <p:cNvPicPr>
+            <a:picLocks noChangeAspect="1"/>
+          </p:cNvPicPr>
+          <p:nvPr/>
+        </p:nvPicPr>
+        <p:blipFill>
+          <a:blip r:embed="rId2"/>
+          <a:stretch>
+            <a:fillRect/>
+          </a:stretch>
+        </p:blipFill>
+        <p:spPr>
+          <a:xfrm>
+            <a:off x="731520" y="2514600"/>
+            <a:ext cx="10698480" cy="4834890"/>
+          </a:xfrm>
+          <a:prstGeom prst="rect">
+            <a:avLst/>
+          </a:prstGeom>
+        </p:spPr>
+      </p:pic>
     </p:spTree>
   </p:cSld>
   <p:clrMapOvr>
@@ -9540,7 +10702,7 @@
               </a:defRPr>
             </a:pPr>
             <a:r>
-              <a:t>Conclusions &amp; Future Work</a:t>
+              <a:t>Results: Cluster Based Neighborhood methods</a:t>
             </a:r>
           </a:p>
         </p:txBody>
@@ -9553,8 +10715,8 @@
         </p:nvSpPr>
         <p:spPr>
           <a:xfrm>
-            <a:off x="822960" y="1371600"/>
-            <a:ext cx="10515600" cy="5029200"/>
+            <a:off x="731520" y="1371600"/>
+            <a:ext cx="4114800" cy="4572000"/>
           </a:xfrm>
           <a:prstGeom prst="rect">
             <a:avLst/>
@@ -9568,26 +10730,7 @@
           <a:lstStyle/>
           <a:p>
             <a:pPr>
-              <a:spcBef>
-                <a:spcPts val="1800"/>
-              </a:spcBef>
-              <a:defRPr sz="1500" b="1">
-                <a:solidFill>
-                  <a:srgbClr val="2563EB"/>
-                </a:solidFill>
-                <a:latin typeface="Arial"/>
-              </a:defRPr>
-            </a:pPr>
-            <a:r>
-              <a:t>1. Strong Baseline Performance for Collaborative Filtering</a:t>
-            </a:r>
-          </a:p>
-          <a:p>
-            <a:pPr>
-              <a:spcBef>
-                <a:spcPts val="400"/>
-              </a:spcBef>
-              <a:defRPr sz="1250">
+              <a:defRPr sz="1400">
                 <a:solidFill>
                   <a:srgbClr val="111827"/>
                 </a:solidFill>
@@ -9595,31 +10738,15 @@
               </a:defRPr>
             </a:pPr>
             <a:r>
-              <a:t>With a Mean Absolute Error of ~0.35, rounding predictions to nearest whole numbers yields the true user rating in the vast majority of cases. Item-based KNNBasic (MAE 0.3548) and SVD (MAE 0.3491) offer the best combination of accuracy and runtime.</a:t>
+              <a:t>• KNN models were tested by using clusters for recipes only or users only</a:t>
             </a:r>
           </a:p>
           <a:p>
             <a:pPr>
               <a:spcBef>
-                <a:spcPts val="1800"/>
+                <a:spcPts val="2400"/>
               </a:spcBef>
-              <a:defRPr sz="1500" b="1">
-                <a:solidFill>
-                  <a:srgbClr val="2563EB"/>
-                </a:solidFill>
-                <a:latin typeface="Arial"/>
-              </a:defRPr>
-            </a:pPr>
-            <a:r>
-              <a:t>2. Collaborative Filtering Alone is Insufficient for Food</a:t>
-            </a:r>
-          </a:p>
-          <a:p>
-            <a:pPr>
-              <a:spcBef>
-                <a:spcPts val="400"/>
-              </a:spcBef>
-              <a:defRPr sz="1250">
+              <a:defRPr sz="1400">
                 <a:solidFill>
                   <a:srgbClr val="111827"/>
                 </a:solidFill>
@@ -9627,31 +10754,2948 @@
               </a:defRPr>
             </a:pPr>
             <a:r>
-              <a:t>Relying solely on user review matrices ignores ingredients, preparation time, and meal categories. Rating inflation (72% 5-star ratings) compresses predictions and amplifies popularity bias across users.</a:t>
+              <a:t>• User based KNNWithZScore had the lowest MAEs when filtering data with only clusters</a:t>
             </a:r>
           </a:p>
+        </p:txBody>
+      </p:sp>
+      <p:graphicFrame>
+        <p:nvGraphicFramePr>
+          <p:cNvPr id="5" name="Table 4"/>
+          <p:cNvGraphicFramePr>
+            <a:graphicFrameLocks noGrp="1"/>
+          </p:cNvGraphicFramePr>
+          <p:nvPr/>
+        </p:nvGraphicFramePr>
+        <p:xfrm>
+          <a:off x="4754880" y="1188720"/>
+          <a:ext cx="6858000" cy="5303520"/>
+        </p:xfrm>
+        <a:graphic>
+          <a:graphicData uri="http://schemas.openxmlformats.org/drawingml/2006/table">
+            <a:tbl>
+              <a:tblPr firstRow="1" bandRow="1">
+                <a:tableStyleId>{5C22544A-7EE6-4342-B048-85BDC9FD1C3A}</a:tableStyleId>
+              </a:tblPr>
+              <a:tblGrid>
+                <a:gridCol w="1371600"/>
+                <a:gridCol w="1005840"/>
+                <a:gridCol w="822960"/>
+                <a:gridCol w="731520"/>
+                <a:gridCol w="731520"/>
+                <a:gridCol w="731520"/>
+                <a:gridCol w="731520"/>
+                <a:gridCol w="731520"/>
+              </a:tblGrid>
+              <a:tr h="311971">
+                <a:tc>
+                  <a:txBody>
+                    <a:bodyPr/>
+                    <a:lstStyle/>
+                    <a:p>
+                      <a:pPr>
+                        <a:defRPr sz="750" b="1">
+                          <a:solidFill>
+                            <a:srgbClr val="111827"/>
+                          </a:solidFill>
+                          <a:latin typeface="Arial"/>
+                        </a:defRPr>
+                      </a:pPr>
+                      <a:r>
+                        <a:t>Model</a:t>
+                      </a:r>
+                    </a:p>
+                  </a:txBody>
+                  <a:tcPr/>
+                </a:tc>
+                <a:tc>
+                  <a:txBody>
+                    <a:bodyPr/>
+                    <a:lstStyle/>
+                    <a:p>
+                      <a:pPr>
+                        <a:defRPr sz="750" b="1">
+                          <a:solidFill>
+                            <a:srgbClr val="111827"/>
+                          </a:solidFill>
+                          <a:latin typeface="Arial"/>
+                        </a:defRPr>
+                      </a:pPr>
+                      <a:r>
+                        <a:t>Clustering_Type</a:t>
+                      </a:r>
+                    </a:p>
+                  </a:txBody>
+                  <a:tcPr/>
+                </a:tc>
+                <a:tc>
+                  <a:txBody>
+                    <a:bodyPr/>
+                    <a:lstStyle/>
+                    <a:p>
+                      <a:pPr>
+                        <a:defRPr sz="750" b="1">
+                          <a:solidFill>
+                            <a:srgbClr val="111827"/>
+                          </a:solidFill>
+                          <a:latin typeface="Arial"/>
+                        </a:defRPr>
+                      </a:pPr>
+                      <a:r>
+                        <a:t>User_Based</a:t>
+                      </a:r>
+                    </a:p>
+                  </a:txBody>
+                  <a:tcPr/>
+                </a:tc>
+                <a:tc>
+                  <a:txBody>
+                    <a:bodyPr/>
+                    <a:lstStyle/>
+                    <a:p>
+                      <a:pPr>
+                        <a:defRPr sz="750" b="1">
+                          <a:solidFill>
+                            <a:srgbClr val="111827"/>
+                          </a:solidFill>
+                          <a:latin typeface="Arial"/>
+                        </a:defRPr>
+                      </a:pPr>
+                      <a:r>
+                        <a:t>RMSE</a:t>
+                      </a:r>
+                    </a:p>
+                  </a:txBody>
+                  <a:tcPr/>
+                </a:tc>
+                <a:tc>
+                  <a:txBody>
+                    <a:bodyPr/>
+                    <a:lstStyle/>
+                    <a:p>
+                      <a:pPr>
+                        <a:defRPr sz="750" b="1">
+                          <a:solidFill>
+                            <a:srgbClr val="111827"/>
+                          </a:solidFill>
+                          <a:latin typeface="Arial"/>
+                        </a:defRPr>
+                      </a:pPr>
+                      <a:r>
+                        <a:t>MSE</a:t>
+                      </a:r>
+                    </a:p>
+                  </a:txBody>
+                  <a:tcPr/>
+                </a:tc>
+                <a:tc>
+                  <a:txBody>
+                    <a:bodyPr/>
+                    <a:lstStyle/>
+                    <a:p>
+                      <a:pPr>
+                        <a:defRPr sz="750" b="1">
+                          <a:solidFill>
+                            <a:srgbClr val="111827"/>
+                          </a:solidFill>
+                          <a:latin typeface="Arial"/>
+                        </a:defRPr>
+                      </a:pPr>
+                      <a:r>
+                        <a:t>MAE</a:t>
+                      </a:r>
+                    </a:p>
+                  </a:txBody>
+                  <a:tcPr/>
+                </a:tc>
+                <a:tc>
+                  <a:txBody>
+                    <a:bodyPr/>
+                    <a:lstStyle/>
+                    <a:p>
+                      <a:pPr>
+                        <a:defRPr sz="750" b="1">
+                          <a:solidFill>
+                            <a:srgbClr val="111827"/>
+                          </a:solidFill>
+                          <a:latin typeface="Arial"/>
+                        </a:defRPr>
+                      </a:pPr>
+                      <a:r>
+                        <a:t>Fit_Time</a:t>
+                      </a:r>
+                    </a:p>
+                  </a:txBody>
+                  <a:tcPr/>
+                </a:tc>
+                <a:tc>
+                  <a:txBody>
+                    <a:bodyPr/>
+                    <a:lstStyle/>
+                    <a:p>
+                      <a:pPr>
+                        <a:defRPr sz="750" b="1">
+                          <a:solidFill>
+                            <a:srgbClr val="111827"/>
+                          </a:solidFill>
+                          <a:latin typeface="Arial"/>
+                        </a:defRPr>
+                      </a:pPr>
+                      <a:r>
+                        <a:t>Test_Time</a:t>
+                      </a:r>
+                    </a:p>
+                  </a:txBody>
+                  <a:tcPr/>
+                </a:tc>
+              </a:tr>
+              <a:tr h="311971">
+                <a:tc>
+                  <a:txBody>
+                    <a:bodyPr/>
+                    <a:lstStyle/>
+                    <a:p>
+                      <a:pPr>
+                        <a:defRPr sz="750">
+                          <a:solidFill>
+                            <a:srgbClr val="111827"/>
+                          </a:solidFill>
+                          <a:latin typeface="Arial"/>
+                        </a:defRPr>
+                      </a:pPr>
+                      <a:r>
+                        <a:t>KNNBaseline</a:t>
+                      </a:r>
+                    </a:p>
+                  </a:txBody>
+                  <a:tcPr/>
+                </a:tc>
+                <a:tc>
+                  <a:txBody>
+                    <a:bodyPr/>
+                    <a:lstStyle/>
+                    <a:p>
+                      <a:pPr>
+                        <a:defRPr sz="750">
+                          <a:solidFill>
+                            <a:srgbClr val="111827"/>
+                          </a:solidFill>
+                          <a:latin typeface="Arial"/>
+                        </a:defRPr>
+                      </a:pPr>
+                      <a:r>
+                        <a:t>Recipe</a:t>
+                      </a:r>
+                    </a:p>
+                  </a:txBody>
+                  <a:tcPr/>
+                </a:tc>
+                <a:tc>
+                  <a:txBody>
+                    <a:bodyPr/>
+                    <a:lstStyle/>
+                    <a:p>
+                      <a:pPr>
+                        <a:defRPr sz="750">
+                          <a:solidFill>
+                            <a:srgbClr val="111827"/>
+                          </a:solidFill>
+                          <a:latin typeface="Arial"/>
+                        </a:defRPr>
+                      </a:pPr>
+                      <a:r>
+                        <a:t>False</a:t>
+                      </a:r>
+                    </a:p>
+                  </a:txBody>
+                  <a:tcPr/>
+                </a:tc>
+                <a:tc>
+                  <a:txBody>
+                    <a:bodyPr/>
+                    <a:lstStyle/>
+                    <a:p>
+                      <a:pPr>
+                        <a:defRPr sz="750">
+                          <a:solidFill>
+                            <a:srgbClr val="111827"/>
+                          </a:solidFill>
+                          <a:latin typeface="Arial"/>
+                        </a:defRPr>
+                      </a:pPr>
+                      <a:r>
+                        <a:t>0.5529</a:t>
+                      </a:r>
+                    </a:p>
+                  </a:txBody>
+                  <a:tcPr/>
+                </a:tc>
+                <a:tc>
+                  <a:txBody>
+                    <a:bodyPr/>
+                    <a:lstStyle/>
+                    <a:p>
+                      <a:pPr>
+                        <a:defRPr sz="750">
+                          <a:solidFill>
+                            <a:srgbClr val="111827"/>
+                          </a:solidFill>
+                          <a:latin typeface="Arial"/>
+                        </a:defRPr>
+                      </a:pPr>
+                      <a:r>
+                        <a:t>0.3072</a:t>
+                      </a:r>
+                    </a:p>
+                  </a:txBody>
+                  <a:tcPr/>
+                </a:tc>
+                <a:tc>
+                  <a:txBody>
+                    <a:bodyPr/>
+                    <a:lstStyle/>
+                    <a:p>
+                      <a:pPr>
+                        <a:defRPr sz="750">
+                          <a:solidFill>
+                            <a:srgbClr val="111827"/>
+                          </a:solidFill>
+                          <a:latin typeface="Arial"/>
+                        </a:defRPr>
+                      </a:pPr>
+                      <a:r>
+                        <a:t>0.3592</a:t>
+                      </a:r>
+                    </a:p>
+                  </a:txBody>
+                  <a:tcPr/>
+                </a:tc>
+                <a:tc>
+                  <a:txBody>
+                    <a:bodyPr/>
+                    <a:lstStyle/>
+                    <a:p>
+                      <a:pPr>
+                        <a:defRPr sz="750">
+                          <a:solidFill>
+                            <a:srgbClr val="111827"/>
+                          </a:solidFill>
+                          <a:latin typeface="Arial"/>
+                        </a:defRPr>
+                      </a:pPr>
+                      <a:r>
+                        <a:t>0.1336</a:t>
+                      </a:r>
+                    </a:p>
+                  </a:txBody>
+                  <a:tcPr/>
+                </a:tc>
+                <a:tc>
+                  <a:txBody>
+                    <a:bodyPr/>
+                    <a:lstStyle/>
+                    <a:p>
+                      <a:pPr>
+                        <a:defRPr sz="750">
+                          <a:solidFill>
+                            <a:srgbClr val="111827"/>
+                          </a:solidFill>
+                          <a:latin typeface="Arial"/>
+                        </a:defRPr>
+                      </a:pPr>
+                      <a:r>
+                        <a:t>0.1342</a:t>
+                      </a:r>
+                    </a:p>
+                  </a:txBody>
+                  <a:tcPr/>
+                </a:tc>
+              </a:tr>
+              <a:tr h="311971">
+                <a:tc>
+                  <a:txBody>
+                    <a:bodyPr/>
+                    <a:lstStyle/>
+                    <a:p>
+                      <a:pPr>
+                        <a:defRPr sz="750">
+                          <a:solidFill>
+                            <a:srgbClr val="111827"/>
+                          </a:solidFill>
+                          <a:latin typeface="Arial"/>
+                        </a:defRPr>
+                      </a:pPr>
+                      <a:r>
+                        <a:t>KNNBaseline</a:t>
+                      </a:r>
+                    </a:p>
+                  </a:txBody>
+                  <a:tcPr/>
+                </a:tc>
+                <a:tc>
+                  <a:txBody>
+                    <a:bodyPr/>
+                    <a:lstStyle/>
+                    <a:p>
+                      <a:pPr>
+                        <a:defRPr sz="750">
+                          <a:solidFill>
+                            <a:srgbClr val="111827"/>
+                          </a:solidFill>
+                          <a:latin typeface="Arial"/>
+                        </a:defRPr>
+                      </a:pPr>
+                      <a:r>
+                        <a:t>Recipe</a:t>
+                      </a:r>
+                    </a:p>
+                  </a:txBody>
+                  <a:tcPr/>
+                </a:tc>
+                <a:tc>
+                  <a:txBody>
+                    <a:bodyPr/>
+                    <a:lstStyle/>
+                    <a:p>
+                      <a:pPr>
+                        <a:defRPr sz="750">
+                          <a:solidFill>
+                            <a:srgbClr val="111827"/>
+                          </a:solidFill>
+                          <a:latin typeface="Arial"/>
+                        </a:defRPr>
+                      </a:pPr>
+                      <a:r>
+                        <a:t>True</a:t>
+                      </a:r>
+                    </a:p>
+                  </a:txBody>
+                  <a:tcPr/>
+                </a:tc>
+                <a:tc>
+                  <a:txBody>
+                    <a:bodyPr/>
+                    <a:lstStyle/>
+                    <a:p>
+                      <a:pPr>
+                        <a:defRPr sz="750">
+                          <a:solidFill>
+                            <a:srgbClr val="111827"/>
+                          </a:solidFill>
+                          <a:latin typeface="Arial"/>
+                        </a:defRPr>
+                      </a:pPr>
+                      <a:r>
+                        <a:t>0.5592</a:t>
+                      </a:r>
+                    </a:p>
+                  </a:txBody>
+                  <a:tcPr/>
+                </a:tc>
+                <a:tc>
+                  <a:txBody>
+                    <a:bodyPr/>
+                    <a:lstStyle/>
+                    <a:p>
+                      <a:pPr>
+                        <a:defRPr sz="750">
+                          <a:solidFill>
+                            <a:srgbClr val="111827"/>
+                          </a:solidFill>
+                          <a:latin typeface="Arial"/>
+                        </a:defRPr>
+                      </a:pPr>
+                      <a:r>
+                        <a:t>0.3143</a:t>
+                      </a:r>
+                    </a:p>
+                  </a:txBody>
+                  <a:tcPr/>
+                </a:tc>
+                <a:tc>
+                  <a:txBody>
+                    <a:bodyPr/>
+                    <a:lstStyle/>
+                    <a:p>
+                      <a:pPr>
+                        <a:defRPr sz="750">
+                          <a:solidFill>
+                            <a:srgbClr val="111827"/>
+                          </a:solidFill>
+                          <a:latin typeface="Arial"/>
+                        </a:defRPr>
+                      </a:pPr>
+                      <a:r>
+                        <a:t>0.3708</a:t>
+                      </a:r>
+                    </a:p>
+                  </a:txBody>
+                  <a:tcPr/>
+                </a:tc>
+                <a:tc>
+                  <a:txBody>
+                    <a:bodyPr/>
+                    <a:lstStyle/>
+                    <a:p>
+                      <a:pPr>
+                        <a:defRPr sz="750">
+                          <a:solidFill>
+                            <a:srgbClr val="111827"/>
+                          </a:solidFill>
+                          <a:latin typeface="Arial"/>
+                        </a:defRPr>
+                      </a:pPr>
+                      <a:r>
+                        <a:t>0.2470</a:t>
+                      </a:r>
+                    </a:p>
+                  </a:txBody>
+                  <a:tcPr/>
+                </a:tc>
+                <a:tc>
+                  <a:txBody>
+                    <a:bodyPr/>
+                    <a:lstStyle/>
+                    <a:p>
+                      <a:pPr>
+                        <a:defRPr sz="750">
+                          <a:solidFill>
+                            <a:srgbClr val="111827"/>
+                          </a:solidFill>
+                          <a:latin typeface="Arial"/>
+                        </a:defRPr>
+                      </a:pPr>
+                      <a:r>
+                        <a:t>0.1866</a:t>
+                      </a:r>
+                    </a:p>
+                  </a:txBody>
+                  <a:tcPr/>
+                </a:tc>
+              </a:tr>
+              <a:tr h="311971">
+                <a:tc>
+                  <a:txBody>
+                    <a:bodyPr/>
+                    <a:lstStyle/>
+                    <a:p>
+                      <a:pPr>
+                        <a:defRPr sz="750">
+                          <a:solidFill>
+                            <a:srgbClr val="111827"/>
+                          </a:solidFill>
+                          <a:latin typeface="Arial"/>
+                        </a:defRPr>
+                      </a:pPr>
+                      <a:r>
+                        <a:t>KNNBasic</a:t>
+                      </a:r>
+                    </a:p>
+                  </a:txBody>
+                  <a:tcPr/>
+                </a:tc>
+                <a:tc>
+                  <a:txBody>
+                    <a:bodyPr/>
+                    <a:lstStyle/>
+                    <a:p>
+                      <a:pPr>
+                        <a:defRPr sz="750">
+                          <a:solidFill>
+                            <a:srgbClr val="111827"/>
+                          </a:solidFill>
+                          <a:latin typeface="Arial"/>
+                        </a:defRPr>
+                      </a:pPr>
+                      <a:r>
+                        <a:t>Recipe</a:t>
+                      </a:r>
+                    </a:p>
+                  </a:txBody>
+                  <a:tcPr/>
+                </a:tc>
+                <a:tc>
+                  <a:txBody>
+                    <a:bodyPr/>
+                    <a:lstStyle/>
+                    <a:p>
+                      <a:pPr>
+                        <a:defRPr sz="750">
+                          <a:solidFill>
+                            <a:srgbClr val="111827"/>
+                          </a:solidFill>
+                          <a:latin typeface="Arial"/>
+                        </a:defRPr>
+                      </a:pPr>
+                      <a:r>
+                        <a:t>False</a:t>
+                      </a:r>
+                    </a:p>
+                  </a:txBody>
+                  <a:tcPr/>
+                </a:tc>
+                <a:tc>
+                  <a:txBody>
+                    <a:bodyPr/>
+                    <a:lstStyle/>
+                    <a:p>
+                      <a:pPr>
+                        <a:defRPr sz="750">
+                          <a:solidFill>
+                            <a:srgbClr val="111827"/>
+                          </a:solidFill>
+                          <a:latin typeface="Arial"/>
+                        </a:defRPr>
+                      </a:pPr>
+                      <a:r>
+                        <a:t>0.5668</a:t>
+                      </a:r>
+                    </a:p>
+                  </a:txBody>
+                  <a:tcPr/>
+                </a:tc>
+                <a:tc>
+                  <a:txBody>
+                    <a:bodyPr/>
+                    <a:lstStyle/>
+                    <a:p>
+                      <a:pPr>
+                        <a:defRPr sz="750">
+                          <a:solidFill>
+                            <a:srgbClr val="111827"/>
+                          </a:solidFill>
+                          <a:latin typeface="Arial"/>
+                        </a:defRPr>
+                      </a:pPr>
+                      <a:r>
+                        <a:t>0.3227</a:t>
+                      </a:r>
+                    </a:p>
+                  </a:txBody>
+                  <a:tcPr/>
+                </a:tc>
+                <a:tc>
+                  <a:txBody>
+                    <a:bodyPr/>
+                    <a:lstStyle/>
+                    <a:p>
+                      <a:pPr>
+                        <a:defRPr sz="750">
+                          <a:solidFill>
+                            <a:srgbClr val="111827"/>
+                          </a:solidFill>
+                          <a:latin typeface="Arial"/>
+                        </a:defRPr>
+                      </a:pPr>
+                      <a:r>
+                        <a:t>0.3649</a:t>
+                      </a:r>
+                    </a:p>
+                  </a:txBody>
+                  <a:tcPr/>
+                </a:tc>
+                <a:tc>
+                  <a:txBody>
+                    <a:bodyPr/>
+                    <a:lstStyle/>
+                    <a:p>
+                      <a:pPr>
+                        <a:defRPr sz="750">
+                          <a:solidFill>
+                            <a:srgbClr val="111827"/>
+                          </a:solidFill>
+                          <a:latin typeface="Arial"/>
+                        </a:defRPr>
+                      </a:pPr>
+                      <a:r>
+                        <a:t>0.1097</a:t>
+                      </a:r>
+                    </a:p>
+                  </a:txBody>
+                  <a:tcPr/>
+                </a:tc>
+                <a:tc>
+                  <a:txBody>
+                    <a:bodyPr/>
+                    <a:lstStyle/>
+                    <a:p>
+                      <a:pPr>
+                        <a:defRPr sz="750">
+                          <a:solidFill>
+                            <a:srgbClr val="111827"/>
+                          </a:solidFill>
+                          <a:latin typeface="Arial"/>
+                        </a:defRPr>
+                      </a:pPr>
+                      <a:r>
+                        <a:t>0.1107</a:t>
+                      </a:r>
+                    </a:p>
+                  </a:txBody>
+                  <a:tcPr/>
+                </a:tc>
+              </a:tr>
+              <a:tr h="311971">
+                <a:tc>
+                  <a:txBody>
+                    <a:bodyPr/>
+                    <a:lstStyle/>
+                    <a:p>
+                      <a:pPr>
+                        <a:defRPr sz="750">
+                          <a:solidFill>
+                            <a:srgbClr val="111827"/>
+                          </a:solidFill>
+                          <a:latin typeface="Arial"/>
+                        </a:defRPr>
+                      </a:pPr>
+                      <a:r>
+                        <a:t>KNNBasic</a:t>
+                      </a:r>
+                    </a:p>
+                  </a:txBody>
+                  <a:tcPr/>
+                </a:tc>
+                <a:tc>
+                  <a:txBody>
+                    <a:bodyPr/>
+                    <a:lstStyle/>
+                    <a:p>
+                      <a:pPr>
+                        <a:defRPr sz="750">
+                          <a:solidFill>
+                            <a:srgbClr val="111827"/>
+                          </a:solidFill>
+                          <a:latin typeface="Arial"/>
+                        </a:defRPr>
+                      </a:pPr>
+                      <a:r>
+                        <a:t>Recipe</a:t>
+                      </a:r>
+                    </a:p>
+                  </a:txBody>
+                  <a:tcPr/>
+                </a:tc>
+                <a:tc>
+                  <a:txBody>
+                    <a:bodyPr/>
+                    <a:lstStyle/>
+                    <a:p>
+                      <a:pPr>
+                        <a:defRPr sz="750">
+                          <a:solidFill>
+                            <a:srgbClr val="111827"/>
+                          </a:solidFill>
+                          <a:latin typeface="Arial"/>
+                        </a:defRPr>
+                      </a:pPr>
+                      <a:r>
+                        <a:t>True</a:t>
+                      </a:r>
+                    </a:p>
+                  </a:txBody>
+                  <a:tcPr/>
+                </a:tc>
+                <a:tc>
+                  <a:txBody>
+                    <a:bodyPr/>
+                    <a:lstStyle/>
+                    <a:p>
+                      <a:pPr>
+                        <a:defRPr sz="750">
+                          <a:solidFill>
+                            <a:srgbClr val="111827"/>
+                          </a:solidFill>
+                          <a:latin typeface="Arial"/>
+                        </a:defRPr>
+                      </a:pPr>
+                      <a:r>
+                        <a:t>0.5930</a:t>
+                      </a:r>
+                    </a:p>
+                  </a:txBody>
+                  <a:tcPr/>
+                </a:tc>
+                <a:tc>
+                  <a:txBody>
+                    <a:bodyPr/>
+                    <a:lstStyle/>
+                    <a:p>
+                      <a:pPr>
+                        <a:defRPr sz="750">
+                          <a:solidFill>
+                            <a:srgbClr val="111827"/>
+                          </a:solidFill>
+                          <a:latin typeface="Arial"/>
+                        </a:defRPr>
+                      </a:pPr>
+                      <a:r>
+                        <a:t>0.3537</a:t>
+                      </a:r>
+                    </a:p>
+                  </a:txBody>
+                  <a:tcPr/>
+                </a:tc>
+                <a:tc>
+                  <a:txBody>
+                    <a:bodyPr/>
+                    <a:lstStyle/>
+                    <a:p>
+                      <a:pPr>
+                        <a:defRPr sz="750">
+                          <a:solidFill>
+                            <a:srgbClr val="111827"/>
+                          </a:solidFill>
+                          <a:latin typeface="Arial"/>
+                        </a:defRPr>
+                      </a:pPr>
+                      <a:r>
+                        <a:t>0.3954</a:t>
+                      </a:r>
+                    </a:p>
+                  </a:txBody>
+                  <a:tcPr/>
+                </a:tc>
+                <a:tc>
+                  <a:txBody>
+                    <a:bodyPr/>
+                    <a:lstStyle/>
+                    <a:p>
+                      <a:pPr>
+                        <a:defRPr sz="750">
+                          <a:solidFill>
+                            <a:srgbClr val="111827"/>
+                          </a:solidFill>
+                          <a:latin typeface="Arial"/>
+                        </a:defRPr>
+                      </a:pPr>
+                      <a:r>
+                        <a:t>0.2189</a:t>
+                      </a:r>
+                    </a:p>
+                  </a:txBody>
+                  <a:tcPr/>
+                </a:tc>
+                <a:tc>
+                  <a:txBody>
+                    <a:bodyPr/>
+                    <a:lstStyle/>
+                    <a:p>
+                      <a:pPr>
+                        <a:defRPr sz="750">
+                          <a:solidFill>
+                            <a:srgbClr val="111827"/>
+                          </a:solidFill>
+                          <a:latin typeface="Arial"/>
+                        </a:defRPr>
+                      </a:pPr>
+                      <a:r>
+                        <a:t>0.1562</a:t>
+                      </a:r>
+                    </a:p>
+                  </a:txBody>
+                  <a:tcPr/>
+                </a:tc>
+              </a:tr>
+              <a:tr h="311971">
+                <a:tc>
+                  <a:txBody>
+                    <a:bodyPr/>
+                    <a:lstStyle/>
+                    <a:p>
+                      <a:pPr>
+                        <a:defRPr sz="750">
+                          <a:solidFill>
+                            <a:srgbClr val="111827"/>
+                          </a:solidFill>
+                          <a:latin typeface="Arial"/>
+                        </a:defRPr>
+                      </a:pPr>
+                      <a:r>
+                        <a:t>KNNWithMeans</a:t>
+                      </a:r>
+                    </a:p>
+                  </a:txBody>
+                  <a:tcPr/>
+                </a:tc>
+                <a:tc>
+                  <a:txBody>
+                    <a:bodyPr/>
+                    <a:lstStyle/>
+                    <a:p>
+                      <a:pPr>
+                        <a:defRPr sz="750">
+                          <a:solidFill>
+                            <a:srgbClr val="111827"/>
+                          </a:solidFill>
+                          <a:latin typeface="Arial"/>
+                        </a:defRPr>
+                      </a:pPr>
+                      <a:r>
+                        <a:t>Recipe</a:t>
+                      </a:r>
+                    </a:p>
+                  </a:txBody>
+                  <a:tcPr/>
+                </a:tc>
+                <a:tc>
+                  <a:txBody>
+                    <a:bodyPr/>
+                    <a:lstStyle/>
+                    <a:p>
+                      <a:pPr>
+                        <a:defRPr sz="750">
+                          <a:solidFill>
+                            <a:srgbClr val="111827"/>
+                          </a:solidFill>
+                          <a:latin typeface="Arial"/>
+                        </a:defRPr>
+                      </a:pPr>
+                      <a:r>
+                        <a:t>False</a:t>
+                      </a:r>
+                    </a:p>
+                  </a:txBody>
+                  <a:tcPr/>
+                </a:tc>
+                <a:tc>
+                  <a:txBody>
+                    <a:bodyPr/>
+                    <a:lstStyle/>
+                    <a:p>
+                      <a:pPr>
+                        <a:defRPr sz="750">
+                          <a:solidFill>
+                            <a:srgbClr val="111827"/>
+                          </a:solidFill>
+                          <a:latin typeface="Arial"/>
+                        </a:defRPr>
+                      </a:pPr>
+                      <a:r>
+                        <a:t>0.5644</a:t>
+                      </a:r>
+                    </a:p>
+                  </a:txBody>
+                  <a:tcPr/>
+                </a:tc>
+                <a:tc>
+                  <a:txBody>
+                    <a:bodyPr/>
+                    <a:lstStyle/>
+                    <a:p>
+                      <a:pPr>
+                        <a:defRPr sz="750">
+                          <a:solidFill>
+                            <a:srgbClr val="111827"/>
+                          </a:solidFill>
+                          <a:latin typeface="Arial"/>
+                        </a:defRPr>
+                      </a:pPr>
+                      <a:r>
+                        <a:t>0.3199</a:t>
+                      </a:r>
+                    </a:p>
+                  </a:txBody>
+                  <a:tcPr/>
+                </a:tc>
+                <a:tc>
+                  <a:txBody>
+                    <a:bodyPr/>
+                    <a:lstStyle/>
+                    <a:p>
+                      <a:pPr>
+                        <a:defRPr sz="750">
+                          <a:solidFill>
+                            <a:srgbClr val="111827"/>
+                          </a:solidFill>
+                          <a:latin typeface="Arial"/>
+                        </a:defRPr>
+                      </a:pPr>
+                      <a:r>
+                        <a:t>0.3651</a:t>
+                      </a:r>
+                    </a:p>
+                  </a:txBody>
+                  <a:tcPr/>
+                </a:tc>
+                <a:tc>
+                  <a:txBody>
+                    <a:bodyPr/>
+                    <a:lstStyle/>
+                    <a:p>
+                      <a:pPr>
+                        <a:defRPr sz="750">
+                          <a:solidFill>
+                            <a:srgbClr val="111827"/>
+                          </a:solidFill>
+                          <a:latin typeface="Arial"/>
+                        </a:defRPr>
+                      </a:pPr>
+                      <a:r>
+                        <a:t>0.1185</a:t>
+                      </a:r>
+                    </a:p>
+                  </a:txBody>
+                  <a:tcPr/>
+                </a:tc>
+                <a:tc>
+                  <a:txBody>
+                    <a:bodyPr/>
+                    <a:lstStyle/>
+                    <a:p>
+                      <a:pPr>
+                        <a:defRPr sz="750">
+                          <a:solidFill>
+                            <a:srgbClr val="111827"/>
+                          </a:solidFill>
+                          <a:latin typeface="Arial"/>
+                        </a:defRPr>
+                      </a:pPr>
+                      <a:r>
+                        <a:t>0.1253</a:t>
+                      </a:r>
+                    </a:p>
+                  </a:txBody>
+                  <a:tcPr/>
+                </a:tc>
+              </a:tr>
+              <a:tr h="311971">
+                <a:tc>
+                  <a:txBody>
+                    <a:bodyPr/>
+                    <a:lstStyle/>
+                    <a:p>
+                      <a:pPr>
+                        <a:defRPr sz="750">
+                          <a:solidFill>
+                            <a:srgbClr val="111827"/>
+                          </a:solidFill>
+                          <a:latin typeface="Arial"/>
+                        </a:defRPr>
+                      </a:pPr>
+                      <a:r>
+                        <a:t>KNNWithMeans</a:t>
+                      </a:r>
+                    </a:p>
+                  </a:txBody>
+                  <a:tcPr/>
+                </a:tc>
+                <a:tc>
+                  <a:txBody>
+                    <a:bodyPr/>
+                    <a:lstStyle/>
+                    <a:p>
+                      <a:pPr>
+                        <a:defRPr sz="750">
+                          <a:solidFill>
+                            <a:srgbClr val="111827"/>
+                          </a:solidFill>
+                          <a:latin typeface="Arial"/>
+                        </a:defRPr>
+                      </a:pPr>
+                      <a:r>
+                        <a:t>Recipe</a:t>
+                      </a:r>
+                    </a:p>
+                  </a:txBody>
+                  <a:tcPr/>
+                </a:tc>
+                <a:tc>
+                  <a:txBody>
+                    <a:bodyPr/>
+                    <a:lstStyle/>
+                    <a:p>
+                      <a:pPr>
+                        <a:defRPr sz="750">
+                          <a:solidFill>
+                            <a:srgbClr val="111827"/>
+                          </a:solidFill>
+                          <a:latin typeface="Arial"/>
+                        </a:defRPr>
+                      </a:pPr>
+                      <a:r>
+                        <a:t>True</a:t>
+                      </a:r>
+                    </a:p>
+                  </a:txBody>
+                  <a:tcPr/>
+                </a:tc>
+                <a:tc>
+                  <a:txBody>
+                    <a:bodyPr/>
+                    <a:lstStyle/>
+                    <a:p>
+                      <a:pPr>
+                        <a:defRPr sz="750">
+                          <a:solidFill>
+                            <a:srgbClr val="111827"/>
+                          </a:solidFill>
+                          <a:latin typeface="Arial"/>
+                        </a:defRPr>
+                      </a:pPr>
+                      <a:r>
+                        <a:t>0.5765</a:t>
+                      </a:r>
+                    </a:p>
+                  </a:txBody>
+                  <a:tcPr/>
+                </a:tc>
+                <a:tc>
+                  <a:txBody>
+                    <a:bodyPr/>
+                    <a:lstStyle/>
+                    <a:p>
+                      <a:pPr>
+                        <a:defRPr sz="750">
+                          <a:solidFill>
+                            <a:srgbClr val="111827"/>
+                          </a:solidFill>
+                          <a:latin typeface="Arial"/>
+                        </a:defRPr>
+                      </a:pPr>
+                      <a:r>
+                        <a:t>0.3335</a:t>
+                      </a:r>
+                    </a:p>
+                  </a:txBody>
+                  <a:tcPr/>
+                </a:tc>
+                <a:tc>
+                  <a:txBody>
+                    <a:bodyPr/>
+                    <a:lstStyle/>
+                    <a:p>
+                      <a:pPr>
+                        <a:defRPr sz="750">
+                          <a:solidFill>
+                            <a:srgbClr val="111827"/>
+                          </a:solidFill>
+                          <a:latin typeface="Arial"/>
+                        </a:defRPr>
+                      </a:pPr>
+                      <a:r>
+                        <a:t>0.3555</a:t>
+                      </a:r>
+                    </a:p>
+                  </a:txBody>
+                  <a:tcPr/>
+                </a:tc>
+                <a:tc>
+                  <a:txBody>
+                    <a:bodyPr/>
+                    <a:lstStyle/>
+                    <a:p>
+                      <a:pPr>
+                        <a:defRPr sz="750">
+                          <a:solidFill>
+                            <a:srgbClr val="111827"/>
+                          </a:solidFill>
+                          <a:latin typeface="Arial"/>
+                        </a:defRPr>
+                      </a:pPr>
+                      <a:r>
+                        <a:t>0.2371</a:t>
+                      </a:r>
+                    </a:p>
+                  </a:txBody>
+                  <a:tcPr/>
+                </a:tc>
+                <a:tc>
+                  <a:txBody>
+                    <a:bodyPr/>
+                    <a:lstStyle/>
+                    <a:p>
+                      <a:pPr>
+                        <a:defRPr sz="750">
+                          <a:solidFill>
+                            <a:srgbClr val="111827"/>
+                          </a:solidFill>
+                          <a:latin typeface="Arial"/>
+                        </a:defRPr>
+                      </a:pPr>
+                      <a:r>
+                        <a:t>0.1523</a:t>
+                      </a:r>
+                    </a:p>
+                  </a:txBody>
+                  <a:tcPr/>
+                </a:tc>
+              </a:tr>
+              <a:tr h="311971">
+                <a:tc>
+                  <a:txBody>
+                    <a:bodyPr/>
+                    <a:lstStyle/>
+                    <a:p>
+                      <a:pPr>
+                        <a:defRPr sz="750">
+                          <a:solidFill>
+                            <a:srgbClr val="111827"/>
+                          </a:solidFill>
+                          <a:latin typeface="Arial"/>
+                        </a:defRPr>
+                      </a:pPr>
+                      <a:r>
+                        <a:t>KNNWithZScore</a:t>
+                      </a:r>
+                    </a:p>
+                  </a:txBody>
+                  <a:tcPr>
+                    <a:solidFill>
+                      <a:srgbClr val="DBEAFE"/>
+                    </a:solidFill>
+                  </a:tcPr>
+                </a:tc>
+                <a:tc>
+                  <a:txBody>
+                    <a:bodyPr/>
+                    <a:lstStyle/>
+                    <a:p>
+                      <a:pPr>
+                        <a:defRPr sz="750">
+                          <a:solidFill>
+                            <a:srgbClr val="111827"/>
+                          </a:solidFill>
+                          <a:latin typeface="Arial"/>
+                        </a:defRPr>
+                      </a:pPr>
+                      <a:r>
+                        <a:t>Recipe</a:t>
+                      </a:r>
+                    </a:p>
+                  </a:txBody>
+                  <a:tcPr>
+                    <a:solidFill>
+                      <a:srgbClr val="DBEAFE"/>
+                    </a:solidFill>
+                  </a:tcPr>
+                </a:tc>
+                <a:tc>
+                  <a:txBody>
+                    <a:bodyPr/>
+                    <a:lstStyle/>
+                    <a:p>
+                      <a:pPr>
+                        <a:defRPr sz="750">
+                          <a:solidFill>
+                            <a:srgbClr val="111827"/>
+                          </a:solidFill>
+                          <a:latin typeface="Arial"/>
+                        </a:defRPr>
+                      </a:pPr>
+                      <a:r>
+                        <a:t>False</a:t>
+                      </a:r>
+                    </a:p>
+                  </a:txBody>
+                  <a:tcPr>
+                    <a:solidFill>
+                      <a:srgbClr val="DBEAFE"/>
+                    </a:solidFill>
+                  </a:tcPr>
+                </a:tc>
+                <a:tc>
+                  <a:txBody>
+                    <a:bodyPr/>
+                    <a:lstStyle/>
+                    <a:p>
+                      <a:pPr>
+                        <a:defRPr sz="750">
+                          <a:solidFill>
+                            <a:srgbClr val="111827"/>
+                          </a:solidFill>
+                          <a:latin typeface="Arial"/>
+                        </a:defRPr>
+                      </a:pPr>
+                      <a:r>
+                        <a:t>0.5675</a:t>
+                      </a:r>
+                    </a:p>
+                  </a:txBody>
+                  <a:tcPr>
+                    <a:solidFill>
+                      <a:srgbClr val="DBEAFE"/>
+                    </a:solidFill>
+                  </a:tcPr>
+                </a:tc>
+                <a:tc>
+                  <a:txBody>
+                    <a:bodyPr/>
+                    <a:lstStyle/>
+                    <a:p>
+                      <a:pPr>
+                        <a:defRPr sz="750">
+                          <a:solidFill>
+                            <a:srgbClr val="111827"/>
+                          </a:solidFill>
+                          <a:latin typeface="Arial"/>
+                        </a:defRPr>
+                      </a:pPr>
+                      <a:r>
+                        <a:t>0.3235</a:t>
+                      </a:r>
+                    </a:p>
+                  </a:txBody>
+                  <a:tcPr>
+                    <a:solidFill>
+                      <a:srgbClr val="DBEAFE"/>
+                    </a:solidFill>
+                  </a:tcPr>
+                </a:tc>
+                <a:tc>
+                  <a:txBody>
+                    <a:bodyPr/>
+                    <a:lstStyle/>
+                    <a:p>
+                      <a:pPr>
+                        <a:defRPr sz="750">
+                          <a:solidFill>
+                            <a:srgbClr val="111827"/>
+                          </a:solidFill>
+                          <a:latin typeface="Arial"/>
+                        </a:defRPr>
+                      </a:pPr>
+                      <a:r>
+                        <a:t>0.3626</a:t>
+                      </a:r>
+                    </a:p>
+                  </a:txBody>
+                  <a:tcPr>
+                    <a:solidFill>
+                      <a:srgbClr val="DBEAFE"/>
+                    </a:solidFill>
+                  </a:tcPr>
+                </a:tc>
+                <a:tc>
+                  <a:txBody>
+                    <a:bodyPr/>
+                    <a:lstStyle/>
+                    <a:p>
+                      <a:pPr>
+                        <a:defRPr sz="750">
+                          <a:solidFill>
+                            <a:srgbClr val="111827"/>
+                          </a:solidFill>
+                          <a:latin typeface="Arial"/>
+                        </a:defRPr>
+                      </a:pPr>
+                      <a:r>
+                        <a:t>0.1429</a:t>
+                      </a:r>
+                    </a:p>
+                  </a:txBody>
+                  <a:tcPr>
+                    <a:solidFill>
+                      <a:srgbClr val="DBEAFE"/>
+                    </a:solidFill>
+                  </a:tcPr>
+                </a:tc>
+                <a:tc>
+                  <a:txBody>
+                    <a:bodyPr/>
+                    <a:lstStyle/>
+                    <a:p>
+                      <a:pPr>
+                        <a:defRPr sz="750">
+                          <a:solidFill>
+                            <a:srgbClr val="111827"/>
+                          </a:solidFill>
+                          <a:latin typeface="Arial"/>
+                        </a:defRPr>
+                      </a:pPr>
+                      <a:r>
+                        <a:t>0.1328</a:t>
+                      </a:r>
+                    </a:p>
+                  </a:txBody>
+                  <a:tcPr>
+                    <a:solidFill>
+                      <a:srgbClr val="DBEAFE"/>
+                    </a:solidFill>
+                  </a:tcPr>
+                </a:tc>
+              </a:tr>
+              <a:tr h="311971">
+                <a:tc>
+                  <a:txBody>
+                    <a:bodyPr/>
+                    <a:lstStyle/>
+                    <a:p>
+                      <a:pPr>
+                        <a:defRPr sz="750">
+                          <a:solidFill>
+                            <a:srgbClr val="111827"/>
+                          </a:solidFill>
+                          <a:latin typeface="Arial"/>
+                        </a:defRPr>
+                      </a:pPr>
+                      <a:r>
+                        <a:t>KNNWithZScore</a:t>
+                      </a:r>
+                    </a:p>
+                  </a:txBody>
+                  <a:tcPr/>
+                </a:tc>
+                <a:tc>
+                  <a:txBody>
+                    <a:bodyPr/>
+                    <a:lstStyle/>
+                    <a:p>
+                      <a:pPr>
+                        <a:defRPr sz="750">
+                          <a:solidFill>
+                            <a:srgbClr val="111827"/>
+                          </a:solidFill>
+                          <a:latin typeface="Arial"/>
+                        </a:defRPr>
+                      </a:pPr>
+                      <a:r>
+                        <a:t>Recipe</a:t>
+                      </a:r>
+                    </a:p>
+                  </a:txBody>
+                  <a:tcPr/>
+                </a:tc>
+                <a:tc>
+                  <a:txBody>
+                    <a:bodyPr/>
+                    <a:lstStyle/>
+                    <a:p>
+                      <a:pPr>
+                        <a:defRPr sz="750">
+                          <a:solidFill>
+                            <a:srgbClr val="111827"/>
+                          </a:solidFill>
+                          <a:latin typeface="Arial"/>
+                        </a:defRPr>
+                      </a:pPr>
+                      <a:r>
+                        <a:t>True</a:t>
+                      </a:r>
+                    </a:p>
+                  </a:txBody>
+                  <a:tcPr/>
+                </a:tc>
+                <a:tc>
+                  <a:txBody>
+                    <a:bodyPr/>
+                    <a:lstStyle/>
+                    <a:p>
+                      <a:pPr>
+                        <a:defRPr sz="750">
+                          <a:solidFill>
+                            <a:srgbClr val="111827"/>
+                          </a:solidFill>
+                          <a:latin typeface="Arial"/>
+                        </a:defRPr>
+                      </a:pPr>
+                      <a:r>
+                        <a:t>0.5809</a:t>
+                      </a:r>
+                    </a:p>
+                  </a:txBody>
+                  <a:tcPr/>
+                </a:tc>
+                <a:tc>
+                  <a:txBody>
+                    <a:bodyPr/>
+                    <a:lstStyle/>
+                    <a:p>
+                      <a:pPr>
+                        <a:defRPr sz="750">
+                          <a:solidFill>
+                            <a:srgbClr val="111827"/>
+                          </a:solidFill>
+                          <a:latin typeface="Arial"/>
+                        </a:defRPr>
+                      </a:pPr>
+                      <a:r>
+                        <a:t>0.3386</a:t>
+                      </a:r>
+                    </a:p>
+                  </a:txBody>
+                  <a:tcPr/>
+                </a:tc>
+                <a:tc>
+                  <a:txBody>
+                    <a:bodyPr/>
+                    <a:lstStyle/>
+                    <a:p>
+                      <a:pPr>
+                        <a:defRPr sz="750">
+                          <a:solidFill>
+                            <a:srgbClr val="111827"/>
+                          </a:solidFill>
+                          <a:latin typeface="Arial"/>
+                        </a:defRPr>
+                      </a:pPr>
+                      <a:r>
+                        <a:t>0.3541</a:t>
+                      </a:r>
+                    </a:p>
+                  </a:txBody>
+                  <a:tcPr/>
+                </a:tc>
+                <a:tc>
+                  <a:txBody>
+                    <a:bodyPr/>
+                    <a:lstStyle/>
+                    <a:p>
+                      <a:pPr>
+                        <a:defRPr sz="750">
+                          <a:solidFill>
+                            <a:srgbClr val="111827"/>
+                          </a:solidFill>
+                          <a:latin typeface="Arial"/>
+                        </a:defRPr>
+                      </a:pPr>
+                      <a:r>
+                        <a:t>0.2680</a:t>
+                      </a:r>
+                    </a:p>
+                  </a:txBody>
+                  <a:tcPr/>
+                </a:tc>
+                <a:tc>
+                  <a:txBody>
+                    <a:bodyPr/>
+                    <a:lstStyle/>
+                    <a:p>
+                      <a:pPr>
+                        <a:defRPr sz="750">
+                          <a:solidFill>
+                            <a:srgbClr val="111827"/>
+                          </a:solidFill>
+                          <a:latin typeface="Arial"/>
+                        </a:defRPr>
+                      </a:pPr>
+                      <a:r>
+                        <a:t>0.1638</a:t>
+                      </a:r>
+                    </a:p>
+                  </a:txBody>
+                  <a:tcPr/>
+                </a:tc>
+              </a:tr>
+              <a:tr h="311971">
+                <a:tc>
+                  <a:txBody>
+                    <a:bodyPr/>
+                    <a:lstStyle/>
+                    <a:p>
+                      <a:pPr>
+                        <a:defRPr sz="750">
+                          <a:solidFill>
+                            <a:srgbClr val="111827"/>
+                          </a:solidFill>
+                          <a:latin typeface="Arial"/>
+                        </a:defRPr>
+                      </a:pPr>
+                      <a:r>
+                        <a:t>KNNBaseline</a:t>
+                      </a:r>
+                    </a:p>
+                  </a:txBody>
+                  <a:tcPr/>
+                </a:tc>
+                <a:tc>
+                  <a:txBody>
+                    <a:bodyPr/>
+                    <a:lstStyle/>
+                    <a:p>
+                      <a:pPr>
+                        <a:defRPr sz="750">
+                          <a:solidFill>
+                            <a:srgbClr val="111827"/>
+                          </a:solidFill>
+                          <a:latin typeface="Arial"/>
+                        </a:defRPr>
+                      </a:pPr>
+                      <a:r>
+                        <a:t>User</a:t>
+                      </a:r>
+                    </a:p>
+                  </a:txBody>
+                  <a:tcPr/>
+                </a:tc>
+                <a:tc>
+                  <a:txBody>
+                    <a:bodyPr/>
+                    <a:lstStyle/>
+                    <a:p>
+                      <a:pPr>
+                        <a:defRPr sz="750">
+                          <a:solidFill>
+                            <a:srgbClr val="111827"/>
+                          </a:solidFill>
+                          <a:latin typeface="Arial"/>
+                        </a:defRPr>
+                      </a:pPr>
+                      <a:r>
+                        <a:t>False</a:t>
+                      </a:r>
+                    </a:p>
+                  </a:txBody>
+                  <a:tcPr/>
+                </a:tc>
+                <a:tc>
+                  <a:txBody>
+                    <a:bodyPr/>
+                    <a:lstStyle/>
+                    <a:p>
+                      <a:pPr>
+                        <a:defRPr sz="750">
+                          <a:solidFill>
+                            <a:srgbClr val="111827"/>
+                          </a:solidFill>
+                          <a:latin typeface="Arial"/>
+                        </a:defRPr>
+                      </a:pPr>
+                      <a:r>
+                        <a:t>0.5429</a:t>
+                      </a:r>
+                    </a:p>
+                  </a:txBody>
+                  <a:tcPr/>
+                </a:tc>
+                <a:tc>
+                  <a:txBody>
+                    <a:bodyPr/>
+                    <a:lstStyle/>
+                    <a:p>
+                      <a:pPr>
+                        <a:defRPr sz="750">
+                          <a:solidFill>
+                            <a:srgbClr val="111827"/>
+                          </a:solidFill>
+                          <a:latin typeface="Arial"/>
+                        </a:defRPr>
+                      </a:pPr>
+                      <a:r>
+                        <a:t>0.3009</a:t>
+                      </a:r>
+                    </a:p>
+                  </a:txBody>
+                  <a:tcPr/>
+                </a:tc>
+                <a:tc>
+                  <a:txBody>
+                    <a:bodyPr/>
+                    <a:lstStyle/>
+                    <a:p>
+                      <a:pPr>
+                        <a:defRPr sz="750">
+                          <a:solidFill>
+                            <a:srgbClr val="111827"/>
+                          </a:solidFill>
+                          <a:latin typeface="Arial"/>
+                        </a:defRPr>
+                      </a:pPr>
+                      <a:r>
+                        <a:t>0.3499</a:t>
+                      </a:r>
+                    </a:p>
+                  </a:txBody>
+                  <a:tcPr/>
+                </a:tc>
+                <a:tc>
+                  <a:txBody>
+                    <a:bodyPr/>
+                    <a:lstStyle/>
+                    <a:p>
+                      <a:pPr>
+                        <a:defRPr sz="750">
+                          <a:solidFill>
+                            <a:srgbClr val="111827"/>
+                          </a:solidFill>
+                          <a:latin typeface="Arial"/>
+                        </a:defRPr>
+                      </a:pPr>
+                      <a:r>
+                        <a:t>0.9116</a:t>
+                      </a:r>
+                    </a:p>
+                  </a:txBody>
+                  <a:tcPr/>
+                </a:tc>
+                <a:tc>
+                  <a:txBody>
+                    <a:bodyPr/>
+                    <a:lstStyle/>
+                    <a:p>
+                      <a:pPr>
+                        <a:defRPr sz="750">
+                          <a:solidFill>
+                            <a:srgbClr val="111827"/>
+                          </a:solidFill>
+                          <a:latin typeface="Arial"/>
+                        </a:defRPr>
+                      </a:pPr>
+                      <a:r>
+                        <a:t>0.2535</a:t>
+                      </a:r>
+                    </a:p>
+                  </a:txBody>
+                  <a:tcPr/>
+                </a:tc>
+              </a:tr>
+              <a:tr h="311971">
+                <a:tc>
+                  <a:txBody>
+                    <a:bodyPr/>
+                    <a:lstStyle/>
+                    <a:p>
+                      <a:pPr>
+                        <a:defRPr sz="750">
+                          <a:solidFill>
+                            <a:srgbClr val="111827"/>
+                          </a:solidFill>
+                          <a:latin typeface="Arial"/>
+                        </a:defRPr>
+                      </a:pPr>
+                      <a:r>
+                        <a:t>KNNBaseline</a:t>
+                      </a:r>
+                    </a:p>
+                  </a:txBody>
+                  <a:tcPr/>
+                </a:tc>
+                <a:tc>
+                  <a:txBody>
+                    <a:bodyPr/>
+                    <a:lstStyle/>
+                    <a:p>
+                      <a:pPr>
+                        <a:defRPr sz="750">
+                          <a:solidFill>
+                            <a:srgbClr val="111827"/>
+                          </a:solidFill>
+                          <a:latin typeface="Arial"/>
+                        </a:defRPr>
+                      </a:pPr>
+                      <a:r>
+                        <a:t>User</a:t>
+                      </a:r>
+                    </a:p>
+                  </a:txBody>
+                  <a:tcPr/>
+                </a:tc>
+                <a:tc>
+                  <a:txBody>
+                    <a:bodyPr/>
+                    <a:lstStyle/>
+                    <a:p>
+                      <a:pPr>
+                        <a:defRPr sz="750">
+                          <a:solidFill>
+                            <a:srgbClr val="111827"/>
+                          </a:solidFill>
+                          <a:latin typeface="Arial"/>
+                        </a:defRPr>
+                      </a:pPr>
+                      <a:r>
+                        <a:t>True</a:t>
+                      </a:r>
+                    </a:p>
+                  </a:txBody>
+                  <a:tcPr/>
+                </a:tc>
+                <a:tc>
+                  <a:txBody>
+                    <a:bodyPr/>
+                    <a:lstStyle/>
+                    <a:p>
+                      <a:pPr>
+                        <a:defRPr sz="750">
+                          <a:solidFill>
+                            <a:srgbClr val="111827"/>
+                          </a:solidFill>
+                          <a:latin typeface="Arial"/>
+                        </a:defRPr>
+                      </a:pPr>
+                      <a:r>
+                        <a:t>0.5389</a:t>
+                      </a:r>
+                    </a:p>
+                  </a:txBody>
+                  <a:tcPr/>
+                </a:tc>
+                <a:tc>
+                  <a:txBody>
+                    <a:bodyPr/>
+                    <a:lstStyle/>
+                    <a:p>
+                      <a:pPr>
+                        <a:defRPr sz="750">
+                          <a:solidFill>
+                            <a:srgbClr val="111827"/>
+                          </a:solidFill>
+                          <a:latin typeface="Arial"/>
+                        </a:defRPr>
+                      </a:pPr>
+                      <a:r>
+                        <a:t>0.2967</a:t>
+                      </a:r>
+                    </a:p>
+                  </a:txBody>
+                  <a:tcPr/>
+                </a:tc>
+                <a:tc>
+                  <a:txBody>
+                    <a:bodyPr/>
+                    <a:lstStyle/>
+                    <a:p>
+                      <a:pPr>
+                        <a:defRPr sz="750">
+                          <a:solidFill>
+                            <a:srgbClr val="111827"/>
+                          </a:solidFill>
+                          <a:latin typeface="Arial"/>
+                        </a:defRPr>
+                      </a:pPr>
+                      <a:r>
+                        <a:t>0.3540</a:t>
+                      </a:r>
+                    </a:p>
+                  </a:txBody>
+                  <a:tcPr/>
+                </a:tc>
+                <a:tc>
+                  <a:txBody>
+                    <a:bodyPr/>
+                    <a:lstStyle/>
+                    <a:p>
+                      <a:pPr>
+                        <a:defRPr sz="750">
+                          <a:solidFill>
+                            <a:srgbClr val="111827"/>
+                          </a:solidFill>
+                          <a:latin typeface="Arial"/>
+                        </a:defRPr>
+                      </a:pPr>
+                      <a:r>
+                        <a:t>0.0571</a:t>
+                      </a:r>
+                    </a:p>
+                  </a:txBody>
+                  <a:tcPr/>
+                </a:tc>
+                <a:tc>
+                  <a:txBody>
+                    <a:bodyPr/>
+                    <a:lstStyle/>
+                    <a:p>
+                      <a:pPr>
+                        <a:defRPr sz="750">
+                          <a:solidFill>
+                            <a:srgbClr val="111827"/>
+                          </a:solidFill>
+                          <a:latin typeface="Arial"/>
+                        </a:defRPr>
+                      </a:pPr>
+                      <a:r>
+                        <a:t>0.0862</a:t>
+                      </a:r>
+                    </a:p>
+                  </a:txBody>
+                  <a:tcPr/>
+                </a:tc>
+              </a:tr>
+              <a:tr h="311971">
+                <a:tc>
+                  <a:txBody>
+                    <a:bodyPr/>
+                    <a:lstStyle/>
+                    <a:p>
+                      <a:pPr>
+                        <a:defRPr sz="750">
+                          <a:solidFill>
+                            <a:srgbClr val="111827"/>
+                          </a:solidFill>
+                          <a:latin typeface="Arial"/>
+                        </a:defRPr>
+                      </a:pPr>
+                      <a:r>
+                        <a:t>KNNBasic</a:t>
+                      </a:r>
+                    </a:p>
+                  </a:txBody>
+                  <a:tcPr/>
+                </a:tc>
+                <a:tc>
+                  <a:txBody>
+                    <a:bodyPr/>
+                    <a:lstStyle/>
+                    <a:p>
+                      <a:pPr>
+                        <a:defRPr sz="750">
+                          <a:solidFill>
+                            <a:srgbClr val="111827"/>
+                          </a:solidFill>
+                          <a:latin typeface="Arial"/>
+                        </a:defRPr>
+                      </a:pPr>
+                      <a:r>
+                        <a:t>User</a:t>
+                      </a:r>
+                    </a:p>
+                  </a:txBody>
+                  <a:tcPr/>
+                </a:tc>
+                <a:tc>
+                  <a:txBody>
+                    <a:bodyPr/>
+                    <a:lstStyle/>
+                    <a:p>
+                      <a:pPr>
+                        <a:defRPr sz="750">
+                          <a:solidFill>
+                            <a:srgbClr val="111827"/>
+                          </a:solidFill>
+                          <a:latin typeface="Arial"/>
+                        </a:defRPr>
+                      </a:pPr>
+                      <a:r>
+                        <a:t>False</a:t>
+                      </a:r>
+                    </a:p>
+                  </a:txBody>
+                  <a:tcPr/>
+                </a:tc>
+                <a:tc>
+                  <a:txBody>
+                    <a:bodyPr/>
+                    <a:lstStyle/>
+                    <a:p>
+                      <a:pPr>
+                        <a:defRPr sz="750">
+                          <a:solidFill>
+                            <a:srgbClr val="111827"/>
+                          </a:solidFill>
+                          <a:latin typeface="Arial"/>
+                        </a:defRPr>
+                      </a:pPr>
+                      <a:r>
+                        <a:t>0.5596</a:t>
+                      </a:r>
+                    </a:p>
+                  </a:txBody>
+                  <a:tcPr/>
+                </a:tc>
+                <a:tc>
+                  <a:txBody>
+                    <a:bodyPr/>
+                    <a:lstStyle/>
+                    <a:p>
+                      <a:pPr>
+                        <a:defRPr sz="750">
+                          <a:solidFill>
+                            <a:srgbClr val="111827"/>
+                          </a:solidFill>
+                          <a:latin typeface="Arial"/>
+                        </a:defRPr>
+                      </a:pPr>
+                      <a:r>
+                        <a:t>0.3197</a:t>
+                      </a:r>
+                    </a:p>
+                  </a:txBody>
+                  <a:tcPr/>
+                </a:tc>
+                <a:tc>
+                  <a:txBody>
+                    <a:bodyPr/>
+                    <a:lstStyle/>
+                    <a:p>
+                      <a:pPr>
+                        <a:defRPr sz="750">
+                          <a:solidFill>
+                            <a:srgbClr val="111827"/>
+                          </a:solidFill>
+                          <a:latin typeface="Arial"/>
+                        </a:defRPr>
+                      </a:pPr>
+                      <a:r>
+                        <a:t>0.3592</a:t>
+                      </a:r>
+                    </a:p>
+                  </a:txBody>
+                  <a:tcPr/>
+                </a:tc>
+                <a:tc>
+                  <a:txBody>
+                    <a:bodyPr/>
+                    <a:lstStyle/>
+                    <a:p>
+                      <a:pPr>
+                        <a:defRPr sz="750">
+                          <a:solidFill>
+                            <a:srgbClr val="111827"/>
+                          </a:solidFill>
+                          <a:latin typeface="Arial"/>
+                        </a:defRPr>
+                      </a:pPr>
+                      <a:r>
+                        <a:t>0.9093</a:t>
+                      </a:r>
+                    </a:p>
+                  </a:txBody>
+                  <a:tcPr/>
+                </a:tc>
+                <a:tc>
+                  <a:txBody>
+                    <a:bodyPr/>
+                    <a:lstStyle/>
+                    <a:p>
+                      <a:pPr>
+                        <a:defRPr sz="750">
+                          <a:solidFill>
+                            <a:srgbClr val="111827"/>
+                          </a:solidFill>
+                          <a:latin typeface="Arial"/>
+                        </a:defRPr>
+                      </a:pPr>
+                      <a:r>
+                        <a:t>0.2220</a:t>
+                      </a:r>
+                    </a:p>
+                  </a:txBody>
+                  <a:tcPr/>
+                </a:tc>
+              </a:tr>
+              <a:tr h="311971">
+                <a:tc>
+                  <a:txBody>
+                    <a:bodyPr/>
+                    <a:lstStyle/>
+                    <a:p>
+                      <a:pPr>
+                        <a:defRPr sz="750">
+                          <a:solidFill>
+                            <a:srgbClr val="111827"/>
+                          </a:solidFill>
+                          <a:latin typeface="Arial"/>
+                        </a:defRPr>
+                      </a:pPr>
+                      <a:r>
+                        <a:t>KNNBasic</a:t>
+                      </a:r>
+                    </a:p>
+                  </a:txBody>
+                  <a:tcPr/>
+                </a:tc>
+                <a:tc>
+                  <a:txBody>
+                    <a:bodyPr/>
+                    <a:lstStyle/>
+                    <a:p>
+                      <a:pPr>
+                        <a:defRPr sz="750">
+                          <a:solidFill>
+                            <a:srgbClr val="111827"/>
+                          </a:solidFill>
+                          <a:latin typeface="Arial"/>
+                        </a:defRPr>
+                      </a:pPr>
+                      <a:r>
+                        <a:t>User</a:t>
+                      </a:r>
+                    </a:p>
+                  </a:txBody>
+                  <a:tcPr/>
+                </a:tc>
+                <a:tc>
+                  <a:txBody>
+                    <a:bodyPr/>
+                    <a:lstStyle/>
+                    <a:p>
+                      <a:pPr>
+                        <a:defRPr sz="750">
+                          <a:solidFill>
+                            <a:srgbClr val="111827"/>
+                          </a:solidFill>
+                          <a:latin typeface="Arial"/>
+                        </a:defRPr>
+                      </a:pPr>
+                      <a:r>
+                        <a:t>True</a:t>
+                      </a:r>
+                    </a:p>
+                  </a:txBody>
+                  <a:tcPr/>
+                </a:tc>
+                <a:tc>
+                  <a:txBody>
+                    <a:bodyPr/>
+                    <a:lstStyle/>
+                    <a:p>
+                      <a:pPr>
+                        <a:defRPr sz="750">
+                          <a:solidFill>
+                            <a:srgbClr val="111827"/>
+                          </a:solidFill>
+                          <a:latin typeface="Arial"/>
+                        </a:defRPr>
+                      </a:pPr>
+                      <a:r>
+                        <a:t>0.5840</a:t>
+                      </a:r>
+                    </a:p>
+                  </a:txBody>
+                  <a:tcPr/>
+                </a:tc>
+                <a:tc>
+                  <a:txBody>
+                    <a:bodyPr/>
+                    <a:lstStyle/>
+                    <a:p>
+                      <a:pPr>
+                        <a:defRPr sz="750">
+                          <a:solidFill>
+                            <a:srgbClr val="111827"/>
+                          </a:solidFill>
+                          <a:latin typeface="Arial"/>
+                        </a:defRPr>
+                      </a:pPr>
+                      <a:r>
+                        <a:t>0.3480</a:t>
+                      </a:r>
+                    </a:p>
+                  </a:txBody>
+                  <a:tcPr/>
+                </a:tc>
+                <a:tc>
+                  <a:txBody>
+                    <a:bodyPr/>
+                    <a:lstStyle/>
+                    <a:p>
+                      <a:pPr>
+                        <a:defRPr sz="750">
+                          <a:solidFill>
+                            <a:srgbClr val="111827"/>
+                          </a:solidFill>
+                          <a:latin typeface="Arial"/>
+                        </a:defRPr>
+                      </a:pPr>
+                      <a:r>
+                        <a:t>0.3956</a:t>
+                      </a:r>
+                    </a:p>
+                  </a:txBody>
+                  <a:tcPr/>
+                </a:tc>
+                <a:tc>
+                  <a:txBody>
+                    <a:bodyPr/>
+                    <a:lstStyle/>
+                    <a:p>
+                      <a:pPr>
+                        <a:defRPr sz="750">
+                          <a:solidFill>
+                            <a:srgbClr val="111827"/>
+                          </a:solidFill>
+                          <a:latin typeface="Arial"/>
+                        </a:defRPr>
+                      </a:pPr>
+                      <a:r>
+                        <a:t>0.0358</a:t>
+                      </a:r>
+                    </a:p>
+                  </a:txBody>
+                  <a:tcPr/>
+                </a:tc>
+                <a:tc>
+                  <a:txBody>
+                    <a:bodyPr/>
+                    <a:lstStyle/>
+                    <a:p>
+                      <a:pPr>
+                        <a:defRPr sz="750">
+                          <a:solidFill>
+                            <a:srgbClr val="111827"/>
+                          </a:solidFill>
+                          <a:latin typeface="Arial"/>
+                        </a:defRPr>
+                      </a:pPr>
+                      <a:r>
+                        <a:t>0.0652</a:t>
+                      </a:r>
+                    </a:p>
+                  </a:txBody>
+                  <a:tcPr/>
+                </a:tc>
+              </a:tr>
+              <a:tr h="311971">
+                <a:tc>
+                  <a:txBody>
+                    <a:bodyPr/>
+                    <a:lstStyle/>
+                    <a:p>
+                      <a:pPr>
+                        <a:defRPr sz="750">
+                          <a:solidFill>
+                            <a:srgbClr val="111827"/>
+                          </a:solidFill>
+                          <a:latin typeface="Arial"/>
+                        </a:defRPr>
+                      </a:pPr>
+                      <a:r>
+                        <a:t>KNNWithMeans</a:t>
+                      </a:r>
+                    </a:p>
+                  </a:txBody>
+                  <a:tcPr/>
+                </a:tc>
+                <a:tc>
+                  <a:txBody>
+                    <a:bodyPr/>
+                    <a:lstStyle/>
+                    <a:p>
+                      <a:pPr>
+                        <a:defRPr sz="750">
+                          <a:solidFill>
+                            <a:srgbClr val="111827"/>
+                          </a:solidFill>
+                          <a:latin typeface="Arial"/>
+                        </a:defRPr>
+                      </a:pPr>
+                      <a:r>
+                        <a:t>User</a:t>
+                      </a:r>
+                    </a:p>
+                  </a:txBody>
+                  <a:tcPr/>
+                </a:tc>
+                <a:tc>
+                  <a:txBody>
+                    <a:bodyPr/>
+                    <a:lstStyle/>
+                    <a:p>
+                      <a:pPr>
+                        <a:defRPr sz="750">
+                          <a:solidFill>
+                            <a:srgbClr val="111827"/>
+                          </a:solidFill>
+                          <a:latin typeface="Arial"/>
+                        </a:defRPr>
+                      </a:pPr>
+                      <a:r>
+                        <a:t>False</a:t>
+                      </a:r>
+                    </a:p>
+                  </a:txBody>
+                  <a:tcPr/>
+                </a:tc>
+                <a:tc>
+                  <a:txBody>
+                    <a:bodyPr/>
+                    <a:lstStyle/>
+                    <a:p>
+                      <a:pPr>
+                        <a:defRPr sz="750">
+                          <a:solidFill>
+                            <a:srgbClr val="111827"/>
+                          </a:solidFill>
+                          <a:latin typeface="Arial"/>
+                        </a:defRPr>
+                      </a:pPr>
+                      <a:r>
+                        <a:t>0.6018</a:t>
+                      </a:r>
+                    </a:p>
+                  </a:txBody>
+                  <a:tcPr/>
+                </a:tc>
+                <a:tc>
+                  <a:txBody>
+                    <a:bodyPr/>
+                    <a:lstStyle/>
+                    <a:p>
+                      <a:pPr>
+                        <a:defRPr sz="750">
+                          <a:solidFill>
+                            <a:srgbClr val="111827"/>
+                          </a:solidFill>
+                          <a:latin typeface="Arial"/>
+                        </a:defRPr>
+                      </a:pPr>
+                      <a:r>
+                        <a:t>0.3683</a:t>
+                      </a:r>
+                    </a:p>
+                  </a:txBody>
+                  <a:tcPr/>
+                </a:tc>
+                <a:tc>
+                  <a:txBody>
+                    <a:bodyPr/>
+                    <a:lstStyle/>
+                    <a:p>
+                      <a:pPr>
+                        <a:defRPr sz="750">
+                          <a:solidFill>
+                            <a:srgbClr val="111827"/>
+                          </a:solidFill>
+                          <a:latin typeface="Arial"/>
+                        </a:defRPr>
+                      </a:pPr>
+                      <a:r>
+                        <a:t>0.3764</a:t>
+                      </a:r>
+                    </a:p>
+                  </a:txBody>
+                  <a:tcPr/>
+                </a:tc>
+                <a:tc>
+                  <a:txBody>
+                    <a:bodyPr/>
+                    <a:lstStyle/>
+                    <a:p>
+                      <a:pPr>
+                        <a:defRPr sz="750">
+                          <a:solidFill>
+                            <a:srgbClr val="111827"/>
+                          </a:solidFill>
+                          <a:latin typeface="Arial"/>
+                        </a:defRPr>
+                      </a:pPr>
+                      <a:r>
+                        <a:t>0.9255</a:t>
+                      </a:r>
+                    </a:p>
+                  </a:txBody>
+                  <a:tcPr/>
+                </a:tc>
+                <a:tc>
+                  <a:txBody>
+                    <a:bodyPr/>
+                    <a:lstStyle/>
+                    <a:p>
+                      <a:pPr>
+                        <a:defRPr sz="750">
+                          <a:solidFill>
+                            <a:srgbClr val="111827"/>
+                          </a:solidFill>
+                          <a:latin typeface="Arial"/>
+                        </a:defRPr>
+                      </a:pPr>
+                      <a:r>
+                        <a:t>0.2232</a:t>
+                      </a:r>
+                    </a:p>
+                  </a:txBody>
+                  <a:tcPr/>
+                </a:tc>
+              </a:tr>
+              <a:tr h="311971">
+                <a:tc>
+                  <a:txBody>
+                    <a:bodyPr/>
+                    <a:lstStyle/>
+                    <a:p>
+                      <a:pPr>
+                        <a:defRPr sz="750">
+                          <a:solidFill>
+                            <a:srgbClr val="111827"/>
+                          </a:solidFill>
+                          <a:latin typeface="Arial"/>
+                        </a:defRPr>
+                      </a:pPr>
+                      <a:r>
+                        <a:t>KNNWithMeans</a:t>
+                      </a:r>
+                    </a:p>
+                  </a:txBody>
+                  <a:tcPr/>
+                </a:tc>
+                <a:tc>
+                  <a:txBody>
+                    <a:bodyPr/>
+                    <a:lstStyle/>
+                    <a:p>
+                      <a:pPr>
+                        <a:defRPr sz="750">
+                          <a:solidFill>
+                            <a:srgbClr val="111827"/>
+                          </a:solidFill>
+                          <a:latin typeface="Arial"/>
+                        </a:defRPr>
+                      </a:pPr>
+                      <a:r>
+                        <a:t>User</a:t>
+                      </a:r>
+                    </a:p>
+                  </a:txBody>
+                  <a:tcPr/>
+                </a:tc>
+                <a:tc>
+                  <a:txBody>
+                    <a:bodyPr/>
+                    <a:lstStyle/>
+                    <a:p>
+                      <a:pPr>
+                        <a:defRPr sz="750">
+                          <a:solidFill>
+                            <a:srgbClr val="111827"/>
+                          </a:solidFill>
+                          <a:latin typeface="Arial"/>
+                        </a:defRPr>
+                      </a:pPr>
+                      <a:r>
+                        <a:t>True</a:t>
+                      </a:r>
+                    </a:p>
+                  </a:txBody>
+                  <a:tcPr/>
+                </a:tc>
+                <a:tc>
+                  <a:txBody>
+                    <a:bodyPr/>
+                    <a:lstStyle/>
+                    <a:p>
+                      <a:pPr>
+                        <a:defRPr sz="750">
+                          <a:solidFill>
+                            <a:srgbClr val="111827"/>
+                          </a:solidFill>
+                          <a:latin typeface="Arial"/>
+                        </a:defRPr>
+                      </a:pPr>
+                      <a:r>
+                        <a:t>0.5404</a:t>
+                      </a:r>
+                    </a:p>
+                  </a:txBody>
+                  <a:tcPr/>
+                </a:tc>
+                <a:tc>
+                  <a:txBody>
+                    <a:bodyPr/>
+                    <a:lstStyle/>
+                    <a:p>
+                      <a:pPr>
+                        <a:defRPr sz="750">
+                          <a:solidFill>
+                            <a:srgbClr val="111827"/>
+                          </a:solidFill>
+                          <a:latin typeface="Arial"/>
+                        </a:defRPr>
+                      </a:pPr>
+                      <a:r>
+                        <a:t>0.2982</a:t>
+                      </a:r>
+                    </a:p>
+                  </a:txBody>
+                  <a:tcPr/>
+                </a:tc>
+                <a:tc>
+                  <a:txBody>
+                    <a:bodyPr/>
+                    <a:lstStyle/>
+                    <a:p>
+                      <a:pPr>
+                        <a:defRPr sz="750">
+                          <a:solidFill>
+                            <a:srgbClr val="111827"/>
+                          </a:solidFill>
+                          <a:latin typeface="Arial"/>
+                        </a:defRPr>
+                      </a:pPr>
+                      <a:r>
+                        <a:t>0.3487</a:t>
+                      </a:r>
+                    </a:p>
+                  </a:txBody>
+                  <a:tcPr/>
+                </a:tc>
+                <a:tc>
+                  <a:txBody>
+                    <a:bodyPr/>
+                    <a:lstStyle/>
+                    <a:p>
+                      <a:pPr>
+                        <a:defRPr sz="750">
+                          <a:solidFill>
+                            <a:srgbClr val="111827"/>
+                          </a:solidFill>
+                          <a:latin typeface="Arial"/>
+                        </a:defRPr>
+                      </a:pPr>
+                      <a:r>
+                        <a:t>0.0420</a:t>
+                      </a:r>
+                    </a:p>
+                  </a:txBody>
+                  <a:tcPr/>
+                </a:tc>
+                <a:tc>
+                  <a:txBody>
+                    <a:bodyPr/>
+                    <a:lstStyle/>
+                    <a:p>
+                      <a:pPr>
+                        <a:defRPr sz="750">
+                          <a:solidFill>
+                            <a:srgbClr val="111827"/>
+                          </a:solidFill>
+                          <a:latin typeface="Arial"/>
+                        </a:defRPr>
+                      </a:pPr>
+                      <a:r>
+                        <a:t>0.0723</a:t>
+                      </a:r>
+                    </a:p>
+                  </a:txBody>
+                  <a:tcPr/>
+                </a:tc>
+              </a:tr>
+              <a:tr h="311971">
+                <a:tc>
+                  <a:txBody>
+                    <a:bodyPr/>
+                    <a:lstStyle/>
+                    <a:p>
+                      <a:pPr>
+                        <a:defRPr sz="750">
+                          <a:solidFill>
+                            <a:srgbClr val="111827"/>
+                          </a:solidFill>
+                          <a:latin typeface="Arial"/>
+                        </a:defRPr>
+                      </a:pPr>
+                      <a:r>
+                        <a:t>KNNWithZScore</a:t>
+                      </a:r>
+                    </a:p>
+                  </a:txBody>
+                  <a:tcPr/>
+                </a:tc>
+                <a:tc>
+                  <a:txBody>
+                    <a:bodyPr/>
+                    <a:lstStyle/>
+                    <a:p>
+                      <a:pPr>
+                        <a:defRPr sz="750">
+                          <a:solidFill>
+                            <a:srgbClr val="111827"/>
+                          </a:solidFill>
+                          <a:latin typeface="Arial"/>
+                        </a:defRPr>
+                      </a:pPr>
+                      <a:r>
+                        <a:t>User</a:t>
+                      </a:r>
+                    </a:p>
+                  </a:txBody>
+                  <a:tcPr/>
+                </a:tc>
+                <a:tc>
+                  <a:txBody>
+                    <a:bodyPr/>
+                    <a:lstStyle/>
+                    <a:p>
+                      <a:pPr>
+                        <a:defRPr sz="750">
+                          <a:solidFill>
+                            <a:srgbClr val="111827"/>
+                          </a:solidFill>
+                          <a:latin typeface="Arial"/>
+                        </a:defRPr>
+                      </a:pPr>
+                      <a:r>
+                        <a:t>False</a:t>
+                      </a:r>
+                    </a:p>
+                  </a:txBody>
+                  <a:tcPr/>
+                </a:tc>
+                <a:tc>
+                  <a:txBody>
+                    <a:bodyPr/>
+                    <a:lstStyle/>
+                    <a:p>
+                      <a:pPr>
+                        <a:defRPr sz="750">
+                          <a:solidFill>
+                            <a:srgbClr val="111827"/>
+                          </a:solidFill>
+                          <a:latin typeface="Arial"/>
+                        </a:defRPr>
+                      </a:pPr>
+                      <a:r>
+                        <a:t>0.6061</a:t>
+                      </a:r>
+                    </a:p>
+                  </a:txBody>
+                  <a:tcPr/>
+                </a:tc>
+                <a:tc>
+                  <a:txBody>
+                    <a:bodyPr/>
+                    <a:lstStyle/>
+                    <a:p>
+                      <a:pPr>
+                        <a:defRPr sz="750">
+                          <a:solidFill>
+                            <a:srgbClr val="111827"/>
+                          </a:solidFill>
+                          <a:latin typeface="Arial"/>
+                        </a:defRPr>
+                      </a:pPr>
+                      <a:r>
+                        <a:t>0.3735</a:t>
+                      </a:r>
+                    </a:p>
+                  </a:txBody>
+                  <a:tcPr/>
+                </a:tc>
+                <a:tc>
+                  <a:txBody>
+                    <a:bodyPr/>
+                    <a:lstStyle/>
+                    <a:p>
+                      <a:pPr>
+                        <a:defRPr sz="750">
+                          <a:solidFill>
+                            <a:srgbClr val="111827"/>
+                          </a:solidFill>
+                          <a:latin typeface="Arial"/>
+                        </a:defRPr>
+                      </a:pPr>
+                      <a:r>
+                        <a:t>0.3768</a:t>
+                      </a:r>
+                    </a:p>
+                  </a:txBody>
+                  <a:tcPr/>
+                </a:tc>
+                <a:tc>
+                  <a:txBody>
+                    <a:bodyPr/>
+                    <a:lstStyle/>
+                    <a:p>
+                      <a:pPr>
+                        <a:defRPr sz="750">
+                          <a:solidFill>
+                            <a:srgbClr val="111827"/>
+                          </a:solidFill>
+                          <a:latin typeface="Arial"/>
+                        </a:defRPr>
+                      </a:pPr>
+                      <a:r>
+                        <a:t>1.0081</a:t>
+                      </a:r>
+                    </a:p>
+                  </a:txBody>
+                  <a:tcPr/>
+                </a:tc>
+                <a:tc>
+                  <a:txBody>
+                    <a:bodyPr/>
+                    <a:lstStyle/>
+                    <a:p>
+                      <a:pPr>
+                        <a:defRPr sz="750">
+                          <a:solidFill>
+                            <a:srgbClr val="111827"/>
+                          </a:solidFill>
+                          <a:latin typeface="Arial"/>
+                        </a:defRPr>
+                      </a:pPr>
+                      <a:r>
+                        <a:t>0.2353</a:t>
+                      </a:r>
+                    </a:p>
+                  </a:txBody>
+                  <a:tcPr/>
+                </a:tc>
+              </a:tr>
+              <a:tr h="311984">
+                <a:tc>
+                  <a:txBody>
+                    <a:bodyPr/>
+                    <a:lstStyle/>
+                    <a:p>
+                      <a:pPr>
+                        <a:defRPr sz="750">
+                          <a:solidFill>
+                            <a:srgbClr val="111827"/>
+                          </a:solidFill>
+                          <a:latin typeface="Arial"/>
+                        </a:defRPr>
+                      </a:pPr>
+                      <a:r>
+                        <a:t>KNNWithZScore</a:t>
+                      </a:r>
+                    </a:p>
+                  </a:txBody>
+                  <a:tcPr>
+                    <a:solidFill>
+                      <a:srgbClr val="DBEAFE"/>
+                    </a:solidFill>
+                  </a:tcPr>
+                </a:tc>
+                <a:tc>
+                  <a:txBody>
+                    <a:bodyPr/>
+                    <a:lstStyle/>
+                    <a:p>
+                      <a:pPr>
+                        <a:defRPr sz="750">
+                          <a:solidFill>
+                            <a:srgbClr val="111827"/>
+                          </a:solidFill>
+                          <a:latin typeface="Arial"/>
+                        </a:defRPr>
+                      </a:pPr>
+                      <a:r>
+                        <a:t>User</a:t>
+                      </a:r>
+                    </a:p>
+                  </a:txBody>
+                  <a:tcPr>
+                    <a:solidFill>
+                      <a:srgbClr val="DBEAFE"/>
+                    </a:solidFill>
+                  </a:tcPr>
+                </a:tc>
+                <a:tc>
+                  <a:txBody>
+                    <a:bodyPr/>
+                    <a:lstStyle/>
+                    <a:p>
+                      <a:pPr>
+                        <a:defRPr sz="750">
+                          <a:solidFill>
+                            <a:srgbClr val="111827"/>
+                          </a:solidFill>
+                          <a:latin typeface="Arial"/>
+                        </a:defRPr>
+                      </a:pPr>
+                      <a:r>
+                        <a:t>True</a:t>
+                      </a:r>
+                    </a:p>
+                  </a:txBody>
+                  <a:tcPr>
+                    <a:solidFill>
+                      <a:srgbClr val="DBEAFE"/>
+                    </a:solidFill>
+                  </a:tcPr>
+                </a:tc>
+                <a:tc>
+                  <a:txBody>
+                    <a:bodyPr/>
+                    <a:lstStyle/>
+                    <a:p>
+                      <a:pPr>
+                        <a:defRPr sz="750">
+                          <a:solidFill>
+                            <a:srgbClr val="111827"/>
+                          </a:solidFill>
+                          <a:latin typeface="Arial"/>
+                        </a:defRPr>
+                      </a:pPr>
+                      <a:r>
+                        <a:t>0.5428</a:t>
+                      </a:r>
+                    </a:p>
+                  </a:txBody>
+                  <a:tcPr>
+                    <a:solidFill>
+                      <a:srgbClr val="DBEAFE"/>
+                    </a:solidFill>
+                  </a:tcPr>
+                </a:tc>
+                <a:tc>
+                  <a:txBody>
+                    <a:bodyPr/>
+                    <a:lstStyle/>
+                    <a:p>
+                      <a:pPr>
+                        <a:defRPr sz="750">
+                          <a:solidFill>
+                            <a:srgbClr val="111827"/>
+                          </a:solidFill>
+                          <a:latin typeface="Arial"/>
+                        </a:defRPr>
+                      </a:pPr>
+                      <a:r>
+                        <a:t>0.3008</a:t>
+                      </a:r>
+                    </a:p>
+                  </a:txBody>
+                  <a:tcPr>
+                    <a:solidFill>
+                      <a:srgbClr val="DBEAFE"/>
+                    </a:solidFill>
+                  </a:tcPr>
+                </a:tc>
+                <a:tc>
+                  <a:txBody>
+                    <a:bodyPr/>
+                    <a:lstStyle/>
+                    <a:p>
+                      <a:pPr>
+                        <a:defRPr sz="750">
+                          <a:solidFill>
+                            <a:srgbClr val="111827"/>
+                          </a:solidFill>
+                          <a:latin typeface="Arial"/>
+                        </a:defRPr>
+                      </a:pPr>
+                      <a:r>
+                        <a:t>0.3451</a:t>
+                      </a:r>
+                    </a:p>
+                  </a:txBody>
+                  <a:tcPr>
+                    <a:solidFill>
+                      <a:srgbClr val="DBEAFE"/>
+                    </a:solidFill>
+                  </a:tcPr>
+                </a:tc>
+                <a:tc>
+                  <a:txBody>
+                    <a:bodyPr/>
+                    <a:lstStyle/>
+                    <a:p>
+                      <a:pPr>
+                        <a:defRPr sz="750">
+                          <a:solidFill>
+                            <a:srgbClr val="111827"/>
+                          </a:solidFill>
+                          <a:latin typeface="Arial"/>
+                        </a:defRPr>
+                      </a:pPr>
+                      <a:r>
+                        <a:t>0.0450</a:t>
+                      </a:r>
+                    </a:p>
+                  </a:txBody>
+                  <a:tcPr>
+                    <a:solidFill>
+                      <a:srgbClr val="DBEAFE"/>
+                    </a:solidFill>
+                  </a:tcPr>
+                </a:tc>
+                <a:tc>
+                  <a:txBody>
+                    <a:bodyPr/>
+                    <a:lstStyle/>
+                    <a:p>
+                      <a:pPr>
+                        <a:defRPr sz="750">
+                          <a:solidFill>
+                            <a:srgbClr val="111827"/>
+                          </a:solidFill>
+                          <a:latin typeface="Arial"/>
+                        </a:defRPr>
+                      </a:pPr>
+                      <a:r>
+                        <a:t>0.0756</a:t>
+                      </a:r>
+                    </a:p>
+                  </a:txBody>
+                  <a:tcPr>
+                    <a:solidFill>
+                      <a:srgbClr val="DBEAFE"/>
+                    </a:solidFill>
+                  </a:tcPr>
+                </a:tc>
+              </a:tr>
+            </a:tbl>
+          </a:graphicData>
+        </a:graphic>
+      </p:graphicFrame>
+    </p:spTree>
+  </p:cSld>
+  <p:clrMapOvr>
+    <a:masterClrMapping/>
+  </p:clrMapOvr>
+</p:sld>
+</file>
+
+<file path=ppt/slides/slide9.xml><?xml version="1.0" encoding="utf-8"?>
+<p:sld xmlns:a="http://schemas.openxmlformats.org/drawingml/2006/main" xmlns:p="http://schemas.openxmlformats.org/presentationml/2006/main" xmlns:r="http://schemas.openxmlformats.org/officeDocument/2006/relationships">
+  <p:cSld>
+    <p:spTree>
+      <p:nvGrpSpPr>
+        <p:cNvPr id="1" name=""/>
+        <p:cNvGrpSpPr/>
+        <p:nvPr/>
+      </p:nvGrpSpPr>
+      <p:grpSpPr/>
+      <p:sp>
+        <p:nvSpPr>
+          <p:cNvPr id="2" name="Rectangle 1"/>
+          <p:cNvSpPr/>
+          <p:nvPr/>
+        </p:nvSpPr>
+        <p:spPr>
+          <a:xfrm>
+            <a:off x="0" y="0"/>
+            <a:ext cx="12191695" cy="6858000"/>
+          </a:xfrm>
+          <a:prstGeom prst="rect">
+            <a:avLst/>
+          </a:prstGeom>
+          <a:solidFill>
+            <a:srgbClr val="FFFFFF"/>
+          </a:solidFill>
+          <a:ln>
+            <a:solidFill>
+              <a:srgbClr val="FFFFFF"/>
+            </a:solidFill>
+          </a:ln>
+        </p:spPr>
+        <p:style>
+          <a:lnRef idx="1">
+            <a:schemeClr val="accent1"/>
+          </a:lnRef>
+          <a:fillRef idx="3">
+            <a:schemeClr val="accent1"/>
+          </a:fillRef>
+          <a:effectRef idx="2">
+            <a:schemeClr val="accent1"/>
+          </a:effectRef>
+          <a:fontRef idx="minor">
+            <a:schemeClr val="lt1"/>
+          </a:fontRef>
+        </p:style>
+        <p:txBody>
+          <a:bodyPr rtlCol="0" anchor="ctr"/>
+          <a:lstStyle/>
+          <a:p>
+            <a:pPr algn="ctr"/>
+          </a:p>
+        </p:txBody>
+      </p:sp>
+      <p:sp>
+        <p:nvSpPr>
+          <p:cNvPr id="3" name="TextBox 2"/>
+          <p:cNvSpPr txBox="1"/>
+          <p:nvPr/>
+        </p:nvSpPr>
+        <p:spPr>
+          <a:xfrm>
+            <a:off x="640080" y="365760"/>
+            <a:ext cx="10972800" cy="731520"/>
+          </a:xfrm>
+          <a:prstGeom prst="rect">
+            <a:avLst/>
+          </a:prstGeom>
+          <a:noFill/>
+        </p:spPr>
+        <p:txBody>
+          <a:bodyPr wrap="square" lIns="0" tIns="0" rIns="0" bIns="0">
+            <a:spAutoFit/>
+          </a:bodyPr>
+          <a:lstStyle/>
           <a:p>
             <a:pPr>
-              <a:spcBef>
-                <a:spcPts val="1800"/>
-              </a:spcBef>
-              <a:defRPr sz="1500" b="1">
-                <a:solidFill>
-                  <a:srgbClr val="2563EB"/>
-                </a:solidFill>
-                <a:latin typeface="Arial"/>
-              </a:defRPr>
-            </a:pPr>
-            <a:r>
-              <a:t>3. Strategic Roadmap: Hybrid Recipe Recommendation System</a:t>
-            </a:r>
-          </a:p>
-          <a:p>
-            <a:pPr>
-              <a:spcBef>
-                <a:spcPts val="400"/>
-              </a:spcBef>
-              <a:defRPr sz="1250">
+              <a:defRPr sz="2800" b="0">
                 <a:solidFill>
                   <a:srgbClr val="111827"/>
                 </a:solidFill>
@@ -9659,11 +13703,1788 @@
               </a:defRPr>
             </a:pPr>
             <a:r>
-              <a:t>A production culinary recommender should incorporate a hybrid approach: blend collaborative filtering latent factors with content-based features (ingredient TF-IDF, tags, calorie level) and apply contextual guardrails (meal type, prep time constraints, pantry ingredients).</a:t>
+              <a:t>Results: User and Item Based Collaborative Filtering</a:t>
             </a:r>
           </a:p>
         </p:txBody>
       </p:sp>
+      <p:sp>
+        <p:nvSpPr>
+          <p:cNvPr id="4" name="TextBox 3"/>
+          <p:cNvSpPr txBox="1"/>
+          <p:nvPr/>
+        </p:nvSpPr>
+        <p:spPr>
+          <a:xfrm>
+            <a:off x="640080" y="1188720"/>
+            <a:ext cx="5303520" cy="365760"/>
+          </a:xfrm>
+          <a:prstGeom prst="rect">
+            <a:avLst/>
+          </a:prstGeom>
+          <a:noFill/>
+        </p:spPr>
+        <p:txBody>
+          <a:bodyPr wrap="none">
+            <a:spAutoFit/>
+          </a:bodyPr>
+          <a:lstStyle/>
+          <a:p>
+            <a:pPr>
+              <a:defRPr sz="1400">
+                <a:solidFill>
+                  <a:srgbClr val="111827"/>
+                </a:solidFill>
+                <a:latin typeface="Arial"/>
+              </a:defRPr>
+            </a:pPr>
+            <a:r>
+              <a:t>Optimized SVD Model:</a:t>
+            </a:r>
+          </a:p>
+        </p:txBody>
+      </p:sp>
+      <p:sp>
+        <p:nvSpPr>
+          <p:cNvPr id="5" name="TextBox 4"/>
+          <p:cNvSpPr txBox="1"/>
+          <p:nvPr/>
+        </p:nvSpPr>
+        <p:spPr>
+          <a:xfrm>
+            <a:off x="640080" y="1554480"/>
+            <a:ext cx="5303520" cy="365760"/>
+          </a:xfrm>
+          <a:prstGeom prst="rect">
+            <a:avLst/>
+          </a:prstGeom>
+          <a:noFill/>
+        </p:spPr>
+        <p:txBody>
+          <a:bodyPr wrap="none">
+            <a:spAutoFit/>
+          </a:bodyPr>
+          <a:lstStyle/>
+          <a:p>
+            <a:pPr>
+              <a:defRPr sz="1000">
+                <a:solidFill>
+                  <a:srgbClr val="4B5563"/>
+                </a:solidFill>
+                <a:latin typeface="Courier New"/>
+              </a:defRPr>
+            </a:pPr>
+            <a:r>
+              <a:t>Top 10 recommended recipes for user 173579 :</a:t>
+            </a:r>
+          </a:p>
+        </p:txBody>
+      </p:sp>
+      <p:graphicFrame>
+        <p:nvGraphicFramePr>
+          <p:cNvPr id="6" name="Table 5"/>
+          <p:cNvGraphicFramePr>
+            <a:graphicFrameLocks noGrp="1"/>
+          </p:cNvGraphicFramePr>
+          <p:nvPr/>
+        </p:nvGraphicFramePr>
+        <p:xfrm>
+          <a:off x="640080" y="1920240"/>
+          <a:ext cx="5303520" cy="4389120"/>
+        </p:xfrm>
+        <a:graphic>
+          <a:graphicData uri="http://schemas.openxmlformats.org/drawingml/2006/table">
+            <a:tbl>
+              <a:tblPr firstRow="1" bandRow="1">
+                <a:tableStyleId>{5C22544A-7EE6-4342-B048-85BDC9FD1C3A}</a:tableStyleId>
+              </a:tblPr>
+              <a:tblGrid>
+                <a:gridCol w="365760"/>
+                <a:gridCol w="3108960"/>
+                <a:gridCol w="1097280"/>
+                <a:gridCol w="731520"/>
+              </a:tblGrid>
+              <a:tr h="399010">
+                <a:tc>
+                  <a:txBody>
+                    <a:bodyPr/>
+                    <a:lstStyle/>
+                    <a:p>
+                      <a:pPr>
+                        <a:defRPr sz="850" b="1">
+                          <a:solidFill>
+                            <a:srgbClr val="111827"/>
+                          </a:solidFill>
+                          <a:latin typeface="Arial"/>
+                        </a:defRPr>
+                      </a:pPr>
+                    </a:p>
+                  </a:txBody>
+                  <a:tcPr/>
+                </a:tc>
+                <a:tc>
+                  <a:txBody>
+                    <a:bodyPr/>
+                    <a:lstStyle/>
+                    <a:p>
+                      <a:pPr>
+                        <a:defRPr sz="850" b="1">
+                          <a:solidFill>
+                            <a:srgbClr val="111827"/>
+                          </a:solidFill>
+                          <a:latin typeface="Arial"/>
+                        </a:defRPr>
+                      </a:pPr>
+                      <a:r>
+                        <a:t>Name</a:t>
+                      </a:r>
+                    </a:p>
+                  </a:txBody>
+                  <a:tcPr/>
+                </a:tc>
+                <a:tc>
+                  <a:txBody>
+                    <a:bodyPr/>
+                    <a:lstStyle/>
+                    <a:p>
+                      <a:pPr>
+                        <a:defRPr sz="850" b="1">
+                          <a:solidFill>
+                            <a:srgbClr val="111827"/>
+                          </a:solidFill>
+                          <a:latin typeface="Arial"/>
+                        </a:defRPr>
+                      </a:pPr>
+                      <a:r>
+                        <a:t>Type</a:t>
+                      </a:r>
+                    </a:p>
+                  </a:txBody>
+                  <a:tcPr/>
+                </a:tc>
+                <a:tc>
+                  <a:txBody>
+                    <a:bodyPr/>
+                    <a:lstStyle/>
+                    <a:p>
+                      <a:pPr>
+                        <a:defRPr sz="850" b="1">
+                          <a:solidFill>
+                            <a:srgbClr val="111827"/>
+                          </a:solidFill>
+                          <a:latin typeface="Arial"/>
+                        </a:defRPr>
+                      </a:pPr>
+                      <a:r>
+                        <a:t>Ratings</a:t>
+                      </a:r>
+                    </a:p>
+                  </a:txBody>
+                  <a:tcPr/>
+                </a:tc>
+              </a:tr>
+              <a:tr h="399010">
+                <a:tc>
+                  <a:txBody>
+                    <a:bodyPr/>
+                    <a:lstStyle/>
+                    <a:p>
+                      <a:pPr>
+                        <a:defRPr sz="800">
+                          <a:solidFill>
+                            <a:srgbClr val="111827"/>
+                          </a:solidFill>
+                          <a:latin typeface="Arial"/>
+                        </a:defRPr>
+                      </a:pPr>
+                      <a:r>
+                        <a:t>0</a:t>
+                      </a:r>
+                    </a:p>
+                  </a:txBody>
+                  <a:tcPr/>
+                </a:tc>
+                <a:tc>
+                  <a:txBody>
+                    <a:bodyPr/>
+                    <a:lstStyle/>
+                    <a:p>
+                      <a:pPr>
+                        <a:defRPr sz="800">
+                          <a:solidFill>
+                            <a:srgbClr val="111827"/>
+                          </a:solidFill>
+                          <a:latin typeface="Arial"/>
+                        </a:defRPr>
+                      </a:pPr>
+                      <a:r>
+                        <a:t>50 whole wheat bread</a:t>
+                      </a:r>
+                    </a:p>
+                  </a:txBody>
+                  <a:tcPr/>
+                </a:tc>
+                <a:tc>
+                  <a:txBody>
+                    <a:bodyPr/>
+                    <a:lstStyle/>
+                    <a:p>
+                      <a:pPr>
+                        <a:defRPr sz="800">
+                          <a:solidFill>
+                            <a:srgbClr val="111827"/>
+                          </a:solidFill>
+                          <a:latin typeface="Arial"/>
+                        </a:defRPr>
+                      </a:pPr>
+                      <a:r>
+                        <a:t>breads</a:t>
+                      </a:r>
+                    </a:p>
+                  </a:txBody>
+                  <a:tcPr/>
+                </a:tc>
+                <a:tc>
+                  <a:txBody>
+                    <a:bodyPr/>
+                    <a:lstStyle/>
+                    <a:p>
+                      <a:pPr>
+                        <a:defRPr sz="800">
+                          <a:solidFill>
+                            <a:srgbClr val="111827"/>
+                          </a:solidFill>
+                          <a:latin typeface="Arial"/>
+                        </a:defRPr>
+                      </a:pPr>
+                      <a:r>
+                        <a:t>4.94</a:t>
+                      </a:r>
+                    </a:p>
+                  </a:txBody>
+                  <a:tcPr/>
+                </a:tc>
+              </a:tr>
+              <a:tr h="399010">
+                <a:tc>
+                  <a:txBody>
+                    <a:bodyPr/>
+                    <a:lstStyle/>
+                    <a:p>
+                      <a:pPr>
+                        <a:defRPr sz="800">
+                          <a:solidFill>
+                            <a:srgbClr val="111827"/>
+                          </a:solidFill>
+                          <a:latin typeface="Arial"/>
+                        </a:defRPr>
+                      </a:pPr>
+                      <a:r>
+                        <a:t>1</a:t>
+                      </a:r>
+                    </a:p>
+                  </a:txBody>
+                  <a:tcPr/>
+                </a:tc>
+                <a:tc>
+                  <a:txBody>
+                    <a:bodyPr/>
+                    <a:lstStyle/>
+                    <a:p>
+                      <a:pPr>
+                        <a:defRPr sz="800">
+                          <a:solidFill>
+                            <a:srgbClr val="111827"/>
+                          </a:solidFill>
+                          <a:latin typeface="Arial"/>
+                        </a:defRPr>
+                      </a:pPr>
+                      <a:r>
+                        <a:t>baby pacifiers shower favors</a:t>
+                      </a:r>
+                    </a:p>
+                  </a:txBody>
+                  <a:tcPr/>
+                </a:tc>
+                <a:tc>
+                  <a:txBody>
+                    <a:bodyPr/>
+                    <a:lstStyle/>
+                    <a:p>
+                      <a:pPr>
+                        <a:defRPr sz="800">
+                          <a:solidFill>
+                            <a:srgbClr val="111827"/>
+                          </a:solidFill>
+                          <a:latin typeface="Arial"/>
+                        </a:defRPr>
+                      </a:pPr>
+                      <a:r>
+                        <a:t>None</a:t>
+                      </a:r>
+                    </a:p>
+                  </a:txBody>
+                  <a:tcPr/>
+                </a:tc>
+                <a:tc>
+                  <a:txBody>
+                    <a:bodyPr/>
+                    <a:lstStyle/>
+                    <a:p>
+                      <a:pPr>
+                        <a:defRPr sz="800">
+                          <a:solidFill>
+                            <a:srgbClr val="111827"/>
+                          </a:solidFill>
+                          <a:latin typeface="Arial"/>
+                        </a:defRPr>
+                      </a:pPr>
+                      <a:r>
+                        <a:t>4.94</a:t>
+                      </a:r>
+                    </a:p>
+                  </a:txBody>
+                  <a:tcPr/>
+                </a:tc>
+              </a:tr>
+              <a:tr h="399010">
+                <a:tc>
+                  <a:txBody>
+                    <a:bodyPr/>
+                    <a:lstStyle/>
+                    <a:p>
+                      <a:pPr>
+                        <a:defRPr sz="800">
+                          <a:solidFill>
+                            <a:srgbClr val="111827"/>
+                          </a:solidFill>
+                          <a:latin typeface="Arial"/>
+                        </a:defRPr>
+                      </a:pPr>
+                      <a:r>
+                        <a:t>2</a:t>
+                      </a:r>
+                    </a:p>
+                  </a:txBody>
+                  <a:tcPr/>
+                </a:tc>
+                <a:tc>
+                  <a:txBody>
+                    <a:bodyPr/>
+                    <a:lstStyle/>
+                    <a:p>
+                      <a:pPr>
+                        <a:defRPr sz="800">
+                          <a:solidFill>
+                            <a:srgbClr val="111827"/>
+                          </a:solidFill>
+                          <a:latin typeface="Arial"/>
+                        </a:defRPr>
+                      </a:pPr>
+                      <a:r>
+                        <a:t>grilled balsamic asparagus</a:t>
+                      </a:r>
+                    </a:p>
+                  </a:txBody>
+                  <a:tcPr/>
+                </a:tc>
+                <a:tc>
+                  <a:txBody>
+                    <a:bodyPr/>
+                    <a:lstStyle/>
+                    <a:p>
+                      <a:pPr>
+                        <a:defRPr sz="800">
+                          <a:solidFill>
+                            <a:srgbClr val="111827"/>
+                          </a:solidFill>
+                          <a:latin typeface="Arial"/>
+                        </a:defRPr>
+                      </a:pPr>
+                      <a:r>
+                        <a:t>side dishes</a:t>
+                      </a:r>
+                    </a:p>
+                  </a:txBody>
+                  <a:tcPr/>
+                </a:tc>
+                <a:tc>
+                  <a:txBody>
+                    <a:bodyPr/>
+                    <a:lstStyle/>
+                    <a:p>
+                      <a:pPr>
+                        <a:defRPr sz="800">
+                          <a:solidFill>
+                            <a:srgbClr val="111827"/>
+                          </a:solidFill>
+                          <a:latin typeface="Arial"/>
+                        </a:defRPr>
+                      </a:pPr>
+                      <a:r>
+                        <a:t>4.94</a:t>
+                      </a:r>
+                    </a:p>
+                  </a:txBody>
+                  <a:tcPr/>
+                </a:tc>
+              </a:tr>
+              <a:tr h="399010">
+                <a:tc>
+                  <a:txBody>
+                    <a:bodyPr/>
+                    <a:lstStyle/>
+                    <a:p>
+                      <a:pPr>
+                        <a:defRPr sz="800">
+                          <a:solidFill>
+                            <a:srgbClr val="111827"/>
+                          </a:solidFill>
+                          <a:latin typeface="Arial"/>
+                        </a:defRPr>
+                      </a:pPr>
+                      <a:r>
+                        <a:t>3</a:t>
+                      </a:r>
+                    </a:p>
+                  </a:txBody>
+                  <a:tcPr/>
+                </a:tc>
+                <a:tc>
+                  <a:txBody>
+                    <a:bodyPr/>
+                    <a:lstStyle/>
+                    <a:p>
+                      <a:pPr>
+                        <a:defRPr sz="800">
+                          <a:solidFill>
+                            <a:srgbClr val="111827"/>
+                          </a:solidFill>
+                          <a:latin typeface="Arial"/>
+                        </a:defRPr>
+                      </a:pPr>
+                      <a:r>
+                        <a:t>grilled pork chops marinade</a:t>
+                      </a:r>
+                    </a:p>
+                  </a:txBody>
+                  <a:tcPr/>
+                </a:tc>
+                <a:tc>
+                  <a:txBody>
+                    <a:bodyPr/>
+                    <a:lstStyle/>
+                    <a:p>
+                      <a:pPr>
+                        <a:defRPr sz="800">
+                          <a:solidFill>
+                            <a:srgbClr val="111827"/>
+                          </a:solidFill>
+                          <a:latin typeface="Arial"/>
+                        </a:defRPr>
+                      </a:pPr>
+                      <a:r>
+                        <a:t>main dish</a:t>
+                      </a:r>
+                    </a:p>
+                  </a:txBody>
+                  <a:tcPr/>
+                </a:tc>
+                <a:tc>
+                  <a:txBody>
+                    <a:bodyPr/>
+                    <a:lstStyle/>
+                    <a:p>
+                      <a:pPr>
+                        <a:defRPr sz="800">
+                          <a:solidFill>
+                            <a:srgbClr val="111827"/>
+                          </a:solidFill>
+                          <a:latin typeface="Arial"/>
+                        </a:defRPr>
+                      </a:pPr>
+                      <a:r>
+                        <a:t>4.92</a:t>
+                      </a:r>
+                    </a:p>
+                  </a:txBody>
+                  <a:tcPr/>
+                </a:tc>
+              </a:tr>
+              <a:tr h="399010">
+                <a:tc>
+                  <a:txBody>
+                    <a:bodyPr/>
+                    <a:lstStyle/>
+                    <a:p>
+                      <a:pPr>
+                        <a:defRPr sz="800">
+                          <a:solidFill>
+                            <a:srgbClr val="111827"/>
+                          </a:solidFill>
+                          <a:latin typeface="Arial"/>
+                        </a:defRPr>
+                      </a:pPr>
+                      <a:r>
+                        <a:t>4</a:t>
+                      </a:r>
+                    </a:p>
+                  </a:txBody>
+                  <a:tcPr/>
+                </a:tc>
+                <a:tc>
+                  <a:txBody>
+                    <a:bodyPr/>
+                    <a:lstStyle/>
+                    <a:p>
+                      <a:pPr>
+                        <a:defRPr sz="800">
+                          <a:solidFill>
+                            <a:srgbClr val="111827"/>
+                          </a:solidFill>
+                          <a:latin typeface="Arial"/>
+                        </a:defRPr>
+                      </a:pPr>
+                      <a:r>
+                        <a:t>key west key lime cake</a:t>
+                      </a:r>
+                    </a:p>
+                  </a:txBody>
+                  <a:tcPr/>
+                </a:tc>
+                <a:tc>
+                  <a:txBody>
+                    <a:bodyPr/>
+                    <a:lstStyle/>
+                    <a:p>
+                      <a:pPr>
+                        <a:defRPr sz="800">
+                          <a:solidFill>
+                            <a:srgbClr val="111827"/>
+                          </a:solidFill>
+                          <a:latin typeface="Arial"/>
+                        </a:defRPr>
+                      </a:pPr>
+                      <a:r>
+                        <a:t>desserts</a:t>
+                      </a:r>
+                    </a:p>
+                  </a:txBody>
+                  <a:tcPr/>
+                </a:tc>
+                <a:tc>
+                  <a:txBody>
+                    <a:bodyPr/>
+                    <a:lstStyle/>
+                    <a:p>
+                      <a:pPr>
+                        <a:defRPr sz="800">
+                          <a:solidFill>
+                            <a:srgbClr val="111827"/>
+                          </a:solidFill>
+                          <a:latin typeface="Arial"/>
+                        </a:defRPr>
+                      </a:pPr>
+                      <a:r>
+                        <a:t>4.91</a:t>
+                      </a:r>
+                    </a:p>
+                  </a:txBody>
+                  <a:tcPr/>
+                </a:tc>
+              </a:tr>
+              <a:tr h="399010">
+                <a:tc>
+                  <a:txBody>
+                    <a:bodyPr/>
+                    <a:lstStyle/>
+                    <a:p>
+                      <a:pPr>
+                        <a:defRPr sz="800">
+                          <a:solidFill>
+                            <a:srgbClr val="111827"/>
+                          </a:solidFill>
+                          <a:latin typeface="Arial"/>
+                        </a:defRPr>
+                      </a:pPr>
+                      <a:r>
+                        <a:t>5</a:t>
+                      </a:r>
+                    </a:p>
+                  </a:txBody>
+                  <a:tcPr/>
+                </a:tc>
+                <a:tc>
+                  <a:txBody>
+                    <a:bodyPr/>
+                    <a:lstStyle/>
+                    <a:p>
+                      <a:pPr>
+                        <a:defRPr sz="800">
+                          <a:solidFill>
+                            <a:srgbClr val="111827"/>
+                          </a:solidFill>
+                          <a:latin typeface="Arial"/>
+                        </a:defRPr>
+                      </a:pPr>
+                      <a:r>
+                        <a:t>kittencal s strawberry shortcake</a:t>
+                      </a:r>
+                    </a:p>
+                  </a:txBody>
+                  <a:tcPr/>
+                </a:tc>
+                <a:tc>
+                  <a:txBody>
+                    <a:bodyPr/>
+                    <a:lstStyle/>
+                    <a:p>
+                      <a:pPr>
+                        <a:defRPr sz="800">
+                          <a:solidFill>
+                            <a:srgbClr val="111827"/>
+                          </a:solidFill>
+                          <a:latin typeface="Arial"/>
+                        </a:defRPr>
+                      </a:pPr>
+                      <a:r>
+                        <a:t>desserts</a:t>
+                      </a:r>
+                    </a:p>
+                  </a:txBody>
+                  <a:tcPr/>
+                </a:tc>
+                <a:tc>
+                  <a:txBody>
+                    <a:bodyPr/>
+                    <a:lstStyle/>
+                    <a:p>
+                      <a:pPr>
+                        <a:defRPr sz="800">
+                          <a:solidFill>
+                            <a:srgbClr val="111827"/>
+                          </a:solidFill>
+                          <a:latin typeface="Arial"/>
+                        </a:defRPr>
+                      </a:pPr>
+                      <a:r>
+                        <a:t>4.91</a:t>
+                      </a:r>
+                    </a:p>
+                  </a:txBody>
+                  <a:tcPr/>
+                </a:tc>
+              </a:tr>
+              <a:tr h="399010">
+                <a:tc>
+                  <a:txBody>
+                    <a:bodyPr/>
+                    <a:lstStyle/>
+                    <a:p>
+                      <a:pPr>
+                        <a:defRPr sz="800">
+                          <a:solidFill>
+                            <a:srgbClr val="111827"/>
+                          </a:solidFill>
+                          <a:latin typeface="Arial"/>
+                        </a:defRPr>
+                      </a:pPr>
+                      <a:r>
+                        <a:t>6</a:t>
+                      </a:r>
+                    </a:p>
+                  </a:txBody>
+                  <a:tcPr/>
+                </a:tc>
+                <a:tc>
+                  <a:txBody>
+                    <a:bodyPr/>
+                    <a:lstStyle/>
+                    <a:p>
+                      <a:pPr>
+                        <a:defRPr sz="800">
+                          <a:solidFill>
+                            <a:srgbClr val="111827"/>
+                          </a:solidFill>
+                          <a:latin typeface="Arial"/>
+                        </a:defRPr>
+                      </a:pPr>
+                      <a:r>
+                        <a:t>melt in your mouth pumpkin bread</a:t>
+                      </a:r>
+                    </a:p>
+                  </a:txBody>
+                  <a:tcPr/>
+                </a:tc>
+                <a:tc>
+                  <a:txBody>
+                    <a:bodyPr/>
+                    <a:lstStyle/>
+                    <a:p>
+                      <a:pPr>
+                        <a:defRPr sz="800">
+                          <a:solidFill>
+                            <a:srgbClr val="111827"/>
+                          </a:solidFill>
+                          <a:latin typeface="Arial"/>
+                        </a:defRPr>
+                      </a:pPr>
+                      <a:r>
+                        <a:t>lunch</a:t>
+                      </a:r>
+                    </a:p>
+                  </a:txBody>
+                  <a:tcPr/>
+                </a:tc>
+                <a:tc>
+                  <a:txBody>
+                    <a:bodyPr/>
+                    <a:lstStyle/>
+                    <a:p>
+                      <a:pPr>
+                        <a:defRPr sz="800">
+                          <a:solidFill>
+                            <a:srgbClr val="111827"/>
+                          </a:solidFill>
+                          <a:latin typeface="Arial"/>
+                        </a:defRPr>
+                      </a:pPr>
+                      <a:r>
+                        <a:t>4.91</a:t>
+                      </a:r>
+                    </a:p>
+                  </a:txBody>
+                  <a:tcPr/>
+                </a:tc>
+              </a:tr>
+              <a:tr h="399010">
+                <a:tc>
+                  <a:txBody>
+                    <a:bodyPr/>
+                    <a:lstStyle/>
+                    <a:p>
+                      <a:pPr>
+                        <a:defRPr sz="800">
+                          <a:solidFill>
+                            <a:srgbClr val="111827"/>
+                          </a:solidFill>
+                          <a:latin typeface="Arial"/>
+                        </a:defRPr>
+                      </a:pPr>
+                      <a:r>
+                        <a:t>7</a:t>
+                      </a:r>
+                    </a:p>
+                  </a:txBody>
+                  <a:tcPr/>
+                </a:tc>
+                <a:tc>
+                  <a:txBody>
+                    <a:bodyPr/>
+                    <a:lstStyle/>
+                    <a:p>
+                      <a:pPr>
+                        <a:defRPr sz="800">
+                          <a:solidFill>
+                            <a:srgbClr val="111827"/>
+                          </a:solidFill>
+                          <a:latin typeface="Arial"/>
+                        </a:defRPr>
+                      </a:pPr>
+                      <a:r>
+                        <a:t>sticky soy wings</a:t>
+                      </a:r>
+                    </a:p>
+                  </a:txBody>
+                  <a:tcPr/>
+                </a:tc>
+                <a:tc>
+                  <a:txBody>
+                    <a:bodyPr/>
+                    <a:lstStyle/>
+                    <a:p>
+                      <a:pPr>
+                        <a:defRPr sz="800">
+                          <a:solidFill>
+                            <a:srgbClr val="111827"/>
+                          </a:solidFill>
+                          <a:latin typeface="Arial"/>
+                        </a:defRPr>
+                      </a:pPr>
+                      <a:r>
+                        <a:t>appetizers</a:t>
+                      </a:r>
+                    </a:p>
+                  </a:txBody>
+                  <a:tcPr/>
+                </a:tc>
+                <a:tc>
+                  <a:txBody>
+                    <a:bodyPr/>
+                    <a:lstStyle/>
+                    <a:p>
+                      <a:pPr>
+                        <a:defRPr sz="800">
+                          <a:solidFill>
+                            <a:srgbClr val="111827"/>
+                          </a:solidFill>
+                          <a:latin typeface="Arial"/>
+                        </a:defRPr>
+                      </a:pPr>
+                      <a:r>
+                        <a:t>4.89</a:t>
+                      </a:r>
+                    </a:p>
+                  </a:txBody>
+                  <a:tcPr/>
+                </a:tc>
+              </a:tr>
+              <a:tr h="399010">
+                <a:tc>
+                  <a:txBody>
+                    <a:bodyPr/>
+                    <a:lstStyle/>
+                    <a:p>
+                      <a:pPr>
+                        <a:defRPr sz="800">
+                          <a:solidFill>
+                            <a:srgbClr val="111827"/>
+                          </a:solidFill>
+                          <a:latin typeface="Arial"/>
+                        </a:defRPr>
+                      </a:pPr>
+                      <a:r>
+                        <a:t>8</a:t>
+                      </a:r>
+                    </a:p>
+                  </a:txBody>
+                  <a:tcPr/>
+                </a:tc>
+                <a:tc>
+                  <a:txBody>
+                    <a:bodyPr/>
+                    <a:lstStyle/>
+                    <a:p>
+                      <a:pPr>
+                        <a:defRPr sz="800">
+                          <a:solidFill>
+                            <a:srgbClr val="111827"/>
+                          </a:solidFill>
+                          <a:latin typeface="Arial"/>
+                        </a:defRPr>
+                      </a:pPr>
+                      <a:r>
+                        <a:t>stove top mac n cheese by alton brown</a:t>
+                      </a:r>
+                    </a:p>
+                  </a:txBody>
+                  <a:tcPr/>
+                </a:tc>
+                <a:tc>
+                  <a:txBody>
+                    <a:bodyPr/>
+                    <a:lstStyle/>
+                    <a:p>
+                      <a:pPr>
+                        <a:defRPr sz="800">
+                          <a:solidFill>
+                            <a:srgbClr val="111827"/>
+                          </a:solidFill>
+                          <a:latin typeface="Arial"/>
+                        </a:defRPr>
+                      </a:pPr>
+                      <a:r>
+                        <a:t>side dishes</a:t>
+                      </a:r>
+                    </a:p>
+                  </a:txBody>
+                  <a:tcPr/>
+                </a:tc>
+                <a:tc>
+                  <a:txBody>
+                    <a:bodyPr/>
+                    <a:lstStyle/>
+                    <a:p>
+                      <a:pPr>
+                        <a:defRPr sz="800">
+                          <a:solidFill>
+                            <a:srgbClr val="111827"/>
+                          </a:solidFill>
+                          <a:latin typeface="Arial"/>
+                        </a:defRPr>
+                      </a:pPr>
+                      <a:r>
+                        <a:t>4.89</a:t>
+                      </a:r>
+                    </a:p>
+                  </a:txBody>
+                  <a:tcPr/>
+                </a:tc>
+              </a:tr>
+              <a:tr h="399020">
+                <a:tc>
+                  <a:txBody>
+                    <a:bodyPr/>
+                    <a:lstStyle/>
+                    <a:p>
+                      <a:pPr>
+                        <a:defRPr sz="800">
+                          <a:solidFill>
+                            <a:srgbClr val="111827"/>
+                          </a:solidFill>
+                          <a:latin typeface="Arial"/>
+                        </a:defRPr>
+                      </a:pPr>
+                      <a:r>
+                        <a:t>9</a:t>
+                      </a:r>
+                    </a:p>
+                  </a:txBody>
+                  <a:tcPr/>
+                </a:tc>
+                <a:tc>
+                  <a:txBody>
+                    <a:bodyPr/>
+                    <a:lstStyle/>
+                    <a:p>
+                      <a:pPr>
+                        <a:defRPr sz="800">
+                          <a:solidFill>
+                            <a:srgbClr val="111827"/>
+                          </a:solidFill>
+                          <a:latin typeface="Arial"/>
+                        </a:defRPr>
+                      </a:pPr>
+                      <a:r>
+                        <a:t>the ultimate lemon meringue pie</a:t>
+                      </a:r>
+                    </a:p>
+                  </a:txBody>
+                  <a:tcPr/>
+                </a:tc>
+                <a:tc>
+                  <a:txBody>
+                    <a:bodyPr/>
+                    <a:lstStyle/>
+                    <a:p>
+                      <a:pPr>
+                        <a:defRPr sz="800">
+                          <a:solidFill>
+                            <a:srgbClr val="111827"/>
+                          </a:solidFill>
+                          <a:latin typeface="Arial"/>
+                        </a:defRPr>
+                      </a:pPr>
+                      <a:r>
+                        <a:t>desserts</a:t>
+                      </a:r>
+                    </a:p>
+                  </a:txBody>
+                  <a:tcPr/>
+                </a:tc>
+                <a:tc>
+                  <a:txBody>
+                    <a:bodyPr/>
+                    <a:lstStyle/>
+                    <a:p>
+                      <a:pPr>
+                        <a:defRPr sz="800">
+                          <a:solidFill>
+                            <a:srgbClr val="111827"/>
+                          </a:solidFill>
+                          <a:latin typeface="Arial"/>
+                        </a:defRPr>
+                      </a:pPr>
+                      <a:r>
+                        <a:t>4.89</a:t>
+                      </a:r>
+                    </a:p>
+                  </a:txBody>
+                  <a:tcPr/>
+                </a:tc>
+              </a:tr>
+            </a:tbl>
+          </a:graphicData>
+        </a:graphic>
+      </p:graphicFrame>
+      <p:sp>
+        <p:nvSpPr>
+          <p:cNvPr id="7" name="TextBox 6"/>
+          <p:cNvSpPr txBox="1"/>
+          <p:nvPr/>
+        </p:nvSpPr>
+        <p:spPr>
+          <a:xfrm>
+            <a:off x="6309360" y="1188720"/>
+            <a:ext cx="5303520" cy="365760"/>
+          </a:xfrm>
+          <a:prstGeom prst="rect">
+            <a:avLst/>
+          </a:prstGeom>
+          <a:noFill/>
+        </p:spPr>
+        <p:txBody>
+          <a:bodyPr wrap="none">
+            <a:spAutoFit/>
+          </a:bodyPr>
+          <a:lstStyle/>
+          <a:p>
+            <a:pPr>
+              <a:defRPr sz="1400">
+                <a:solidFill>
+                  <a:srgbClr val="111827"/>
+                </a:solidFill>
+                <a:latin typeface="Arial"/>
+              </a:defRPr>
+            </a:pPr>
+            <a:r>
+              <a:t>Cluster Based Approach</a:t>
+            </a:r>
+          </a:p>
+        </p:txBody>
+      </p:sp>
+      <p:sp>
+        <p:nvSpPr>
+          <p:cNvPr id="8" name="TextBox 7"/>
+          <p:cNvSpPr txBox="1"/>
+          <p:nvPr/>
+        </p:nvSpPr>
+        <p:spPr>
+          <a:xfrm>
+            <a:off x="6309360" y="1554480"/>
+            <a:ext cx="5303520" cy="365760"/>
+          </a:xfrm>
+          <a:prstGeom prst="rect">
+            <a:avLst/>
+          </a:prstGeom>
+          <a:noFill/>
+        </p:spPr>
+        <p:txBody>
+          <a:bodyPr wrap="none">
+            <a:spAutoFit/>
+          </a:bodyPr>
+          <a:lstStyle/>
+          <a:p>
+            <a:pPr>
+              <a:defRPr sz="1000">
+                <a:solidFill>
+                  <a:srgbClr val="4B5563"/>
+                </a:solidFill>
+                <a:latin typeface="Courier New"/>
+              </a:defRPr>
+            </a:pPr>
+            <a:r>
+              <a:t>Top 10 recommended recipes for user 173579:</a:t>
+            </a:r>
+          </a:p>
+        </p:txBody>
+      </p:sp>
+      <p:graphicFrame>
+        <p:nvGraphicFramePr>
+          <p:cNvPr id="9" name="Table 8"/>
+          <p:cNvGraphicFramePr>
+            <a:graphicFrameLocks noGrp="1"/>
+          </p:cNvGraphicFramePr>
+          <p:nvPr/>
+        </p:nvGraphicFramePr>
+        <p:xfrm>
+          <a:off x="6309360" y="1920240"/>
+          <a:ext cx="5303520" cy="4389120"/>
+        </p:xfrm>
+        <a:graphic>
+          <a:graphicData uri="http://schemas.openxmlformats.org/drawingml/2006/table">
+            <a:tbl>
+              <a:tblPr firstRow="1" bandRow="1">
+                <a:tableStyleId>{5C22544A-7EE6-4342-B048-85BDC9FD1C3A}</a:tableStyleId>
+              </a:tblPr>
+              <a:tblGrid>
+                <a:gridCol w="365760"/>
+                <a:gridCol w="3657600"/>
+                <a:gridCol w="1280160"/>
+              </a:tblGrid>
+              <a:tr h="399010">
+                <a:tc>
+                  <a:txBody>
+                    <a:bodyPr/>
+                    <a:lstStyle/>
+                    <a:p>
+                      <a:pPr>
+                        <a:defRPr sz="850" b="1">
+                          <a:solidFill>
+                            <a:srgbClr val="111827"/>
+                          </a:solidFill>
+                          <a:latin typeface="Arial"/>
+                        </a:defRPr>
+                      </a:pPr>
+                    </a:p>
+                  </a:txBody>
+                  <a:tcPr/>
+                </a:tc>
+                <a:tc>
+                  <a:txBody>
+                    <a:bodyPr/>
+                    <a:lstStyle/>
+                    <a:p>
+                      <a:pPr>
+                        <a:defRPr sz="850" b="1">
+                          <a:solidFill>
+                            <a:srgbClr val="111827"/>
+                          </a:solidFill>
+                          <a:latin typeface="Arial"/>
+                        </a:defRPr>
+                      </a:pPr>
+                      <a:r>
+                        <a:t>name</a:t>
+                      </a:r>
+                    </a:p>
+                  </a:txBody>
+                  <a:tcPr/>
+                </a:tc>
+                <a:tc>
+                  <a:txBody>
+                    <a:bodyPr/>
+                    <a:lstStyle/>
+                    <a:p>
+                      <a:pPr>
+                        <a:defRPr sz="850" b="1">
+                          <a:solidFill>
+                            <a:srgbClr val="111827"/>
+                          </a:solidFill>
+                          <a:latin typeface="Arial"/>
+                        </a:defRPr>
+                      </a:pPr>
+                      <a:r>
+                        <a:t>meal_type</a:t>
+                      </a:r>
+                    </a:p>
+                  </a:txBody>
+                  <a:tcPr/>
+                </a:tc>
+              </a:tr>
+              <a:tr h="399010">
+                <a:tc>
+                  <a:txBody>
+                    <a:bodyPr/>
+                    <a:lstStyle/>
+                    <a:p>
+                      <a:pPr>
+                        <a:defRPr sz="800">
+                          <a:solidFill>
+                            <a:srgbClr val="111827"/>
+                          </a:solidFill>
+                          <a:latin typeface="Arial"/>
+                        </a:defRPr>
+                      </a:pPr>
+                      <a:r>
+                        <a:t>0</a:t>
+                      </a:r>
+                    </a:p>
+                  </a:txBody>
+                  <a:tcPr/>
+                </a:tc>
+                <a:tc>
+                  <a:txBody>
+                    <a:bodyPr/>
+                    <a:lstStyle/>
+                    <a:p>
+                      <a:pPr>
+                        <a:defRPr sz="800">
+                          <a:solidFill>
+                            <a:srgbClr val="111827"/>
+                          </a:solidFill>
+                          <a:latin typeface="Arial"/>
+                        </a:defRPr>
+                      </a:pPr>
+                      <a:r>
+                        <a:t>bacon parmesan brussels sprouts</a:t>
+                      </a:r>
+                    </a:p>
+                  </a:txBody>
+                  <a:tcPr/>
+                </a:tc>
+                <a:tc>
+                  <a:txBody>
+                    <a:bodyPr/>
+                    <a:lstStyle/>
+                    <a:p>
+                      <a:pPr>
+                        <a:defRPr sz="800">
+                          <a:solidFill>
+                            <a:srgbClr val="111827"/>
+                          </a:solidFill>
+                          <a:latin typeface="Arial"/>
+                        </a:defRPr>
+                      </a:pPr>
+                      <a:r>
+                        <a:t>vegetables</a:t>
+                      </a:r>
+                    </a:p>
+                  </a:txBody>
+                  <a:tcPr/>
+                </a:tc>
+              </a:tr>
+              <a:tr h="399010">
+                <a:tc>
+                  <a:txBody>
+                    <a:bodyPr/>
+                    <a:lstStyle/>
+                    <a:p>
+                      <a:pPr>
+                        <a:defRPr sz="800">
+                          <a:solidFill>
+                            <a:srgbClr val="111827"/>
+                          </a:solidFill>
+                          <a:latin typeface="Arial"/>
+                        </a:defRPr>
+                      </a:pPr>
+                      <a:r>
+                        <a:t>1</a:t>
+                      </a:r>
+                    </a:p>
+                  </a:txBody>
+                  <a:tcPr/>
+                </a:tc>
+                <a:tc>
+                  <a:txBody>
+                    <a:bodyPr/>
+                    <a:lstStyle/>
+                    <a:p>
+                      <a:pPr>
+                        <a:defRPr sz="800">
+                          <a:solidFill>
+                            <a:srgbClr val="111827"/>
+                          </a:solidFill>
+                          <a:latin typeface="Arial"/>
+                        </a:defRPr>
+                      </a:pPr>
+                      <a:r>
+                        <a:t>baklava salmon salmon with honey butter walnuts and mustard</a:t>
+                      </a:r>
+                    </a:p>
+                  </a:txBody>
+                  <a:tcPr/>
+                </a:tc>
+                <a:tc>
+                  <a:txBody>
+                    <a:bodyPr/>
+                    <a:lstStyle/>
+                    <a:p>
+                      <a:pPr>
+                        <a:defRPr sz="800">
+                          <a:solidFill>
+                            <a:srgbClr val="111827"/>
+                          </a:solidFill>
+                          <a:latin typeface="Arial"/>
+                        </a:defRPr>
+                      </a:pPr>
+                      <a:r>
+                        <a:t>main dish</a:t>
+                      </a:r>
+                    </a:p>
+                  </a:txBody>
+                  <a:tcPr/>
+                </a:tc>
+              </a:tr>
+              <a:tr h="399010">
+                <a:tc>
+                  <a:txBody>
+                    <a:bodyPr/>
+                    <a:lstStyle/>
+                    <a:p>
+                      <a:pPr>
+                        <a:defRPr sz="800">
+                          <a:solidFill>
+                            <a:srgbClr val="111827"/>
+                          </a:solidFill>
+                          <a:latin typeface="Arial"/>
+                        </a:defRPr>
+                      </a:pPr>
+                      <a:r>
+                        <a:t>2</a:t>
+                      </a:r>
+                    </a:p>
+                  </a:txBody>
+                  <a:tcPr/>
+                </a:tc>
+                <a:tc>
+                  <a:txBody>
+                    <a:bodyPr/>
+                    <a:lstStyle/>
+                    <a:p>
+                      <a:pPr>
+                        <a:defRPr sz="800">
+                          <a:solidFill>
+                            <a:srgbClr val="111827"/>
+                          </a:solidFill>
+                          <a:latin typeface="Arial"/>
+                        </a:defRPr>
+                      </a:pPr>
+                      <a:r>
+                        <a:t>calzone bread machine</a:t>
+                      </a:r>
+                    </a:p>
+                  </a:txBody>
+                  <a:tcPr/>
+                </a:tc>
+                <a:tc>
+                  <a:txBody>
+                    <a:bodyPr/>
+                    <a:lstStyle/>
+                    <a:p>
+                      <a:pPr>
+                        <a:defRPr sz="800">
+                          <a:solidFill>
+                            <a:srgbClr val="111827"/>
+                          </a:solidFill>
+                          <a:latin typeface="Arial"/>
+                        </a:defRPr>
+                      </a:pPr>
+                      <a:r>
+                        <a:t>main dish</a:t>
+                      </a:r>
+                    </a:p>
+                  </a:txBody>
+                  <a:tcPr/>
+                </a:tc>
+              </a:tr>
+              <a:tr h="399010">
+                <a:tc>
+                  <a:txBody>
+                    <a:bodyPr/>
+                    <a:lstStyle/>
+                    <a:p>
+                      <a:pPr>
+                        <a:defRPr sz="800">
+                          <a:solidFill>
+                            <a:srgbClr val="111827"/>
+                          </a:solidFill>
+                          <a:latin typeface="Arial"/>
+                        </a:defRPr>
+                      </a:pPr>
+                      <a:r>
+                        <a:t>3</a:t>
+                      </a:r>
+                    </a:p>
+                  </a:txBody>
+                  <a:tcPr/>
+                </a:tc>
+                <a:tc>
+                  <a:txBody>
+                    <a:bodyPr/>
+                    <a:lstStyle/>
+                    <a:p>
+                      <a:pPr>
+                        <a:defRPr sz="800">
+                          <a:solidFill>
+                            <a:srgbClr val="111827"/>
+                          </a:solidFill>
+                          <a:latin typeface="Arial"/>
+                        </a:defRPr>
+                      </a:pPr>
+                      <a:r>
+                        <a:t>country sausage gravy</a:t>
+                      </a:r>
+                    </a:p>
+                  </a:txBody>
+                  <a:tcPr/>
+                </a:tc>
+                <a:tc>
+                  <a:txBody>
+                    <a:bodyPr/>
+                    <a:lstStyle/>
+                    <a:p>
+                      <a:pPr>
+                        <a:defRPr sz="800">
+                          <a:solidFill>
+                            <a:srgbClr val="111827"/>
+                          </a:solidFill>
+                          <a:latin typeface="Arial"/>
+                        </a:defRPr>
+                      </a:pPr>
+                      <a:r>
+                        <a:t>lunch</a:t>
+                      </a:r>
+                    </a:p>
+                  </a:txBody>
+                  <a:tcPr/>
+                </a:tc>
+              </a:tr>
+              <a:tr h="399010">
+                <a:tc>
+                  <a:txBody>
+                    <a:bodyPr/>
+                    <a:lstStyle/>
+                    <a:p>
+                      <a:pPr>
+                        <a:defRPr sz="800">
+                          <a:solidFill>
+                            <a:srgbClr val="111827"/>
+                          </a:solidFill>
+                          <a:latin typeface="Arial"/>
+                        </a:defRPr>
+                      </a:pPr>
+                      <a:r>
+                        <a:t>4</a:t>
+                      </a:r>
+                    </a:p>
+                  </a:txBody>
+                  <a:tcPr/>
+                </a:tc>
+                <a:tc>
+                  <a:txBody>
+                    <a:bodyPr/>
+                    <a:lstStyle/>
+                    <a:p>
+                      <a:pPr>
+                        <a:defRPr sz="800">
+                          <a:solidFill>
+                            <a:srgbClr val="111827"/>
+                          </a:solidFill>
+                          <a:latin typeface="Arial"/>
+                        </a:defRPr>
+                      </a:pPr>
+                      <a:r>
+                        <a:t>edna s apple crumble aka apple crisp</a:t>
+                      </a:r>
+                    </a:p>
+                  </a:txBody>
+                  <a:tcPr/>
+                </a:tc>
+                <a:tc>
+                  <a:txBody>
+                    <a:bodyPr/>
+                    <a:lstStyle/>
+                    <a:p>
+                      <a:pPr>
+                        <a:defRPr sz="800">
+                          <a:solidFill>
+                            <a:srgbClr val="111827"/>
+                          </a:solidFill>
+                          <a:latin typeface="Arial"/>
+                        </a:defRPr>
+                      </a:pPr>
+                      <a:r>
+                        <a:t>desserts</a:t>
+                      </a:r>
+                    </a:p>
+                  </a:txBody>
+                  <a:tcPr/>
+                </a:tc>
+              </a:tr>
+              <a:tr h="399010">
+                <a:tc>
+                  <a:txBody>
+                    <a:bodyPr/>
+                    <a:lstStyle/>
+                    <a:p>
+                      <a:pPr>
+                        <a:defRPr sz="800">
+                          <a:solidFill>
+                            <a:srgbClr val="111827"/>
+                          </a:solidFill>
+                          <a:latin typeface="Arial"/>
+                        </a:defRPr>
+                      </a:pPr>
+                      <a:r>
+                        <a:t>5</a:t>
+                      </a:r>
+                    </a:p>
+                  </a:txBody>
+                  <a:tcPr/>
+                </a:tc>
+                <a:tc>
+                  <a:txBody>
+                    <a:bodyPr/>
+                    <a:lstStyle/>
+                    <a:p>
+                      <a:pPr>
+                        <a:defRPr sz="800">
+                          <a:solidFill>
+                            <a:srgbClr val="111827"/>
+                          </a:solidFill>
+                          <a:latin typeface="Arial"/>
+                        </a:defRPr>
+                      </a:pPr>
+                      <a:r>
+                        <a:t>parmesan crusted broiled scallops</a:t>
+                      </a:r>
+                    </a:p>
+                  </a:txBody>
+                  <a:tcPr/>
+                </a:tc>
+                <a:tc>
+                  <a:txBody>
+                    <a:bodyPr/>
+                    <a:lstStyle/>
+                    <a:p>
+                      <a:pPr>
+                        <a:defRPr sz="800">
+                          <a:solidFill>
+                            <a:srgbClr val="111827"/>
+                          </a:solidFill>
+                          <a:latin typeface="Arial"/>
+                        </a:defRPr>
+                      </a:pPr>
+                      <a:r>
+                        <a:t>main dish</a:t>
+                      </a:r>
+                    </a:p>
+                  </a:txBody>
+                  <a:tcPr/>
+                </a:tc>
+              </a:tr>
+              <a:tr h="399010">
+                <a:tc>
+                  <a:txBody>
+                    <a:bodyPr/>
+                    <a:lstStyle/>
+                    <a:p>
+                      <a:pPr>
+                        <a:defRPr sz="800">
+                          <a:solidFill>
+                            <a:srgbClr val="111827"/>
+                          </a:solidFill>
+                          <a:latin typeface="Arial"/>
+                        </a:defRPr>
+                      </a:pPr>
+                      <a:r>
+                        <a:t>6</a:t>
+                      </a:r>
+                    </a:p>
+                  </a:txBody>
+                  <a:tcPr/>
+                </a:tc>
+                <a:tc>
+                  <a:txBody>
+                    <a:bodyPr/>
+                    <a:lstStyle/>
+                    <a:p>
+                      <a:pPr>
+                        <a:defRPr sz="800">
+                          <a:solidFill>
+                            <a:srgbClr val="111827"/>
+                          </a:solidFill>
+                          <a:latin typeface="Arial"/>
+                        </a:defRPr>
+                      </a:pPr>
+                      <a:r>
+                        <a:t>quick and easy salsa with black beans and corn</a:t>
+                      </a:r>
+                    </a:p>
+                  </a:txBody>
+                  <a:tcPr/>
+                </a:tc>
+                <a:tc>
+                  <a:txBody>
+                    <a:bodyPr/>
+                    <a:lstStyle/>
+                    <a:p>
+                      <a:pPr>
+                        <a:defRPr sz="800">
+                          <a:solidFill>
+                            <a:srgbClr val="111827"/>
+                          </a:solidFill>
+                          <a:latin typeface="Arial"/>
+                        </a:defRPr>
+                      </a:pPr>
+                      <a:r>
+                        <a:t>condiments etc</a:t>
+                      </a:r>
+                    </a:p>
+                  </a:txBody>
+                  <a:tcPr/>
+                </a:tc>
+              </a:tr>
+              <a:tr h="399010">
+                <a:tc>
+                  <a:txBody>
+                    <a:bodyPr/>
+                    <a:lstStyle/>
+                    <a:p>
+                      <a:pPr>
+                        <a:defRPr sz="800">
+                          <a:solidFill>
+                            <a:srgbClr val="111827"/>
+                          </a:solidFill>
+                          <a:latin typeface="Arial"/>
+                        </a:defRPr>
+                      </a:pPr>
+                      <a:r>
+                        <a:t>7</a:t>
+                      </a:r>
+                    </a:p>
+                  </a:txBody>
+                  <a:tcPr/>
+                </a:tc>
+                <a:tc>
+                  <a:txBody>
+                    <a:bodyPr/>
+                    <a:lstStyle/>
+                    <a:p>
+                      <a:pPr>
+                        <a:defRPr sz="800">
+                          <a:solidFill>
+                            <a:srgbClr val="111827"/>
+                          </a:solidFill>
+                          <a:latin typeface="Arial"/>
+                        </a:defRPr>
+                      </a:pPr>
+                      <a:r>
+                        <a:t>romano s macaroni grill rosemary bread</a:t>
+                      </a:r>
+                    </a:p>
+                  </a:txBody>
+                  <a:tcPr/>
+                </a:tc>
+                <a:tc>
+                  <a:txBody>
+                    <a:bodyPr/>
+                    <a:lstStyle/>
+                    <a:p>
+                      <a:pPr>
+                        <a:defRPr sz="800">
+                          <a:solidFill>
+                            <a:srgbClr val="111827"/>
+                          </a:solidFill>
+                          <a:latin typeface="Arial"/>
+                        </a:defRPr>
+                      </a:pPr>
+                      <a:r>
+                        <a:t>other</a:t>
+                      </a:r>
+                    </a:p>
+                  </a:txBody>
+                  <a:tcPr/>
+                </a:tc>
+              </a:tr>
+              <a:tr h="399010">
+                <a:tc>
+                  <a:txBody>
+                    <a:bodyPr/>
+                    <a:lstStyle/>
+                    <a:p>
+                      <a:pPr>
+                        <a:defRPr sz="800">
+                          <a:solidFill>
+                            <a:srgbClr val="111827"/>
+                          </a:solidFill>
+                          <a:latin typeface="Arial"/>
+                        </a:defRPr>
+                      </a:pPr>
+                      <a:r>
+                        <a:t>8</a:t>
+                      </a:r>
+                    </a:p>
+                  </a:txBody>
+                  <a:tcPr/>
+                </a:tc>
+                <a:tc>
+                  <a:txBody>
+                    <a:bodyPr/>
+                    <a:lstStyle/>
+                    <a:p>
+                      <a:pPr>
+                        <a:defRPr sz="800">
+                          <a:solidFill>
+                            <a:srgbClr val="111827"/>
+                          </a:solidFill>
+                          <a:latin typeface="Arial"/>
+                        </a:defRPr>
+                      </a:pPr>
+                      <a:r>
+                        <a:t>salmon and asparagus in foil</a:t>
+                      </a:r>
+                    </a:p>
+                  </a:txBody>
+                  <a:tcPr/>
+                </a:tc>
+                <a:tc>
+                  <a:txBody>
+                    <a:bodyPr/>
+                    <a:lstStyle/>
+                    <a:p>
+                      <a:pPr>
+                        <a:defRPr sz="800">
+                          <a:solidFill>
+                            <a:srgbClr val="111827"/>
+                          </a:solidFill>
+                          <a:latin typeface="Arial"/>
+                        </a:defRPr>
+                      </a:pPr>
+                      <a:r>
+                        <a:t>main dish</a:t>
+                      </a:r>
+                    </a:p>
+                  </a:txBody>
+                  <a:tcPr/>
+                </a:tc>
+              </a:tr>
+              <a:tr h="399020">
+                <a:tc>
+                  <a:txBody>
+                    <a:bodyPr/>
+                    <a:lstStyle/>
+                    <a:p>
+                      <a:pPr>
+                        <a:defRPr sz="800">
+                          <a:solidFill>
+                            <a:srgbClr val="111827"/>
+                          </a:solidFill>
+                          <a:latin typeface="Arial"/>
+                        </a:defRPr>
+                      </a:pPr>
+                      <a:r>
+                        <a:t>9</a:t>
+                      </a:r>
+                    </a:p>
+                  </a:txBody>
+                  <a:tcPr/>
+                </a:tc>
+                <a:tc>
+                  <a:txBody>
+                    <a:bodyPr/>
+                    <a:lstStyle/>
+                    <a:p>
+                      <a:pPr>
+                        <a:defRPr sz="800">
+                          <a:solidFill>
+                            <a:srgbClr val="111827"/>
+                          </a:solidFill>
+                          <a:latin typeface="Arial"/>
+                        </a:defRPr>
+                      </a:pPr>
+                      <a:r>
+                        <a:t>the best blueberry buttermilk pancakes</a:t>
+                      </a:r>
+                    </a:p>
+                  </a:txBody>
+                  <a:tcPr/>
+                </a:tc>
+                <a:tc>
+                  <a:txBody>
+                    <a:bodyPr/>
+                    <a:lstStyle/>
+                    <a:p>
+                      <a:pPr>
+                        <a:defRPr sz="800">
+                          <a:solidFill>
+                            <a:srgbClr val="111827"/>
+                          </a:solidFill>
+                          <a:latin typeface="Arial"/>
+                        </a:defRPr>
+                      </a:pPr>
+                      <a:r>
+                        <a:t>brunch</a:t>
+                      </a:r>
+                    </a:p>
+                  </a:txBody>
+                  <a:tcPr/>
+                </a:tc>
+              </a:tr>
+            </a:tbl>
+          </a:graphicData>
+        </a:graphic>
+      </p:graphicFrame>
     </p:spTree>
   </p:cSld>
   <p:clrMapOvr>

--- a/Recipe_Recommender_Presentation.pptx
+++ b/Recipe_Recommender_Presentation.pptx
@@ -3354,7 +3354,7 @@
                 </a:solidFill>
                 <a:latin typeface="Arial"/>
               </a:rPr>
-              <a:t>Libraries and Frameworks: </a:t>
+              <a:t>Kaggle Dataset: </a:t>
             </a:r>
             <a:r>
               <a:rPr sz="1150">
@@ -3363,7 +3363,7 @@
                 </a:solidFill>
                 <a:latin typeface="Arial"/>
               </a:rPr>
-              <a:t>Python, Scikit Surprise, Pandas, NumPy, Scikit Learn, Matplotlib, NLTK</a:t>
+              <a:t>https://www.kaggle.com/datasets/shuyangli94/food-com-recipes-and-user-interactions</a:t>
             </a:r>
           </a:p>
           <a:p>
@@ -3379,7 +3379,7 @@
                 </a:solidFill>
                 <a:latin typeface="Arial"/>
               </a:rPr>
-              <a:t>Project Repository: </a:t>
+              <a:t>Libraries and Frameworks: </a:t>
             </a:r>
             <a:r>
               <a:rPr sz="1150">
@@ -3388,7 +3388,7 @@
                 </a:solidFill>
                 <a:latin typeface="Arial"/>
               </a:rPr>
-              <a:t>Food.com Recipe Recommendation System by Vidhya Walke</a:t>
+              <a:t>Python, Scikit Surprise, Pandas, NumPy, Scikit Learn, Matplotlib, NLTK</a:t>
             </a:r>
           </a:p>
         </p:txBody>
